--- a/refunds-abuse-duplicates-bulk/refunds-abuse-duplicates-bulk.pptx
+++ b/refunds-abuse-duplicates-bulk/refunds-abuse-duplicates-bulk.pptx
@@ -3872,7 +3872,7 @@
   <p:cSld>
     <p:spTree>
       <p:nvGrpSpPr>
-        <p:cNvPr id="531" name="Shape 531"/>
+        <p:cNvPr id="532" name="Shape 532"/>
         <p:cNvGrpSpPr/>
         <p:nvPr/>
       </p:nvGrpSpPr>
@@ -3886,7 +3886,7 @@
       </p:grpSpPr>
       <p:sp>
         <p:nvSpPr>
-          <p:cNvPr id="532" name="Google Shape;532;p21:notes"/>
+          <p:cNvPr id="533" name="Google Shape;533;p21:notes"/>
           <p:cNvSpPr/>
           <p:nvPr>
             <p:ph idx="2" type="sldImg"/>
@@ -3931,7 +3931,7 @@
       </p:sp>
       <p:sp>
         <p:nvSpPr>
-          <p:cNvPr id="533" name="Google Shape;533;p21:notes"/>
+          <p:cNvPr id="534" name="Google Shape;534;p21:notes"/>
           <p:cNvSpPr txBox="1"/>
           <p:nvPr>
             <p:ph idx="1" type="body"/>
@@ -3991,7 +3991,7 @@
       </p:sp>
       <p:sp>
         <p:nvSpPr>
-          <p:cNvPr id="534" name="Google Shape;534;p21:notes"/>
+          <p:cNvPr id="535" name="Google Shape;535;p21:notes"/>
           <p:cNvSpPr txBox="1"/>
           <p:nvPr>
             <p:ph idx="12" type="sldNum"/>
@@ -4050,7 +4050,7 @@
   <p:cSld>
     <p:spTree>
       <p:nvGrpSpPr>
-        <p:cNvPr id="561" name="Shape 561"/>
+        <p:cNvPr id="562" name="Shape 562"/>
         <p:cNvGrpSpPr/>
         <p:nvPr/>
       </p:nvGrpSpPr>
@@ -4064,7 +4064,7 @@
       </p:grpSpPr>
       <p:sp>
         <p:nvSpPr>
-          <p:cNvPr id="562" name="Google Shape;562;p22:notes"/>
+          <p:cNvPr id="563" name="Google Shape;563;p22:notes"/>
           <p:cNvSpPr/>
           <p:nvPr>
             <p:ph idx="2" type="sldImg"/>
@@ -4109,7 +4109,7 @@
       </p:sp>
       <p:sp>
         <p:nvSpPr>
-          <p:cNvPr id="563" name="Google Shape;563;p22:notes"/>
+          <p:cNvPr id="564" name="Google Shape;564;p22:notes"/>
           <p:cNvSpPr txBox="1"/>
           <p:nvPr>
             <p:ph idx="1" type="body"/>
@@ -4157,7 +4157,7 @@
       </p:sp>
       <p:sp>
         <p:nvSpPr>
-          <p:cNvPr id="564" name="Google Shape;564;p22:notes"/>
+          <p:cNvPr id="565" name="Google Shape;565;p22:notes"/>
           <p:cNvSpPr txBox="1"/>
           <p:nvPr>
             <p:ph idx="12" type="sldNum"/>
@@ -4216,7 +4216,7 @@
   <p:cSld>
     <p:spTree>
       <p:nvGrpSpPr>
-        <p:cNvPr id="593" name="Shape 593"/>
+        <p:cNvPr id="594" name="Shape 594"/>
         <p:cNvGrpSpPr/>
         <p:nvPr/>
       </p:nvGrpSpPr>
@@ -4230,7 +4230,7 @@
       </p:grpSpPr>
       <p:sp>
         <p:nvSpPr>
-          <p:cNvPr id="594" name="Google Shape;594;p23:notes"/>
+          <p:cNvPr id="595" name="Google Shape;595;p23:notes"/>
           <p:cNvSpPr/>
           <p:nvPr>
             <p:ph idx="2" type="sldImg"/>
@@ -4275,7 +4275,7 @@
       </p:sp>
       <p:sp>
         <p:nvSpPr>
-          <p:cNvPr id="595" name="Google Shape;595;p23:notes"/>
+          <p:cNvPr id="596" name="Google Shape;596;p23:notes"/>
           <p:cNvSpPr txBox="1"/>
           <p:nvPr>
             <p:ph idx="1" type="body"/>
@@ -4323,7 +4323,7 @@
       </p:sp>
       <p:sp>
         <p:nvSpPr>
-          <p:cNvPr id="596" name="Google Shape;596;p23:notes"/>
+          <p:cNvPr id="597" name="Google Shape;597;p23:notes"/>
           <p:cNvSpPr txBox="1"/>
           <p:nvPr>
             <p:ph idx="12" type="sldNum"/>
@@ -4382,7 +4382,7 @@
   <p:cSld>
     <p:spTree>
       <p:nvGrpSpPr>
-        <p:cNvPr id="626" name="Shape 626"/>
+        <p:cNvPr id="627" name="Shape 627"/>
         <p:cNvGrpSpPr/>
         <p:nvPr/>
       </p:nvGrpSpPr>
@@ -4396,7 +4396,7 @@
       </p:grpSpPr>
       <p:sp>
         <p:nvSpPr>
-          <p:cNvPr id="627" name="Google Shape;627;p24:notes"/>
+          <p:cNvPr id="628" name="Google Shape;628;p24:notes"/>
           <p:cNvSpPr/>
           <p:nvPr>
             <p:ph idx="2" type="sldImg"/>
@@ -4441,7 +4441,7 @@
       </p:sp>
       <p:sp>
         <p:nvSpPr>
-          <p:cNvPr id="628" name="Google Shape;628;p24:notes"/>
+          <p:cNvPr id="629" name="Google Shape;629;p24:notes"/>
           <p:cNvSpPr txBox="1"/>
           <p:nvPr>
             <p:ph idx="1" type="body"/>
@@ -4489,7 +4489,7 @@
       </p:sp>
       <p:sp>
         <p:nvSpPr>
-          <p:cNvPr id="629" name="Google Shape;629;p24:notes"/>
+          <p:cNvPr id="630" name="Google Shape;630;p24:notes"/>
           <p:cNvSpPr txBox="1"/>
           <p:nvPr>
             <p:ph idx="12" type="sldNum"/>
@@ -4548,7 +4548,7 @@
   <p:cSld>
     <p:spTree>
       <p:nvGrpSpPr>
-        <p:cNvPr id="657" name="Shape 657"/>
+        <p:cNvPr id="658" name="Shape 658"/>
         <p:cNvGrpSpPr/>
         <p:nvPr/>
       </p:nvGrpSpPr>
@@ -4562,7 +4562,7 @@
       </p:grpSpPr>
       <p:sp>
         <p:nvSpPr>
-          <p:cNvPr id="658" name="Google Shape;658;p25:notes"/>
+          <p:cNvPr id="659" name="Google Shape;659;p25:notes"/>
           <p:cNvSpPr/>
           <p:nvPr>
             <p:ph idx="2" type="sldImg"/>
@@ -4607,7 +4607,7 @@
       </p:sp>
       <p:sp>
         <p:nvSpPr>
-          <p:cNvPr id="659" name="Google Shape;659;p25:notes"/>
+          <p:cNvPr id="660" name="Google Shape;660;p25:notes"/>
           <p:cNvSpPr txBox="1"/>
           <p:nvPr>
             <p:ph idx="1" type="body"/>
@@ -4632,22 +4632,34 @@
           </a:bodyPr>
           <a:lstStyle/>
           <a:p>
-            <a:pPr indent="0" lvl="0" marL="0" rtl="0" algn="l">
-              <a:lnSpc>
-                <a:spcPct val="100000"/>
-              </a:lnSpc>
-              <a:spcBef>
-                <a:spcPts val="0"/>
-              </a:spcBef>
-              <a:spcAft>
-                <a:spcPts val="0"/>
-              </a:spcAft>
+            <a:pPr indent="-228600" lvl="0" marL="457200" marR="0" rtl="0" algn="l">
+              <a:lnSpc>
+                <a:spcPct val="100000"/>
+              </a:lnSpc>
+              <a:spcBef>
+                <a:spcPts val="0"/>
+              </a:spcBef>
+              <a:spcAft>
+                <a:spcPts val="0"/>
+              </a:spcAft>
+              <a:buClr>
+                <a:srgbClr val="000000"/>
+              </a:buClr>
               <a:buSzPts val="1400"/>
-              <a:buNone/>
-            </a:pPr>
-            <a:r>
-              <a:rPr lang="en-US"/>
-              <a:t>Bulk charges happen when a customer's FC monthly fee has been overdue for multiple billing cycles, and a payment attempt finally goes through. The system charges all the past-due months in a single transaction, so the customer sees several MF charges posted on the same day: each one for a different month they missed, not a duplicate of the same charge. This applies to both DHJ and FCF memberships: the overdue-then-bulk-charge mechanic and the true-up/retention logic are the same. Why it's happening more now: as of September 12, 2024, the system stopped auto-issuing free months to true up overdue accounts. Before that, if a customer got successfully charged after falling behind, the system quietly forgave the gap with free months. Now it bills the whole backlog at once, so the proactive true-up (Branch A) falls to agents. Why this matters: a wall of same-day charges reads as a billing error to the customer, even when every dollar was owed. Your job isn't to apologize for a correct charge: it's to figure out whether the customer got real value for those months (were they using the service, or did they not even know they were being billed) and let that drive how much you fix. Prevention: if you can see a bulk charge coming, it's cheaper for everyone to head it off with free months than to untangle a large charge and an upset customer afterwards.</a:t>
+              <a:buFont typeface="Arial"/>
+              <a:buNone/>
+            </a:pPr>
+            <a:r>
+              <a:rPr b="0" i="0" lang="en-US" spc="0" sz="1200" u="none" cap="none" strike="noStrike">
+                <a:solidFill>
+                  <a:schemeClr val="dk1"/>
+                </a:solidFill>
+                <a:latin typeface="Calibri"/>
+                <a:ea typeface="Calibri"/>
+                <a:cs typeface="Calibri"/>
+                <a:sym typeface="Calibri"/>
+              </a:rPr>
+              <a:t>Bulk charges happen when a customer's ForeverClean (FC) monthly fee has been overdue for multiple billing cycles, and a payment attempt finally goes through. Instead of billing one overdue month at a time, the system charges all the past-due months in a single transaction. The customer ends up seeing several MF charges posted on the same day or within the same month: each one for a different month they missed, not a duplicate of the same charge. Screenshot (sample Payment history): four $59 MF charges on Oct 1, each with a different foreverclean_paid_through date (1/27, 2/27, 3/27, 4/27): four missed months, not duplicates. This applies to both DHJ and FCF memberships. Since September 12, 2024, the system no longer auto-issues free months to true up overdue accounts, so the proactive true-up (Branch A) falls to agents. A wall of same-day charges reads as a billing error to the customer, even when every dollar was owed. Your job is to figure out whether the customer got real value for those months (using the service, or didn't know they were billed) and let that drive how much you fix. Three reasons it reaches you: A) FC overdue, but that's not why C wrote in; B) FC already cancelled and C wants a refund; C) FC active and C wants to cancel because of the bulk charge.</a:t>
             </a:r>
             <a:endParaRPr/>
           </a:p>
@@ -4655,7 +4667,7 @@
       </p:sp>
       <p:sp>
         <p:nvSpPr>
-          <p:cNvPr id="660" name="Google Shape;660;p25:notes"/>
+          <p:cNvPr id="661" name="Google Shape;661;p25:notes"/>
           <p:cNvSpPr txBox="1"/>
           <p:nvPr>
             <p:ph idx="12" type="sldNum"/>
@@ -4714,7 +4726,7 @@
   <p:cSld>
     <p:spTree>
       <p:nvGrpSpPr>
-        <p:cNvPr id="694" name="Shape 694"/>
+        <p:cNvPr id="692" name="Shape 692"/>
         <p:cNvGrpSpPr/>
         <p:nvPr/>
       </p:nvGrpSpPr>
@@ -4728,7 +4740,7 @@
       </p:grpSpPr>
       <p:sp>
         <p:nvSpPr>
-          <p:cNvPr id="695" name="Google Shape;695;p26:notes"/>
+          <p:cNvPr id="693" name="Google Shape;693;p26:notes"/>
           <p:cNvSpPr/>
           <p:nvPr>
             <p:ph idx="2" type="sldImg"/>
@@ -4773,7 +4785,7 @@
       </p:sp>
       <p:sp>
         <p:nvSpPr>
-          <p:cNvPr id="696" name="Google Shape;696;p26:notes"/>
+          <p:cNvPr id="694" name="Google Shape;694;p26:notes"/>
           <p:cNvSpPr txBox="1"/>
           <p:nvPr>
             <p:ph idx="1" type="body"/>
@@ -4821,7 +4833,7 @@
       </p:sp>
       <p:sp>
         <p:nvSpPr>
-          <p:cNvPr id="697" name="Google Shape;697;p26:notes"/>
+          <p:cNvPr id="695" name="Google Shape;695;p26:notes"/>
           <p:cNvSpPr txBox="1"/>
           <p:nvPr>
             <p:ph idx="12" type="sldNum"/>
@@ -4880,7 +4892,7 @@
   <p:cSld>
     <p:spTree>
       <p:nvGrpSpPr>
-        <p:cNvPr id="719" name="Shape 719"/>
+        <p:cNvPr id="717" name="Shape 717"/>
         <p:cNvGrpSpPr/>
         <p:nvPr/>
       </p:nvGrpSpPr>
@@ -4894,7 +4906,7 @@
       </p:grpSpPr>
       <p:sp>
         <p:nvSpPr>
-          <p:cNvPr id="720" name="Google Shape;720;p27:notes"/>
+          <p:cNvPr id="718" name="Google Shape;718;p27:notes"/>
           <p:cNvSpPr/>
           <p:nvPr>
             <p:ph idx="2" type="sldImg"/>
@@ -4939,7 +4951,7 @@
       </p:sp>
       <p:sp>
         <p:nvSpPr>
-          <p:cNvPr id="721" name="Google Shape;721;p27:notes"/>
+          <p:cNvPr id="719" name="Google Shape;719;p27:notes"/>
           <p:cNvSpPr txBox="1"/>
           <p:nvPr>
             <p:ph idx="1" type="body"/>
@@ -4987,7 +4999,7 @@
       </p:sp>
       <p:sp>
         <p:nvSpPr>
-          <p:cNvPr id="722" name="Google Shape;722;p27:notes"/>
+          <p:cNvPr id="720" name="Google Shape;720;p27:notes"/>
           <p:cNvSpPr txBox="1"/>
           <p:nvPr>
             <p:ph idx="12" type="sldNum"/>
@@ -5046,7 +5058,7 @@
   <p:cSld>
     <p:spTree>
       <p:nvGrpSpPr>
-        <p:cNvPr id="738" name="Shape 738"/>
+        <p:cNvPr id="736" name="Shape 736"/>
         <p:cNvGrpSpPr/>
         <p:nvPr/>
       </p:nvGrpSpPr>
@@ -5060,7 +5072,7 @@
       </p:grpSpPr>
       <p:sp>
         <p:nvSpPr>
-          <p:cNvPr id="739" name="Google Shape;739;p28:notes"/>
+          <p:cNvPr id="737" name="Google Shape;737;p28:notes"/>
           <p:cNvSpPr/>
           <p:nvPr>
             <p:ph idx="2" type="sldImg"/>
@@ -5105,7 +5117,7 @@
       </p:sp>
       <p:sp>
         <p:nvSpPr>
-          <p:cNvPr id="740" name="Google Shape;740;p28:notes"/>
+          <p:cNvPr id="738" name="Google Shape;738;p28:notes"/>
           <p:cNvSpPr txBox="1"/>
           <p:nvPr>
             <p:ph idx="1" type="body"/>
@@ -5153,7 +5165,7 @@
       </p:sp>
       <p:sp>
         <p:nvSpPr>
-          <p:cNvPr id="741" name="Google Shape;741;p28:notes"/>
+          <p:cNvPr id="739" name="Google Shape;739;p28:notes"/>
           <p:cNvSpPr txBox="1"/>
           <p:nvPr>
             <p:ph idx="12" type="sldNum"/>
@@ -5212,7 +5224,7 @@
   <p:cSld>
     <p:spTree>
       <p:nvGrpSpPr>
-        <p:cNvPr id="765" name="Shape 765"/>
+        <p:cNvPr id="763" name="Shape 763"/>
         <p:cNvGrpSpPr/>
         <p:nvPr/>
       </p:nvGrpSpPr>
@@ -5226,7 +5238,7 @@
       </p:grpSpPr>
       <p:sp>
         <p:nvSpPr>
-          <p:cNvPr id="766" name="Google Shape;766;p29:notes"/>
+          <p:cNvPr id="764" name="Google Shape;764;p29:notes"/>
           <p:cNvSpPr/>
           <p:nvPr>
             <p:ph idx="2" type="sldImg"/>
@@ -5271,7 +5283,7 @@
       </p:sp>
       <p:sp>
         <p:nvSpPr>
-          <p:cNvPr id="767" name="Google Shape;767;p29:notes"/>
+          <p:cNvPr id="765" name="Google Shape;765;p29:notes"/>
           <p:cNvSpPr txBox="1"/>
           <p:nvPr>
             <p:ph idx="1" type="body"/>
@@ -5319,7 +5331,7 @@
       </p:sp>
       <p:sp>
         <p:nvSpPr>
-          <p:cNvPr id="768" name="Google Shape;768;p29:notes"/>
+          <p:cNvPr id="766" name="Google Shape;766;p29:notes"/>
           <p:cNvSpPr txBox="1"/>
           <p:nvPr>
             <p:ph idx="12" type="sldNum"/>
@@ -5544,7 +5556,7 @@
   <p:cSld>
     <p:spTree>
       <p:nvGrpSpPr>
-        <p:cNvPr id="797" name="Shape 797"/>
+        <p:cNvPr id="795" name="Shape 795"/>
         <p:cNvGrpSpPr/>
         <p:nvPr/>
       </p:nvGrpSpPr>
@@ -5558,7 +5570,7 @@
       </p:grpSpPr>
       <p:sp>
         <p:nvSpPr>
-          <p:cNvPr id="798" name="Google Shape;798;p30:notes"/>
+          <p:cNvPr id="796" name="Google Shape;796;p30:notes"/>
           <p:cNvSpPr/>
           <p:nvPr>
             <p:ph idx="2" type="sldImg"/>
@@ -5603,7 +5615,7 @@
       </p:sp>
       <p:sp>
         <p:nvSpPr>
-          <p:cNvPr id="799" name="Google Shape;799;p30:notes"/>
+          <p:cNvPr id="797" name="Google Shape;797;p30:notes"/>
           <p:cNvSpPr txBox="1"/>
           <p:nvPr>
             <p:ph idx="1" type="body"/>
@@ -5651,7 +5663,7 @@
       </p:sp>
       <p:sp>
         <p:nvSpPr>
-          <p:cNvPr id="800" name="Google Shape;800;p30:notes"/>
+          <p:cNvPr id="798" name="Google Shape;798;p30:notes"/>
           <p:cNvSpPr txBox="1"/>
           <p:nvPr>
             <p:ph idx="12" type="sldNum"/>
@@ -5710,7 +5722,7 @@
   <p:cSld>
     <p:spTree>
       <p:nvGrpSpPr>
-        <p:cNvPr id="830" name="Shape 830"/>
+        <p:cNvPr id="828" name="Shape 828"/>
         <p:cNvGrpSpPr/>
         <p:nvPr/>
       </p:nvGrpSpPr>
@@ -5724,7 +5736,7 @@
       </p:grpSpPr>
       <p:sp>
         <p:nvSpPr>
-          <p:cNvPr id="831" name="Google Shape;831;p31:notes"/>
+          <p:cNvPr id="829" name="Google Shape;829;p31:notes"/>
           <p:cNvSpPr/>
           <p:nvPr>
             <p:ph idx="2" type="sldImg"/>
@@ -5769,7 +5781,7 @@
       </p:sp>
       <p:sp>
         <p:nvSpPr>
-          <p:cNvPr id="832" name="Google Shape;832;p31:notes"/>
+          <p:cNvPr id="830" name="Google Shape;830;p31:notes"/>
           <p:cNvSpPr txBox="1"/>
           <p:nvPr>
             <p:ph idx="1" type="body"/>
@@ -5817,7 +5829,7 @@
       </p:sp>
       <p:sp>
         <p:nvSpPr>
-          <p:cNvPr id="833" name="Google Shape;833;p31:notes"/>
+          <p:cNvPr id="831" name="Google Shape;831;p31:notes"/>
           <p:cNvSpPr txBox="1"/>
           <p:nvPr>
             <p:ph idx="12" type="sldNum"/>
@@ -27604,12 +27616,43 @@
             </a:r>
             <a:endParaRPr b="0" i="0" spc="0" sz="950" u="none" cap="none" strike="noStrike">
               <a:solidFill>
-                <a:schemeClr val="dk1"/>
-              </a:solidFill>
-              <a:latin typeface="Calibri"/>
-              <a:ea typeface="Calibri"/>
-              <a:cs typeface="Calibri"/>
-              <a:sym typeface="Calibri"/>
+                <a:srgbClr val="6E6E73"/>
+              </a:solidFill>
+              <a:latin typeface="Arial"/>
+              <a:ea typeface="Arial"/>
+              <a:cs typeface="Arial"/>
+              <a:sym typeface="Arial"/>
+            </a:endParaRPr>
+          </a:p>
+          <a:p>
+            <a:pPr indent="0" lvl="0" marL="0" marR="0" rtl="0" algn="l">
+              <a:lnSpc>
+                <a:spcPct val="100000"/>
+              </a:lnSpc>
+              <a:spcBef>
+                <a:spcPts val="0"/>
+              </a:spcBef>
+              <a:spcAft>
+                <a:spcPts val="0"/>
+              </a:spcAft>
+              <a:buClr>
+                <a:srgbClr val="6E6E73"/>
+              </a:buClr>
+              <a:buSzPts val="950"/>
+              <a:buFont typeface="Arial"/>
+              <a:buNone/>
+            </a:pPr>
+            <a:r>
+              <a:t/>
+            </a:r>
+            <a:endParaRPr b="0" i="0" spc="0" sz="950" u="none" cap="none" strike="noStrike">
+              <a:solidFill>
+                <a:srgbClr val="6E6E73"/>
+              </a:solidFill>
+              <a:latin typeface="Arial"/>
+              <a:ea typeface="Arial"/>
+              <a:cs typeface="Arial"/>
+              <a:sym typeface="Arial"/>
             </a:endParaRPr>
           </a:p>
         </p:txBody>
@@ -28219,6 +28262,109 @@
           </a:p>
         </p:txBody>
       </p:sp>
+      <p:sp>
+        <p:nvSpPr>
+          <p:cNvPr id="531" name="Google Shape;531;p24"/>
+          <p:cNvSpPr/>
+          <p:nvPr/>
+        </p:nvSpPr>
+        <p:spPr>
+          <a:xfrm>
+            <a:off x="3395475" y="2578550"/>
+            <a:ext cx="2468700" cy="201300"/>
+          </a:xfrm>
+          <a:prstGeom prst="roundRect">
+            <a:avLst>
+              <a:gd fmla="val 8000" name="adj"/>
+            </a:avLst>
+          </a:prstGeom>
+          <a:solidFill>
+            <a:srgbClr val="FFF3D6"/>
+          </a:solidFill>
+          <a:ln cap="flat" cmpd="sng" w="12700">
+            <a:solidFill>
+              <a:srgbClr val="9A6410"/>
+            </a:solidFill>
+            <a:prstDash val="solid"/>
+            <a:round/>
+            <a:headEnd len="sm" w="sm" type="none"/>
+            <a:tailEnd len="sm" w="sm" type="none"/>
+          </a:ln>
+        </p:spPr>
+        <p:txBody>
+          <a:bodyPr anchorCtr="0" anchor="ctr" bIns="0" lIns="73150" spcFirstLastPara="1" rIns="73150" wrap="square" tIns="0">
+            <a:noAutofit/>
+          </a:bodyPr>
+          <a:lstStyle/>
+          <a:p>
+            <a:pPr indent="0" lvl="0" marL="0" marR="0" rtl="0" algn="ctr">
+              <a:lnSpc>
+                <a:spcPct val="100000"/>
+              </a:lnSpc>
+              <a:spcBef>
+                <a:spcPts val="0"/>
+              </a:spcBef>
+              <a:spcAft>
+                <a:spcPts val="0"/>
+              </a:spcAft>
+              <a:buClr>
+                <a:srgbClr val="000000"/>
+              </a:buClr>
+              <a:buSzPts val="1200"/>
+              <a:buFont typeface="Arial"/>
+              <a:buNone/>
+            </a:pPr>
+            <a:r>
+              <a:rPr b="0" i="0" lang="en-US" spc="0" sz="1200" u="none" cap="none" strike="noStrike">
+                <a:solidFill>
+                  <a:srgbClr val="0D0D0D"/>
+                </a:solidFill>
+                <a:highlight>
+                  <a:srgbClr val="FCFCFC"/>
+                </a:highlight>
+                <a:latin typeface="Arial"/>
+                <a:ea typeface="Arial"/>
+                <a:cs typeface="Arial"/>
+                <a:sym typeface="Arial"/>
+              </a:rPr>
+              <a:t>🖥️</a:t>
+            </a:r>
+            <a:r>
+              <a:rPr b="0" i="0" lang="en-US" spc="0" sz="1100" u="none" cap="none" strike="noStrike">
+                <a:solidFill>
+                  <a:schemeClr val="dk1"/>
+                </a:solidFill>
+                <a:latin typeface="Arial"/>
+                <a:ea typeface="Arial"/>
+                <a:cs typeface="Arial"/>
+                <a:sym typeface="Arial"/>
+              </a:rPr>
+              <a:t> </a:t>
+            </a:r>
+            <a:r>
+              <a:rPr b="1" i="0" lang="en-US" spc="0" sz="700" u="none" cap="none" strike="noStrike">
+                <a:solidFill>
+                  <a:schemeClr val="dk1"/>
+                </a:solidFill>
+                <a:latin typeface="Play"/>
+                <a:ea typeface="Play"/>
+                <a:cs typeface="Play"/>
+                <a:sym typeface="Play"/>
+              </a:rPr>
+              <a:t>Trainer walkthrough: how to search duplicates</a:t>
+            </a:r>
+            <a:endParaRPr b="1" i="0" spc="0" sz="700" u="none" cap="none" strike="noStrike">
+              <a:solidFill>
+                <a:srgbClr val="000000"/>
+              </a:solidFill>
+              <a:latin typeface="Play"/>
+              <a:ea typeface="Play"/>
+              <a:cs typeface="Play"/>
+              <a:sym typeface="Play"/>
+            </a:endParaRPr>
+          </a:p>
+        </p:txBody>
+      </p:sp>
     </p:spTree>
   </p:cSld>
   <p:clrMapOvr>
@@ -28232,7 +28378,7 @@
   <p:cSld>
     <p:spTree>
       <p:nvGrpSpPr>
-        <p:cNvPr id="535" name="Shape 535"/>
+        <p:cNvPr id="536" name="Shape 536"/>
         <p:cNvGrpSpPr/>
         <p:nvPr/>
       </p:nvGrpSpPr>
@@ -28246,7 +28392,7 @@
       </p:grpSpPr>
       <p:sp>
         <p:nvSpPr>
-          <p:cNvPr id="536" name="Google Shape;536;p25"/>
+          <p:cNvPr id="537" name="Google Shape;537;p25"/>
           <p:cNvSpPr txBox="1"/>
           <p:nvPr/>
         </p:nvSpPr>
@@ -28312,7 +28458,7 @@
       </p:sp>
       <p:sp>
         <p:nvSpPr>
-          <p:cNvPr id="537" name="Google Shape;537;p25"/>
+          <p:cNvPr id="538" name="Google Shape;538;p25"/>
           <p:cNvSpPr txBox="1"/>
           <p:nvPr/>
         </p:nvSpPr>
@@ -28378,7 +28524,7 @@
       </p:sp>
       <p:sp>
         <p:nvSpPr>
-          <p:cNvPr id="538" name="Google Shape;538;p25"/>
+          <p:cNvPr id="539" name="Google Shape;539;p25"/>
           <p:cNvSpPr txBox="1"/>
           <p:nvPr/>
         </p:nvSpPr>
@@ -28444,7 +28590,7 @@
       </p:sp>
       <p:sp>
         <p:nvSpPr>
-          <p:cNvPr id="539" name="Google Shape;539;p25"/>
+          <p:cNvPr id="540" name="Google Shape;540;p25"/>
           <p:cNvSpPr txBox="1"/>
           <p:nvPr>
             <p:ph idx="4294967295" type="sldNum"/>
@@ -28508,7 +28654,7 @@
       </p:sp>
       <p:sp>
         <p:nvSpPr>
-          <p:cNvPr id="540" name="Google Shape;540;p25"/>
+          <p:cNvPr id="541" name="Google Shape;541;p25"/>
           <p:cNvSpPr/>
           <p:nvPr/>
         </p:nvSpPr>
@@ -28551,6 +28697,11 @@
               <a:spcAft>
                 <a:spcPts val="0"/>
               </a:spcAft>
+              <a:buClr>
+                <a:srgbClr val="000000"/>
+              </a:buClr>
+              <a:buSzPts val="1000"/>
+              <a:buFont typeface="Arial"/>
               <a:buNone/>
             </a:pPr>
             <a:r>
@@ -28565,13 +28716,21 @@
               </a:rPr>
               <a:t>Duplicate account found</a:t>
             </a:r>
-            <a:endParaRPr/>
+            <a:endParaRPr b="0" i="0" spc="0" sz="1400" u="none" cap="none" strike="noStrike">
+              <a:solidFill>
+                <a:srgbClr val="000000"/>
+              </a:solidFill>
+              <a:latin typeface="Arial"/>
+              <a:ea typeface="Arial"/>
+              <a:cs typeface="Arial"/>
+              <a:sym typeface="Arial"/>
+            </a:endParaRPr>
           </a:p>
         </p:txBody>
       </p:sp>
       <p:cxnSp>
         <p:nvCxnSpPr>
-          <p:cNvPr id="541" name="Google Shape;541;p25"/>
+          <p:cNvPr id="542" name="Google Shape;542;p25"/>
           <p:cNvCxnSpPr/>
           <p:nvPr/>
         </p:nvCxnSpPr>
@@ -28597,7 +28756,7 @@
       </p:cxnSp>
       <p:sp>
         <p:nvSpPr>
-          <p:cNvPr id="542" name="Google Shape;542;p25"/>
+          <p:cNvPr id="543" name="Google Shape;543;p25"/>
           <p:cNvSpPr/>
           <p:nvPr/>
         </p:nvSpPr>
@@ -28640,6 +28799,11 @@
               <a:spcAft>
                 <a:spcPts val="0"/>
               </a:spcAft>
+              <a:buClr>
+                <a:srgbClr val="000000"/>
+              </a:buClr>
+              <a:buSzPts val="1000"/>
+              <a:buFont typeface="Arial"/>
               <a:buNone/>
             </a:pPr>
             <a:r>
@@ -28654,7 +28818,15 @@
               </a:rPr>
               <a:t>project_thumbtack flag?</a:t>
             </a:r>
-            <a:endParaRPr/>
+            <a:endParaRPr b="0" i="0" spc="0" sz="1400" u="none" cap="none" strike="noStrike">
+              <a:solidFill>
+                <a:srgbClr val="000000"/>
+              </a:solidFill>
+              <a:latin typeface="Arial"/>
+              <a:ea typeface="Arial"/>
+              <a:cs typeface="Arial"/>
+              <a:sym typeface="Arial"/>
+            </a:endParaRPr>
           </a:p>
           <a:p>
             <a:pPr indent="0" lvl="0" marL="0" marR="0" rtl="0" algn="ctr">
@@ -28667,6 +28839,11 @@
               <a:spcAft>
                 <a:spcPts val="0"/>
               </a:spcAft>
+              <a:buClr>
+                <a:srgbClr val="000000"/>
+              </a:buClr>
+              <a:buSzPts val="850"/>
+              <a:buFont typeface="Arial"/>
               <a:buNone/>
             </a:pPr>
             <a:r>
@@ -28681,13 +28858,21 @@
               </a:rPr>
               <a:t>Legacy CRM › View › Flag</a:t>
             </a:r>
-            <a:endParaRPr/>
+            <a:endParaRPr b="0" i="0" spc="0" sz="1400" u="none" cap="none" strike="noStrike">
+              <a:solidFill>
+                <a:srgbClr val="000000"/>
+              </a:solidFill>
+              <a:latin typeface="Arial"/>
+              <a:ea typeface="Arial"/>
+              <a:cs typeface="Arial"/>
+              <a:sym typeface="Arial"/>
+            </a:endParaRPr>
           </a:p>
         </p:txBody>
       </p:sp>
       <p:cxnSp>
         <p:nvCxnSpPr>
-          <p:cNvPr id="543" name="Google Shape;543;p25"/>
+          <p:cNvPr id="544" name="Google Shape;544;p25"/>
           <p:cNvCxnSpPr/>
           <p:nvPr/>
         </p:nvCxnSpPr>
@@ -28713,7 +28898,7 @@
       </p:cxnSp>
       <p:sp>
         <p:nvSpPr>
-          <p:cNvPr id="544" name="Google Shape;544;p25"/>
+          <p:cNvPr id="545" name="Google Shape;545;p25"/>
           <p:cNvSpPr txBox="1"/>
           <p:nvPr/>
         </p:nvSpPr>
@@ -28746,6 +28931,11 @@
               <a:spcAft>
                 <a:spcPts val="0"/>
               </a:spcAft>
+              <a:buClr>
+                <a:srgbClr val="000000"/>
+              </a:buClr>
+              <a:buSzPts val="850"/>
+              <a:buFont typeface="Arial"/>
               <a:buNone/>
             </a:pPr>
             <a:r>
@@ -28760,13 +28950,21 @@
               </a:rPr>
               <a:t>Yes</a:t>
             </a:r>
-            <a:endParaRPr/>
-          </a:p>
-        </p:txBody>
-      </p:sp>
-      <p:sp>
-        <p:nvSpPr>
-          <p:cNvPr id="545" name="Google Shape;545;p25"/>
+            <a:endParaRPr b="0" i="0" spc="0" sz="1400" u="none" cap="none" strike="noStrike">
+              <a:solidFill>
+                <a:srgbClr val="000000"/>
+              </a:solidFill>
+              <a:latin typeface="Arial"/>
+              <a:ea typeface="Arial"/>
+              <a:cs typeface="Arial"/>
+              <a:sym typeface="Arial"/>
+            </a:endParaRPr>
+          </a:p>
+        </p:txBody>
+      </p:sp>
+      <p:sp>
+        <p:nvSpPr>
+          <p:cNvPr id="546" name="Google Shape;546;p25"/>
           <p:cNvSpPr/>
           <p:nvPr/>
         </p:nvSpPr>
@@ -28803,6 +29001,11 @@
               <a:spcAft>
                 <a:spcPts val="0"/>
               </a:spcAft>
+              <a:buClr>
+                <a:srgbClr val="000000"/>
+              </a:buClr>
+              <a:buSzPts val="1000"/>
+              <a:buFont typeface="Arial"/>
               <a:buNone/>
             </a:pPr>
             <a:r>
@@ -28817,13 +29020,21 @@
               </a:rPr>
               <a:t>Reassign to the Thumbtack queue. Stop.</a:t>
             </a:r>
-            <a:endParaRPr/>
+            <a:endParaRPr b="0" i="0" spc="0" sz="1400" u="none" cap="none" strike="noStrike">
+              <a:solidFill>
+                <a:srgbClr val="000000"/>
+              </a:solidFill>
+              <a:latin typeface="Arial"/>
+              <a:ea typeface="Arial"/>
+              <a:cs typeface="Arial"/>
+              <a:sym typeface="Arial"/>
+            </a:endParaRPr>
           </a:p>
         </p:txBody>
       </p:sp>
       <p:cxnSp>
         <p:nvCxnSpPr>
-          <p:cNvPr id="546" name="Google Shape;546;p25"/>
+          <p:cNvPr id="547" name="Google Shape;547;p25"/>
           <p:cNvCxnSpPr/>
           <p:nvPr/>
         </p:nvCxnSpPr>
@@ -28849,7 +29060,7 @@
       </p:cxnSp>
       <p:sp>
         <p:nvSpPr>
-          <p:cNvPr id="547" name="Google Shape;547;p25"/>
+          <p:cNvPr id="548" name="Google Shape;548;p25"/>
           <p:cNvSpPr txBox="1"/>
           <p:nvPr/>
         </p:nvSpPr>
@@ -28882,6 +29093,11 @@
               <a:spcAft>
                 <a:spcPts val="0"/>
               </a:spcAft>
+              <a:buClr>
+                <a:srgbClr val="000000"/>
+              </a:buClr>
+              <a:buSzPts val="850"/>
+              <a:buFont typeface="Arial"/>
               <a:buNone/>
             </a:pPr>
             <a:r>
@@ -28896,13 +29112,21 @@
               </a:rPr>
               <a:t>No</a:t>
             </a:r>
-            <a:endParaRPr/>
-          </a:p>
-        </p:txBody>
-      </p:sp>
-      <p:sp>
-        <p:nvSpPr>
-          <p:cNvPr id="548" name="Google Shape;548;p25"/>
+            <a:endParaRPr b="0" i="0" spc="0" sz="1400" u="none" cap="none" strike="noStrike">
+              <a:solidFill>
+                <a:srgbClr val="000000"/>
+              </a:solidFill>
+              <a:latin typeface="Arial"/>
+              <a:ea typeface="Arial"/>
+              <a:cs typeface="Arial"/>
+              <a:sym typeface="Arial"/>
+            </a:endParaRPr>
+          </a:p>
+        </p:txBody>
+      </p:sp>
+      <p:sp>
+        <p:nvSpPr>
+          <p:cNvPr id="549" name="Google Shape;549;p25"/>
           <p:cNvSpPr/>
           <p:nvPr/>
         </p:nvSpPr>
@@ -28939,6 +29163,11 @@
               <a:spcAft>
                 <a:spcPts val="0"/>
               </a:spcAft>
+              <a:buClr>
+                <a:srgbClr val="000000"/>
+              </a:buClr>
+              <a:buSzPts val="1050"/>
+              <a:buFont typeface="Arial"/>
               <a:buNone/>
             </a:pPr>
             <a:r>
@@ -28953,7 +29182,15 @@
               </a:rPr>
               <a:t>Step 1, on the duplicate:  cancel the FC right away</a:t>
             </a:r>
-            <a:endParaRPr/>
+            <a:endParaRPr b="0" i="0" spc="0" sz="1400" u="none" cap="none" strike="noStrike">
+              <a:solidFill>
+                <a:srgbClr val="000000"/>
+              </a:solidFill>
+              <a:latin typeface="Arial"/>
+              <a:ea typeface="Arial"/>
+              <a:cs typeface="Arial"/>
+              <a:sym typeface="Arial"/>
+            </a:endParaRPr>
           </a:p>
           <a:p>
             <a:pPr indent="0" lvl="0" marL="0" marR="0" rtl="0" algn="ctr">
@@ -28966,6 +29203,11 @@
               <a:spcAft>
                 <a:spcPts val="0"/>
               </a:spcAft>
+              <a:buClr>
+                <a:srgbClr val="000000"/>
+              </a:buClr>
+              <a:buSzPts val="900"/>
+              <a:buFont typeface="Arial"/>
               <a:buNone/>
             </a:pPr>
             <a:r>
@@ -28980,13 +29222,21 @@
               </a:rPr>
               <a:t>Cancel upcoming jobs and the RC (unless C wants them)  ·  internal note on both accounts with the other ticket link / C ID</a:t>
             </a:r>
-            <a:endParaRPr/>
+            <a:endParaRPr b="0" i="0" spc="0" sz="1400" u="none" cap="none" strike="noStrike">
+              <a:solidFill>
+                <a:srgbClr val="000000"/>
+              </a:solidFill>
+              <a:latin typeface="Arial"/>
+              <a:ea typeface="Arial"/>
+              <a:cs typeface="Arial"/>
+              <a:sym typeface="Arial"/>
+            </a:endParaRPr>
           </a:p>
         </p:txBody>
       </p:sp>
       <p:cxnSp>
         <p:nvCxnSpPr>
-          <p:cNvPr id="549" name="Google Shape;549;p25"/>
+          <p:cNvPr id="550" name="Google Shape;550;p25"/>
           <p:cNvCxnSpPr/>
           <p:nvPr/>
         </p:nvCxnSpPr>
@@ -29012,7 +29262,7 @@
       </p:cxnSp>
       <p:sp>
         <p:nvSpPr>
-          <p:cNvPr id="550" name="Google Shape;550;p25"/>
+          <p:cNvPr id="551" name="Google Shape;551;p25"/>
           <p:cNvSpPr/>
           <p:nvPr/>
         </p:nvSpPr>
@@ -29055,6 +29305,11 @@
               <a:spcAft>
                 <a:spcPts val="0"/>
               </a:spcAft>
+              <a:buClr>
+                <a:srgbClr val="000000"/>
+              </a:buClr>
+              <a:buSzPts val="1000"/>
+              <a:buFont typeface="Arial"/>
               <a:buNone/>
             </a:pPr>
             <a:r>
@@ -29069,13 +29324,21 @@
               </a:rPr>
               <a:t>Let C choose</a:t>
             </a:r>
-            <a:endParaRPr/>
+            <a:endParaRPr b="0" i="0" spc="0" sz="1400" u="none" cap="none" strike="noStrike">
+              <a:solidFill>
+                <a:srgbClr val="000000"/>
+              </a:solidFill>
+              <a:latin typeface="Arial"/>
+              <a:ea typeface="Arial"/>
+              <a:cs typeface="Arial"/>
+              <a:sym typeface="Arial"/>
+            </a:endParaRPr>
           </a:p>
         </p:txBody>
       </p:sp>
       <p:cxnSp>
         <p:nvCxnSpPr>
-          <p:cNvPr id="551" name="Google Shape;551;p25"/>
+          <p:cNvPr id="552" name="Google Shape;552;p25"/>
           <p:cNvCxnSpPr/>
           <p:nvPr/>
         </p:nvCxnSpPr>
@@ -29101,7 +29364,7 @@
       </p:cxnSp>
       <p:cxnSp>
         <p:nvCxnSpPr>
-          <p:cNvPr id="552" name="Google Shape;552;p25"/>
+          <p:cNvPr id="553" name="Google Shape;553;p25"/>
           <p:cNvCxnSpPr/>
           <p:nvPr/>
         </p:nvCxnSpPr>
@@ -29127,7 +29390,7 @@
       </p:cxnSp>
       <p:cxnSp>
         <p:nvCxnSpPr>
-          <p:cNvPr id="553" name="Google Shape;553;p25"/>
+          <p:cNvPr id="554" name="Google Shape;554;p25"/>
           <p:cNvCxnSpPr/>
           <p:nvPr/>
         </p:nvCxnSpPr>
@@ -29153,7 +29416,7 @@
       </p:cxnSp>
       <p:cxnSp>
         <p:nvCxnSpPr>
-          <p:cNvPr id="554" name="Google Shape;554;p25"/>
+          <p:cNvPr id="555" name="Google Shape;555;p25"/>
           <p:cNvCxnSpPr/>
           <p:nvPr/>
         </p:nvCxnSpPr>
@@ -29179,7 +29442,7 @@
       </p:cxnSp>
       <p:sp>
         <p:nvSpPr>
-          <p:cNvPr id="555" name="Google Shape;555;p25"/>
+          <p:cNvPr id="556" name="Google Shape;556;p25"/>
           <p:cNvSpPr/>
           <p:nvPr/>
         </p:nvSpPr>
@@ -29222,6 +29485,11 @@
               <a:spcAft>
                 <a:spcPts val="0"/>
               </a:spcAft>
+              <a:buClr>
+                <a:srgbClr val="000000"/>
+              </a:buClr>
+              <a:buSzPts val="1400"/>
+              <a:buFont typeface="Arial"/>
               <a:buNone/>
             </a:pPr>
             <a:r>
@@ -29241,7 +29509,7 @@
       </p:sp>
       <p:sp>
         <p:nvSpPr>
-          <p:cNvPr id="556" name="Google Shape;556;p25"/>
+          <p:cNvPr id="557" name="Google Shape;557;p25"/>
           <p:cNvSpPr/>
           <p:nvPr/>
         </p:nvSpPr>
@@ -29278,6 +29546,11 @@
               <a:spcAft>
                 <a:spcPts val="0"/>
               </a:spcAft>
+              <a:buClr>
+                <a:srgbClr val="000000"/>
+              </a:buClr>
+              <a:buSzPts val="1050"/>
+              <a:buFont typeface="Arial"/>
               <a:buNone/>
             </a:pPr>
             <a:r>
@@ -29292,20 +29565,28 @@
               </a:rPr>
               <a:t>Offer duplicates MF as Free months</a:t>
             </a:r>
-            <a:endParaRPr/>
-          </a:p>
-        </p:txBody>
-      </p:sp>
-      <p:sp>
-        <p:nvSpPr>
-          <p:cNvPr id="557" name="Google Shape;557;p25"/>
+            <a:endParaRPr b="0" i="0" spc="0" sz="1400" u="none" cap="none" strike="noStrike">
+              <a:solidFill>
+                <a:srgbClr val="000000"/>
+              </a:solidFill>
+              <a:latin typeface="Arial"/>
+              <a:ea typeface="Arial"/>
+              <a:cs typeface="Arial"/>
+              <a:sym typeface="Arial"/>
+            </a:endParaRPr>
+          </a:p>
+        </p:txBody>
+      </p:sp>
+      <p:sp>
+        <p:nvSpPr>
+          <p:cNvPr id="558" name="Google Shape;558;p25"/>
           <p:cNvSpPr txBox="1"/>
           <p:nvPr/>
         </p:nvSpPr>
         <p:spPr>
           <a:xfrm>
             <a:off x="548640" y="3675888"/>
-            <a:ext cx="3794760" cy="960120"/>
+            <a:ext cx="3794700" cy="515700"/>
           </a:xfrm>
           <a:prstGeom prst="rect">
             <a:avLst/>
@@ -29331,6 +29612,11 @@
               <a:spcAft>
                 <a:spcPts val="0"/>
               </a:spcAft>
+              <a:buClr>
+                <a:srgbClr val="000000"/>
+              </a:buClr>
+              <a:buSzPts val="950"/>
+              <a:buFont typeface="Arial"/>
               <a:buNone/>
             </a:pPr>
             <a:r>
@@ -29345,7 +29631,15 @@
               </a:rPr>
               <a:t>•  Up to 3 free months on the main account; adjust the MCT</a:t>
             </a:r>
-            <a:endParaRPr/>
+            <a:endParaRPr b="0" i="0" spc="0" sz="950" u="none" cap="none" strike="noStrike">
+              <a:solidFill>
+                <a:srgbClr val="1D1D1F"/>
+              </a:solidFill>
+              <a:latin typeface="Arial"/>
+              <a:ea typeface="Arial"/>
+              <a:cs typeface="Arial"/>
+              <a:sym typeface="Arial"/>
+            </a:endParaRPr>
           </a:p>
           <a:p>
             <a:pPr indent="0" lvl="0" marL="0" marR="0" rtl="0" algn="l">
@@ -29358,6 +29652,11 @@
               <a:spcAft>
                 <a:spcPts val="0"/>
               </a:spcAft>
+              <a:buClr>
+                <a:srgbClr val="000000"/>
+              </a:buClr>
+              <a:buSzPts val="950"/>
+              <a:buFont typeface="Arial"/>
               <a:buNone/>
             </a:pPr>
             <a:r>
@@ -29370,9 +29669,17 @@
                 <a:cs typeface="Arial"/>
                 <a:sym typeface="Arial"/>
               </a:rPr>
-              <a:t>•  Contesting? +1 bonus month</a:t>
-            </a:r>
-            <a:endParaRPr/>
+              <a:t>•  Contests the charge and chooses free months? +1 bonus month. </a:t>
+            </a:r>
+            <a:endParaRPr b="0" i="0" spc="0" sz="950" u="none" cap="none" strike="noStrike">
+              <a:solidFill>
+                <a:srgbClr val="1D1D1F"/>
+              </a:solidFill>
+              <a:latin typeface="Arial"/>
+              <a:ea typeface="Arial"/>
+              <a:cs typeface="Arial"/>
+              <a:sym typeface="Arial"/>
+            </a:endParaRPr>
           </a:p>
           <a:p>
             <a:pPr indent="0" lvl="0" marL="0" marR="0" rtl="0" algn="l">
@@ -29385,6 +29692,11 @@
               <a:spcAft>
                 <a:spcPts val="0"/>
               </a:spcAft>
+              <a:buClr>
+                <a:srgbClr val="000000"/>
+              </a:buClr>
+              <a:buSzPts val="950"/>
+              <a:buFont typeface="Arial"/>
               <a:buNone/>
             </a:pPr>
             <a:r>
@@ -29399,13 +29711,21 @@
               </a:rPr>
               <a:t>•  Paid months reach 6? MCT effectively fulfilled</a:t>
             </a:r>
-            <a:endParaRPr/>
-          </a:p>
-        </p:txBody>
-      </p:sp>
-      <p:sp>
-        <p:nvSpPr>
-          <p:cNvPr id="558" name="Google Shape;558;p25"/>
+            <a:endParaRPr b="0" i="0" spc="0" sz="1400" u="none" cap="none" strike="noStrike">
+              <a:solidFill>
+                <a:srgbClr val="000000"/>
+              </a:solidFill>
+              <a:latin typeface="Arial"/>
+              <a:ea typeface="Arial"/>
+              <a:cs typeface="Arial"/>
+              <a:sym typeface="Arial"/>
+            </a:endParaRPr>
+          </a:p>
+        </p:txBody>
+      </p:sp>
+      <p:sp>
+        <p:nvSpPr>
+          <p:cNvPr id="559" name="Google Shape;559;p25"/>
           <p:cNvSpPr/>
           <p:nvPr/>
         </p:nvSpPr>
@@ -29448,6 +29768,11 @@
               <a:spcAft>
                 <a:spcPts val="0"/>
               </a:spcAft>
+              <a:buClr>
+                <a:srgbClr val="000000"/>
+              </a:buClr>
+              <a:buSzPts val="1400"/>
+              <a:buFont typeface="Arial"/>
               <a:buNone/>
             </a:pPr>
             <a:r>
@@ -29467,7 +29792,7 @@
       </p:sp>
       <p:sp>
         <p:nvSpPr>
-          <p:cNvPr id="559" name="Google Shape;559;p25"/>
+          <p:cNvPr id="560" name="Google Shape;560;p25"/>
           <p:cNvSpPr/>
           <p:nvPr/>
         </p:nvSpPr>
@@ -29504,6 +29829,11 @@
               <a:spcAft>
                 <a:spcPts val="0"/>
               </a:spcAft>
+              <a:buClr>
+                <a:srgbClr val="000000"/>
+              </a:buClr>
+              <a:buSzPts val="1050"/>
+              <a:buFont typeface="Arial"/>
               <a:buNone/>
             </a:pPr>
             <a:r>
@@ -29518,13 +29848,21 @@
               </a:rPr>
               <a:t>Refund</a:t>
             </a:r>
-            <a:endParaRPr/>
-          </a:p>
-        </p:txBody>
-      </p:sp>
-      <p:sp>
-        <p:nvSpPr>
-          <p:cNvPr id="560" name="Google Shape;560;p25"/>
+            <a:endParaRPr b="0" i="0" spc="0" sz="1400" u="none" cap="none" strike="noStrike">
+              <a:solidFill>
+                <a:srgbClr val="000000"/>
+              </a:solidFill>
+              <a:latin typeface="Arial"/>
+              <a:ea typeface="Arial"/>
+              <a:cs typeface="Arial"/>
+              <a:sym typeface="Arial"/>
+            </a:endParaRPr>
+          </a:p>
+        </p:txBody>
+      </p:sp>
+      <p:sp>
+        <p:nvSpPr>
+          <p:cNvPr id="561" name="Google Shape;561;p25"/>
           <p:cNvSpPr txBox="1"/>
           <p:nvPr/>
         </p:nvSpPr>
@@ -29557,6 +29895,11 @@
               <a:spcAft>
                 <a:spcPts val="0"/>
               </a:spcAft>
+              <a:buClr>
+                <a:srgbClr val="000000"/>
+              </a:buClr>
+              <a:buSzPts val="950"/>
+              <a:buFont typeface="Arial"/>
               <a:buNone/>
             </a:pPr>
             <a:r>
@@ -29571,7 +29914,15 @@
               </a:rPr>
               <a:t>•  Duplicate charges within 120 days</a:t>
             </a:r>
-            <a:endParaRPr/>
+            <a:endParaRPr b="0" i="0" spc="0" sz="1400" u="none" cap="none" strike="noStrike">
+              <a:solidFill>
+                <a:srgbClr val="000000"/>
+              </a:solidFill>
+              <a:latin typeface="Arial"/>
+              <a:ea typeface="Arial"/>
+              <a:cs typeface="Arial"/>
+              <a:sym typeface="Arial"/>
+            </a:endParaRPr>
           </a:p>
           <a:p>
             <a:pPr indent="0" lvl="0" marL="0" marR="0" rtl="0" algn="l">
@@ -29584,6 +29935,11 @@
               <a:spcAft>
                 <a:spcPts val="0"/>
               </a:spcAft>
+              <a:buClr>
+                <a:srgbClr val="000000"/>
+              </a:buClr>
+              <a:buSzPts val="950"/>
+              <a:buFont typeface="Arial"/>
               <a:buNone/>
             </a:pPr>
             <a:r>
@@ -29598,7 +29954,15 @@
               </a:rPr>
               <a:t>•  Beyond 120 days: only for a system or agent error</a:t>
             </a:r>
-            <a:endParaRPr/>
+            <a:endParaRPr b="0" i="0" spc="0" sz="1400" u="none" cap="none" strike="noStrike">
+              <a:solidFill>
+                <a:srgbClr val="000000"/>
+              </a:solidFill>
+              <a:latin typeface="Arial"/>
+              <a:ea typeface="Arial"/>
+              <a:cs typeface="Arial"/>
+              <a:sym typeface="Arial"/>
+            </a:endParaRPr>
           </a:p>
           <a:p>
             <a:pPr indent="0" lvl="0" marL="0" marR="0" rtl="0" algn="l">
@@ -29611,6 +29975,11 @@
               <a:spcAft>
                 <a:spcPts val="0"/>
               </a:spcAft>
+              <a:buClr>
+                <a:srgbClr val="000000"/>
+              </a:buClr>
+              <a:buSzPts val="950"/>
+              <a:buFont typeface="Arial"/>
               <a:buNone/>
             </a:pPr>
             <a:r>
@@ -29625,7 +29994,15 @@
               </a:rPr>
               <a:t>•  No bonus month</a:t>
             </a:r>
-            <a:endParaRPr/>
+            <a:endParaRPr b="0" i="0" spc="0" sz="1400" u="none" cap="none" strike="noStrike">
+              <a:solidFill>
+                <a:srgbClr val="000000"/>
+              </a:solidFill>
+              <a:latin typeface="Arial"/>
+              <a:ea typeface="Arial"/>
+              <a:cs typeface="Arial"/>
+              <a:sym typeface="Arial"/>
+            </a:endParaRPr>
           </a:p>
         </p:txBody>
       </p:sp>
@@ -29642,7 +30019,7 @@
   <p:cSld>
     <p:spTree>
       <p:nvGrpSpPr>
-        <p:cNvPr id="565" name="Shape 565"/>
+        <p:cNvPr id="566" name="Shape 566"/>
         <p:cNvGrpSpPr/>
         <p:nvPr/>
       </p:nvGrpSpPr>
@@ -29656,7 +30033,7 @@
       </p:grpSpPr>
       <p:sp>
         <p:nvSpPr>
-          <p:cNvPr id="566" name="Google Shape;566;p26"/>
+          <p:cNvPr id="567" name="Google Shape;567;p26"/>
           <p:cNvSpPr txBox="1"/>
           <p:nvPr/>
         </p:nvSpPr>
@@ -29722,7 +30099,7 @@
       </p:sp>
       <p:sp>
         <p:nvSpPr>
-          <p:cNvPr id="567" name="Google Shape;567;p26"/>
+          <p:cNvPr id="568" name="Google Shape;568;p26"/>
           <p:cNvSpPr txBox="1"/>
           <p:nvPr/>
         </p:nvSpPr>
@@ -29788,7 +30165,7 @@
       </p:sp>
       <p:sp>
         <p:nvSpPr>
-          <p:cNvPr id="568" name="Google Shape;568;p26"/>
+          <p:cNvPr id="569" name="Google Shape;569;p26"/>
           <p:cNvSpPr/>
           <p:nvPr/>
         </p:nvSpPr>
@@ -29855,7 +30232,7 @@
       </p:sp>
       <p:sp>
         <p:nvSpPr>
-          <p:cNvPr id="569" name="Google Shape;569;p26"/>
+          <p:cNvPr id="570" name="Google Shape;570;p26"/>
           <p:cNvSpPr/>
           <p:nvPr/>
         </p:nvSpPr>
@@ -29920,7 +30297,7 @@
       </p:sp>
       <p:sp>
         <p:nvSpPr>
-          <p:cNvPr id="570" name="Google Shape;570;p26"/>
+          <p:cNvPr id="571" name="Google Shape;571;p26"/>
           <p:cNvSpPr txBox="1"/>
           <p:nvPr/>
         </p:nvSpPr>
@@ -29986,7 +30363,7 @@
       </p:sp>
       <p:sp>
         <p:nvSpPr>
-          <p:cNvPr id="571" name="Google Shape;571;p26"/>
+          <p:cNvPr id="572" name="Google Shape;572;p26"/>
           <p:cNvSpPr txBox="1"/>
           <p:nvPr/>
         </p:nvSpPr>
@@ -30052,7 +30429,7 @@
       </p:sp>
       <p:sp>
         <p:nvSpPr>
-          <p:cNvPr id="572" name="Google Shape;572;p26"/>
+          <p:cNvPr id="573" name="Google Shape;573;p26"/>
           <p:cNvSpPr/>
           <p:nvPr/>
         </p:nvSpPr>
@@ -30119,7 +30496,7 @@
       </p:sp>
       <p:sp>
         <p:nvSpPr>
-          <p:cNvPr id="573" name="Google Shape;573;p26"/>
+          <p:cNvPr id="574" name="Google Shape;574;p26"/>
           <p:cNvSpPr txBox="1"/>
           <p:nvPr/>
         </p:nvSpPr>
@@ -30185,7 +30562,7 @@
       </p:sp>
       <p:sp>
         <p:nvSpPr>
-          <p:cNvPr id="574" name="Google Shape;574;p26"/>
+          <p:cNvPr id="575" name="Google Shape;575;p26"/>
           <p:cNvSpPr/>
           <p:nvPr/>
         </p:nvSpPr>
@@ -30252,7 +30629,7 @@
       </p:sp>
       <p:sp>
         <p:nvSpPr>
-          <p:cNvPr id="575" name="Google Shape;575;p26"/>
+          <p:cNvPr id="576" name="Google Shape;576;p26"/>
           <p:cNvSpPr/>
           <p:nvPr/>
         </p:nvSpPr>
@@ -30317,7 +30694,7 @@
       </p:sp>
       <p:sp>
         <p:nvSpPr>
-          <p:cNvPr id="576" name="Google Shape;576;p26"/>
+          <p:cNvPr id="577" name="Google Shape;577;p26"/>
           <p:cNvSpPr txBox="1"/>
           <p:nvPr/>
         </p:nvSpPr>
@@ -30383,7 +30760,7 @@
       </p:sp>
       <p:sp>
         <p:nvSpPr>
-          <p:cNvPr id="577" name="Google Shape;577;p26"/>
+          <p:cNvPr id="578" name="Google Shape;578;p26"/>
           <p:cNvSpPr txBox="1"/>
           <p:nvPr/>
         </p:nvSpPr>
@@ -30449,7 +30826,7 @@
       </p:sp>
       <p:sp>
         <p:nvSpPr>
-          <p:cNvPr id="578" name="Google Shape;578;p26"/>
+          <p:cNvPr id="579" name="Google Shape;579;p26"/>
           <p:cNvSpPr/>
           <p:nvPr/>
         </p:nvSpPr>
@@ -30516,7 +30893,7 @@
       </p:sp>
       <p:sp>
         <p:nvSpPr>
-          <p:cNvPr id="579" name="Google Shape;579;p26"/>
+          <p:cNvPr id="580" name="Google Shape;580;p26"/>
           <p:cNvSpPr txBox="1"/>
           <p:nvPr/>
         </p:nvSpPr>
@@ -30582,7 +30959,7 @@
       </p:sp>
       <p:sp>
         <p:nvSpPr>
-          <p:cNvPr id="580" name="Google Shape;580;p26"/>
+          <p:cNvPr id="581" name="Google Shape;581;p26"/>
           <p:cNvSpPr/>
           <p:nvPr/>
         </p:nvSpPr>
@@ -30649,7 +31026,7 @@
       </p:sp>
       <p:sp>
         <p:nvSpPr>
-          <p:cNvPr id="581" name="Google Shape;581;p26"/>
+          <p:cNvPr id="582" name="Google Shape;582;p26"/>
           <p:cNvSpPr/>
           <p:nvPr/>
         </p:nvSpPr>
@@ -30714,7 +31091,7 @@
       </p:sp>
       <p:sp>
         <p:nvSpPr>
-          <p:cNvPr id="582" name="Google Shape;582;p26"/>
+          <p:cNvPr id="583" name="Google Shape;583;p26"/>
           <p:cNvSpPr txBox="1"/>
           <p:nvPr/>
         </p:nvSpPr>
@@ -30780,7 +31157,7 @@
       </p:sp>
       <p:sp>
         <p:nvSpPr>
-          <p:cNvPr id="583" name="Google Shape;583;p26"/>
+          <p:cNvPr id="584" name="Google Shape;584;p26"/>
           <p:cNvSpPr txBox="1"/>
           <p:nvPr/>
         </p:nvSpPr>
@@ -30846,7 +31223,7 @@
       </p:sp>
       <p:sp>
         <p:nvSpPr>
-          <p:cNvPr id="584" name="Google Shape;584;p26"/>
+          <p:cNvPr id="585" name="Google Shape;585;p26"/>
           <p:cNvSpPr/>
           <p:nvPr/>
         </p:nvSpPr>
@@ -30913,7 +31290,7 @@
       </p:sp>
       <p:sp>
         <p:nvSpPr>
-          <p:cNvPr id="585" name="Google Shape;585;p26"/>
+          <p:cNvPr id="586" name="Google Shape;586;p26"/>
           <p:cNvSpPr txBox="1"/>
           <p:nvPr/>
         </p:nvSpPr>
@@ -30979,7 +31356,7 @@
       </p:sp>
       <p:sp>
         <p:nvSpPr>
-          <p:cNvPr id="586" name="Google Shape;586;p26"/>
+          <p:cNvPr id="587" name="Google Shape;587;p26"/>
           <p:cNvSpPr/>
           <p:nvPr/>
         </p:nvSpPr>
@@ -31046,7 +31423,7 @@
       </p:sp>
       <p:sp>
         <p:nvSpPr>
-          <p:cNvPr id="587" name="Google Shape;587;p26"/>
+          <p:cNvPr id="588" name="Google Shape;588;p26"/>
           <p:cNvSpPr/>
           <p:nvPr/>
         </p:nvSpPr>
@@ -31111,7 +31488,7 @@
       </p:sp>
       <p:sp>
         <p:nvSpPr>
-          <p:cNvPr id="588" name="Google Shape;588;p26"/>
+          <p:cNvPr id="589" name="Google Shape;589;p26"/>
           <p:cNvSpPr txBox="1"/>
           <p:nvPr/>
         </p:nvSpPr>
@@ -31177,7 +31554,7 @@
       </p:sp>
       <p:sp>
         <p:nvSpPr>
-          <p:cNvPr id="589" name="Google Shape;589;p26"/>
+          <p:cNvPr id="590" name="Google Shape;590;p26"/>
           <p:cNvSpPr txBox="1"/>
           <p:nvPr/>
         </p:nvSpPr>
@@ -31243,7 +31620,7 @@
       </p:sp>
       <p:sp>
         <p:nvSpPr>
-          <p:cNvPr id="590" name="Google Shape;590;p26"/>
+          <p:cNvPr id="591" name="Google Shape;591;p26"/>
           <p:cNvSpPr/>
           <p:nvPr/>
         </p:nvSpPr>
@@ -31310,7 +31687,7 @@
       </p:sp>
       <p:sp>
         <p:nvSpPr>
-          <p:cNvPr id="591" name="Google Shape;591;p26"/>
+          <p:cNvPr id="592" name="Google Shape;592;p26"/>
           <p:cNvSpPr txBox="1"/>
           <p:nvPr/>
         </p:nvSpPr>
@@ -31376,7 +31753,7 @@
       </p:sp>
       <p:sp>
         <p:nvSpPr>
-          <p:cNvPr id="592" name="Google Shape;592;p26"/>
+          <p:cNvPr id="593" name="Google Shape;593;p26"/>
           <p:cNvSpPr txBox="1"/>
           <p:nvPr>
             <p:ph idx="4294967295" type="sldNum"/>
@@ -31477,7 +31854,7 @@
                                           </p:stCondLst>
                                         </p:cTn>
                                         <p:tgtEl>
-                                          <p:spTgt spid="573"/>
+                                          <p:spTgt spid="574"/>
                                         </p:tgtEl>
                                         <p:attrNameLst>
                                           <p:attrName>style.visibility</p:attrName>
@@ -31491,7 +31868,7 @@
                                       <p:cBhvr>
                                         <p:cTn dur="600"/>
                                         <p:tgtEl>
-                                          <p:spTgt spid="573"/>
+                                          <p:spTgt spid="574"/>
                                         </p:tgtEl>
                                       </p:cBhvr>
                                     </p:animEffect>
@@ -31530,7 +31907,7 @@
                                           </p:stCondLst>
                                         </p:cTn>
                                         <p:tgtEl>
-                                          <p:spTgt spid="579"/>
+                                          <p:spTgt spid="580"/>
                                         </p:tgtEl>
                                         <p:attrNameLst>
                                           <p:attrName>style.visibility</p:attrName>
@@ -31544,7 +31921,7 @@
                                       <p:cBhvr>
                                         <p:cTn dur="600"/>
                                         <p:tgtEl>
-                                          <p:spTgt spid="579"/>
+                                          <p:spTgt spid="580"/>
                                         </p:tgtEl>
                                       </p:cBhvr>
                                     </p:animEffect>
@@ -31583,7 +31960,7 @@
                                           </p:stCondLst>
                                         </p:cTn>
                                         <p:tgtEl>
-                                          <p:spTgt spid="585"/>
+                                          <p:spTgt spid="586"/>
                                         </p:tgtEl>
                                         <p:attrNameLst>
                                           <p:attrName>style.visibility</p:attrName>
@@ -31597,7 +31974,7 @@
                                       <p:cBhvr>
                                         <p:cTn dur="600"/>
                                         <p:tgtEl>
-                                          <p:spTgt spid="585"/>
+                                          <p:spTgt spid="586"/>
                                         </p:tgtEl>
                                       </p:cBhvr>
                                     </p:animEffect>
@@ -31636,7 +32013,7 @@
                                           </p:stCondLst>
                                         </p:cTn>
                                         <p:tgtEl>
-                                          <p:spTgt spid="591"/>
+                                          <p:spTgt spid="592"/>
                                         </p:tgtEl>
                                         <p:attrNameLst>
                                           <p:attrName>style.visibility</p:attrName>
@@ -31650,7 +32027,7 @@
                                       <p:cBhvr>
                                         <p:cTn dur="600"/>
                                         <p:tgtEl>
-                                          <p:spTgt spid="591"/>
+                                          <p:spTgt spid="592"/>
                                         </p:tgtEl>
                                       </p:cBhvr>
                                     </p:animEffect>
@@ -31693,7 +32070,7 @@
   <p:cSld>
     <p:spTree>
       <p:nvGrpSpPr>
-        <p:cNvPr id="597" name="Shape 597"/>
+        <p:cNvPr id="598" name="Shape 598"/>
         <p:cNvGrpSpPr/>
         <p:nvPr/>
       </p:nvGrpSpPr>
@@ -31707,7 +32084,7 @@
       </p:grpSpPr>
       <p:sp>
         <p:nvSpPr>
-          <p:cNvPr id="598" name="Google Shape;598;p27"/>
+          <p:cNvPr id="599" name="Google Shape;599;p27"/>
           <p:cNvSpPr txBox="1"/>
           <p:nvPr/>
         </p:nvSpPr>
@@ -31773,7 +32150,7 @@
       </p:sp>
       <p:sp>
         <p:nvSpPr>
-          <p:cNvPr id="599" name="Google Shape;599;p27"/>
+          <p:cNvPr id="600" name="Google Shape;600;p27"/>
           <p:cNvSpPr txBox="1"/>
           <p:nvPr/>
         </p:nvSpPr>
@@ -31839,7 +32216,7 @@
       </p:sp>
       <p:sp>
         <p:nvSpPr>
-          <p:cNvPr id="600" name="Google Shape;600;p27"/>
+          <p:cNvPr id="601" name="Google Shape;601;p27"/>
           <p:cNvSpPr txBox="1"/>
           <p:nvPr/>
         </p:nvSpPr>
@@ -31905,7 +32282,7 @@
       </p:sp>
       <p:sp>
         <p:nvSpPr>
-          <p:cNvPr id="601" name="Google Shape;601;p27"/>
+          <p:cNvPr id="602" name="Google Shape;602;p27"/>
           <p:cNvSpPr/>
           <p:nvPr/>
         </p:nvSpPr>
@@ -31972,7 +32349,7 @@
       </p:sp>
       <p:sp>
         <p:nvSpPr>
-          <p:cNvPr id="602" name="Google Shape;602;p27"/>
+          <p:cNvPr id="603" name="Google Shape;603;p27"/>
           <p:cNvSpPr/>
           <p:nvPr/>
         </p:nvSpPr>
@@ -32037,7 +32414,7 @@
       </p:sp>
       <p:pic>
         <p:nvPicPr>
-          <p:cNvPr descr="preencoded.png" id="603" name="Google Shape;603;p27"/>
+          <p:cNvPr descr="preencoded.png" id="604" name="Google Shape;604;p27"/>
           <p:cNvPicPr preferRelativeResize="0"/>
           <p:nvPr/>
         </p:nvPicPr>
@@ -32064,7 +32441,7 @@
       </p:pic>
       <p:sp>
         <p:nvSpPr>
-          <p:cNvPr id="604" name="Google Shape;604;p27"/>
+          <p:cNvPr id="605" name="Google Shape;605;p27"/>
           <p:cNvSpPr txBox="1"/>
           <p:nvPr/>
         </p:nvSpPr>
@@ -32130,7 +32507,7 @@
       </p:sp>
       <p:sp>
         <p:nvSpPr>
-          <p:cNvPr id="605" name="Google Shape;605;p27"/>
+          <p:cNvPr id="606" name="Google Shape;606;p27"/>
           <p:cNvSpPr txBox="1"/>
           <p:nvPr/>
         </p:nvSpPr>
@@ -32196,7 +32573,7 @@
       </p:sp>
       <p:sp>
         <p:nvSpPr>
-          <p:cNvPr id="606" name="Google Shape;606;p27"/>
+          <p:cNvPr id="607" name="Google Shape;607;p27"/>
           <p:cNvSpPr/>
           <p:nvPr/>
         </p:nvSpPr>
@@ -32272,7 +32649,7 @@
       </p:sp>
       <p:sp>
         <p:nvSpPr>
-          <p:cNvPr id="607" name="Google Shape;607;p27"/>
+          <p:cNvPr id="608" name="Google Shape;608;p27"/>
           <p:cNvSpPr/>
           <p:nvPr/>
         </p:nvSpPr>
@@ -32339,7 +32716,7 @@
       </p:sp>
       <p:sp>
         <p:nvSpPr>
-          <p:cNvPr id="608" name="Google Shape;608;p27"/>
+          <p:cNvPr id="609" name="Google Shape;609;p27"/>
           <p:cNvSpPr/>
           <p:nvPr/>
         </p:nvSpPr>
@@ -32404,7 +32781,7 @@
       </p:sp>
       <p:sp>
         <p:nvSpPr>
-          <p:cNvPr id="609" name="Google Shape;609;p27"/>
+          <p:cNvPr id="610" name="Google Shape;610;p27"/>
           <p:cNvSpPr txBox="1"/>
           <p:nvPr/>
         </p:nvSpPr>
@@ -32470,7 +32847,7 @@
       </p:sp>
       <p:sp>
         <p:nvSpPr>
-          <p:cNvPr id="610" name="Google Shape;610;p27"/>
+          <p:cNvPr id="611" name="Google Shape;611;p27"/>
           <p:cNvSpPr txBox="1"/>
           <p:nvPr/>
         </p:nvSpPr>
@@ -32536,7 +32913,7 @@
       </p:sp>
       <p:sp>
         <p:nvSpPr>
-          <p:cNvPr id="611" name="Google Shape;611;p27"/>
+          <p:cNvPr id="612" name="Google Shape;612;p27"/>
           <p:cNvSpPr txBox="1"/>
           <p:nvPr/>
         </p:nvSpPr>
@@ -32602,7 +32979,7 @@
       </p:sp>
       <p:sp>
         <p:nvSpPr>
-          <p:cNvPr id="612" name="Google Shape;612;p27"/>
+          <p:cNvPr id="613" name="Google Shape;613;p27"/>
           <p:cNvSpPr/>
           <p:nvPr/>
         </p:nvSpPr>
@@ -32669,7 +33046,7 @@
       </p:sp>
       <p:sp>
         <p:nvSpPr>
-          <p:cNvPr id="613" name="Google Shape;613;p27"/>
+          <p:cNvPr id="614" name="Google Shape;614;p27"/>
           <p:cNvSpPr/>
           <p:nvPr/>
         </p:nvSpPr>
@@ -32734,7 +33111,7 @@
       </p:sp>
       <p:sp>
         <p:nvSpPr>
-          <p:cNvPr id="614" name="Google Shape;614;p27"/>
+          <p:cNvPr id="615" name="Google Shape;615;p27"/>
           <p:cNvSpPr txBox="1"/>
           <p:nvPr/>
         </p:nvSpPr>
@@ -32800,7 +33177,7 @@
       </p:sp>
       <p:sp>
         <p:nvSpPr>
-          <p:cNvPr id="615" name="Google Shape;615;p27"/>
+          <p:cNvPr id="616" name="Google Shape;616;p27"/>
           <p:cNvSpPr txBox="1"/>
           <p:nvPr/>
         </p:nvSpPr>
@@ -32866,7 +33243,7 @@
       </p:sp>
       <p:sp>
         <p:nvSpPr>
-          <p:cNvPr id="616" name="Google Shape;616;p27"/>
+          <p:cNvPr id="617" name="Google Shape;617;p27"/>
           <p:cNvSpPr txBox="1"/>
           <p:nvPr/>
         </p:nvSpPr>
@@ -32932,7 +33309,7 @@
       </p:sp>
       <p:sp>
         <p:nvSpPr>
-          <p:cNvPr id="617" name="Google Shape;617;p27"/>
+          <p:cNvPr id="618" name="Google Shape;618;p27"/>
           <p:cNvSpPr/>
           <p:nvPr/>
         </p:nvSpPr>
@@ -32999,7 +33376,7 @@
       </p:sp>
       <p:sp>
         <p:nvSpPr>
-          <p:cNvPr id="618" name="Google Shape;618;p27"/>
+          <p:cNvPr id="619" name="Google Shape;619;p27"/>
           <p:cNvSpPr/>
           <p:nvPr/>
         </p:nvSpPr>
@@ -33064,7 +33441,7 @@
       </p:sp>
       <p:sp>
         <p:nvSpPr>
-          <p:cNvPr id="619" name="Google Shape;619;p27"/>
+          <p:cNvPr id="620" name="Google Shape;620;p27"/>
           <p:cNvSpPr txBox="1"/>
           <p:nvPr/>
         </p:nvSpPr>
@@ -33130,7 +33507,7 @@
       </p:sp>
       <p:sp>
         <p:nvSpPr>
-          <p:cNvPr id="620" name="Google Shape;620;p27"/>
+          <p:cNvPr id="621" name="Google Shape;621;p27"/>
           <p:cNvSpPr txBox="1"/>
           <p:nvPr/>
         </p:nvSpPr>
@@ -33196,7 +33573,7 @@
       </p:sp>
       <p:sp>
         <p:nvSpPr>
-          <p:cNvPr id="621" name="Google Shape;621;p27"/>
+          <p:cNvPr id="622" name="Google Shape;622;p27"/>
           <p:cNvSpPr txBox="1"/>
           <p:nvPr/>
         </p:nvSpPr>
@@ -33262,7 +33639,7 @@
       </p:sp>
       <p:sp>
         <p:nvSpPr>
-          <p:cNvPr id="622" name="Google Shape;622;p27"/>
+          <p:cNvPr id="623" name="Google Shape;623;p27"/>
           <p:cNvSpPr/>
           <p:nvPr/>
         </p:nvSpPr>
@@ -33329,7 +33706,7 @@
       </p:sp>
       <p:pic>
         <p:nvPicPr>
-          <p:cNvPr descr="preencoded.png" id="623" name="Google Shape;623;p27"/>
+          <p:cNvPr descr="preencoded.png" id="624" name="Google Shape;624;p27"/>
           <p:cNvPicPr preferRelativeResize="0"/>
           <p:nvPr/>
         </p:nvPicPr>
@@ -33356,7 +33733,7 @@
       </p:pic>
       <p:sp>
         <p:nvSpPr>
-          <p:cNvPr id="624" name="Google Shape;624;p27"/>
+          <p:cNvPr id="625" name="Google Shape;625;p27"/>
           <p:cNvSpPr txBox="1"/>
           <p:nvPr/>
         </p:nvSpPr>
@@ -33434,7 +33811,7 @@
       </p:sp>
       <p:sp>
         <p:nvSpPr>
-          <p:cNvPr id="625" name="Google Shape;625;p27"/>
+          <p:cNvPr id="626" name="Google Shape;626;p27"/>
           <p:cNvSpPr txBox="1"/>
           <p:nvPr>
             <p:ph idx="4294967295" type="sldNum"/>
@@ -33509,7 +33886,7 @@
   <p:cSld>
     <p:spTree>
       <p:nvGrpSpPr>
-        <p:cNvPr id="630" name="Shape 630"/>
+        <p:cNvPr id="631" name="Shape 631"/>
         <p:cNvGrpSpPr/>
         <p:nvPr/>
       </p:nvGrpSpPr>
@@ -33523,7 +33900,7 @@
       </p:grpSpPr>
       <p:sp>
         <p:nvSpPr>
-          <p:cNvPr id="631" name="Google Shape;631;p28"/>
+          <p:cNvPr id="632" name="Google Shape;632;p28"/>
           <p:cNvSpPr txBox="1"/>
           <p:nvPr/>
         </p:nvSpPr>
@@ -33589,7 +33966,7 @@
       </p:sp>
       <p:sp>
         <p:nvSpPr>
-          <p:cNvPr id="632" name="Google Shape;632;p28"/>
+          <p:cNvPr id="633" name="Google Shape;633;p28"/>
           <p:cNvSpPr txBox="1"/>
           <p:nvPr/>
         </p:nvSpPr>
@@ -33655,7 +34032,7 @@
       </p:sp>
       <p:sp>
         <p:nvSpPr>
-          <p:cNvPr id="633" name="Google Shape;633;p28"/>
+          <p:cNvPr id="634" name="Google Shape;634;p28"/>
           <p:cNvSpPr txBox="1"/>
           <p:nvPr/>
         </p:nvSpPr>
@@ -33721,7 +34098,7 @@
       </p:sp>
       <p:sp>
         <p:nvSpPr>
-          <p:cNvPr id="634" name="Google Shape;634;p28"/>
+          <p:cNvPr id="635" name="Google Shape;635;p28"/>
           <p:cNvSpPr txBox="1"/>
           <p:nvPr/>
         </p:nvSpPr>
@@ -33787,7 +34164,7 @@
       </p:sp>
       <p:sp>
         <p:nvSpPr>
-          <p:cNvPr id="635" name="Google Shape;635;p28"/>
+          <p:cNvPr id="636" name="Google Shape;636;p28"/>
           <p:cNvSpPr/>
           <p:nvPr/>
         </p:nvSpPr>
@@ -33852,7 +34229,7 @@
       </p:sp>
       <p:pic>
         <p:nvPicPr>
-          <p:cNvPr descr="preencoded.png" id="636" name="Google Shape;636;p28"/>
+          <p:cNvPr descr="preencoded.png" id="637" name="Google Shape;637;p28"/>
           <p:cNvPicPr preferRelativeResize="0"/>
           <p:nvPr/>
         </p:nvPicPr>
@@ -33879,7 +34256,7 @@
       </p:pic>
       <p:sp>
         <p:nvSpPr>
-          <p:cNvPr id="637" name="Google Shape;637;p28"/>
+          <p:cNvPr id="638" name="Google Shape;638;p28"/>
           <p:cNvSpPr txBox="1"/>
           <p:nvPr/>
         </p:nvSpPr>
@@ -33945,7 +34322,7 @@
       </p:sp>
       <p:sp>
         <p:nvSpPr>
-          <p:cNvPr id="638" name="Google Shape;638;p28"/>
+          <p:cNvPr id="639" name="Google Shape;639;p28"/>
           <p:cNvSpPr/>
           <p:nvPr/>
         </p:nvSpPr>
@@ -34010,7 +34387,7 @@
       </p:sp>
       <p:pic>
         <p:nvPicPr>
-          <p:cNvPr descr="preencoded.png" id="639" name="Google Shape;639;p28"/>
+          <p:cNvPr descr="preencoded.png" id="640" name="Google Shape;640;p28"/>
           <p:cNvPicPr preferRelativeResize="0"/>
           <p:nvPr/>
         </p:nvPicPr>
@@ -34037,7 +34414,7 @@
       </p:pic>
       <p:sp>
         <p:nvSpPr>
-          <p:cNvPr id="640" name="Google Shape;640;p28"/>
+          <p:cNvPr id="641" name="Google Shape;641;p28"/>
           <p:cNvSpPr txBox="1"/>
           <p:nvPr/>
         </p:nvSpPr>
@@ -34103,7 +34480,7 @@
       </p:sp>
       <p:sp>
         <p:nvSpPr>
-          <p:cNvPr id="641" name="Google Shape;641;p28"/>
+          <p:cNvPr id="642" name="Google Shape;642;p28"/>
           <p:cNvSpPr/>
           <p:nvPr/>
         </p:nvSpPr>
@@ -34168,7 +34545,7 @@
       </p:sp>
       <p:pic>
         <p:nvPicPr>
-          <p:cNvPr descr="preencoded.png" id="642" name="Google Shape;642;p28"/>
+          <p:cNvPr descr="preencoded.png" id="643" name="Google Shape;643;p28"/>
           <p:cNvPicPr preferRelativeResize="0"/>
           <p:nvPr/>
         </p:nvPicPr>
@@ -34195,7 +34572,7 @@
       </p:pic>
       <p:sp>
         <p:nvSpPr>
-          <p:cNvPr id="643" name="Google Shape;643;p28"/>
+          <p:cNvPr id="644" name="Google Shape;644;p28"/>
           <p:cNvSpPr txBox="1"/>
           <p:nvPr/>
         </p:nvSpPr>
@@ -34261,7 +34638,7 @@
       </p:sp>
       <p:sp>
         <p:nvSpPr>
-          <p:cNvPr id="644" name="Google Shape;644;p28"/>
+          <p:cNvPr id="645" name="Google Shape;645;p28"/>
           <p:cNvSpPr/>
           <p:nvPr/>
         </p:nvSpPr>
@@ -34326,7 +34703,7 @@
       </p:sp>
       <p:pic>
         <p:nvPicPr>
-          <p:cNvPr descr="preencoded.png" id="645" name="Google Shape;645;p28"/>
+          <p:cNvPr descr="preencoded.png" id="646" name="Google Shape;646;p28"/>
           <p:cNvPicPr preferRelativeResize="0"/>
           <p:nvPr/>
         </p:nvPicPr>
@@ -34353,7 +34730,7 @@
       </p:pic>
       <p:sp>
         <p:nvSpPr>
-          <p:cNvPr id="646" name="Google Shape;646;p28"/>
+          <p:cNvPr id="647" name="Google Shape;647;p28"/>
           <p:cNvSpPr txBox="1"/>
           <p:nvPr/>
         </p:nvSpPr>
@@ -34419,7 +34796,7 @@
       </p:sp>
       <p:sp>
         <p:nvSpPr>
-          <p:cNvPr id="647" name="Google Shape;647;p28"/>
+          <p:cNvPr id="648" name="Google Shape;648;p28"/>
           <p:cNvSpPr/>
           <p:nvPr/>
         </p:nvSpPr>
@@ -34486,7 +34863,7 @@
       </p:sp>
       <p:sp>
         <p:nvSpPr>
-          <p:cNvPr id="648" name="Google Shape;648;p28"/>
+          <p:cNvPr id="649" name="Google Shape;649;p28"/>
           <p:cNvSpPr/>
           <p:nvPr/>
         </p:nvSpPr>
@@ -34551,7 +34928,7 @@
       </p:sp>
       <p:pic>
         <p:nvPicPr>
-          <p:cNvPr descr="/tmp/claude-0/-workspace-training/3ce5cff6-cccf-5f33-b0ee-0b147a55120e/scratchpad/img9/ill27.png" id="649" name="Google Shape;649;p28"/>
+          <p:cNvPr descr="/tmp/claude-0/-workspace-training/3ce5cff6-cccf-5f33-b0ee-0b147a55120e/scratchpad/img9/ill27.png" id="650" name="Google Shape;650;p28"/>
           <p:cNvPicPr preferRelativeResize="0"/>
           <p:nvPr/>
         </p:nvPicPr>
@@ -34578,7 +34955,7 @@
       </p:pic>
       <p:sp>
         <p:nvSpPr>
-          <p:cNvPr id="650" name="Google Shape;650;p28"/>
+          <p:cNvPr id="651" name="Google Shape;651;p28"/>
           <p:cNvSpPr/>
           <p:nvPr/>
         </p:nvSpPr>
@@ -34643,7 +35020,7 @@
       </p:sp>
       <p:sp>
         <p:nvSpPr>
-          <p:cNvPr id="651" name="Google Shape;651;p28"/>
+          <p:cNvPr id="652" name="Google Shape;652;p28"/>
           <p:cNvSpPr/>
           <p:nvPr/>
         </p:nvSpPr>
@@ -34708,7 +35085,7 @@
       </p:sp>
       <p:sp>
         <p:nvSpPr>
-          <p:cNvPr id="652" name="Google Shape;652;p28"/>
+          <p:cNvPr id="653" name="Google Shape;653;p28"/>
           <p:cNvSpPr/>
           <p:nvPr/>
         </p:nvSpPr>
@@ -34773,7 +35150,7 @@
       </p:sp>
       <p:sp>
         <p:nvSpPr>
-          <p:cNvPr id="653" name="Google Shape;653;p28"/>
+          <p:cNvPr id="654" name="Google Shape;654;p28"/>
           <p:cNvSpPr/>
           <p:nvPr/>
         </p:nvSpPr>
@@ -34838,7 +35215,7 @@
       </p:sp>
       <p:sp>
         <p:nvSpPr>
-          <p:cNvPr id="654" name="Google Shape;654;p28"/>
+          <p:cNvPr id="655" name="Google Shape;655;p28"/>
           <p:cNvSpPr/>
           <p:nvPr/>
         </p:nvSpPr>
@@ -34903,7 +35280,7 @@
       </p:sp>
       <p:sp>
         <p:nvSpPr>
-          <p:cNvPr id="655" name="Google Shape;655;p28"/>
+          <p:cNvPr id="656" name="Google Shape;656;p28"/>
           <p:cNvSpPr/>
           <p:nvPr/>
         </p:nvSpPr>
@@ -34968,7 +35345,7 @@
       </p:sp>
       <p:sp>
         <p:nvSpPr>
-          <p:cNvPr id="656" name="Google Shape;656;p28"/>
+          <p:cNvPr id="657" name="Google Shape;657;p28"/>
           <p:cNvSpPr txBox="1"/>
           <p:nvPr>
             <p:ph idx="4294967295" type="sldNum"/>
@@ -35043,7 +35420,7 @@
   <p:cSld>
     <p:spTree>
       <p:nvGrpSpPr>
-        <p:cNvPr id="661" name="Shape 661"/>
+        <p:cNvPr id="662" name="Shape 662"/>
         <p:cNvGrpSpPr/>
         <p:nvPr/>
       </p:nvGrpSpPr>
@@ -35057,7 +35434,7 @@
       </p:grpSpPr>
       <p:sp>
         <p:nvSpPr>
-          <p:cNvPr id="662" name="Google Shape;662;p29"/>
+          <p:cNvPr id="663" name="Google Shape;663;p29"/>
           <p:cNvSpPr txBox="1"/>
           <p:nvPr/>
         </p:nvSpPr>
@@ -35123,7 +35500,7 @@
       </p:sp>
       <p:sp>
         <p:nvSpPr>
-          <p:cNvPr id="663" name="Google Shape;663;p29"/>
+          <p:cNvPr id="664" name="Google Shape;664;p29"/>
           <p:cNvSpPr txBox="1"/>
           <p:nvPr/>
         </p:nvSpPr>
@@ -35189,7 +35566,7 @@
       </p:sp>
       <p:sp>
         <p:nvSpPr>
-          <p:cNvPr id="664" name="Google Shape;664;p29"/>
+          <p:cNvPr id="665" name="Google Shape;665;p29"/>
           <p:cNvSpPr txBox="1"/>
           <p:nvPr/>
         </p:nvSpPr>
@@ -35255,18 +35632,84 @@
       </p:sp>
       <p:sp>
         <p:nvSpPr>
-          <p:cNvPr id="665" name="Google Shape;665;p29"/>
+          <p:cNvPr id="666" name="Google Shape;666;p29"/>
+          <p:cNvSpPr txBox="1"/>
+          <p:nvPr/>
+        </p:nvSpPr>
+        <p:spPr>
+          <a:xfrm>
+            <a:off x="411480" y="3108960"/>
+            <a:ext cx="4572000" cy="182880"/>
+          </a:xfrm>
+          <a:prstGeom prst="rect">
+            <a:avLst/>
+          </a:prstGeom>
+          <a:noFill/>
+          <a:ln>
+            <a:noFill/>
+          </a:ln>
+        </p:spPr>
+        <p:txBody>
+          <a:bodyPr anchorCtr="0" anchor="t" bIns="0" lIns="0" spcFirstLastPara="1" rIns="0" wrap="square" tIns="0">
+            <a:noAutofit/>
+          </a:bodyPr>
+          <a:lstStyle/>
+          <a:p>
+            <a:pPr indent="0" lvl="0" marL="0" marR="0" rtl="0" algn="l">
+              <a:lnSpc>
+                <a:spcPct val="100000"/>
+              </a:lnSpc>
+              <a:spcBef>
+                <a:spcPts val="0"/>
+              </a:spcBef>
+              <a:spcAft>
+                <a:spcPts val="0"/>
+              </a:spcAft>
+              <a:buClr>
+                <a:srgbClr val="0B7A6F"/>
+              </a:buClr>
+              <a:buSzPts val="800"/>
+              <a:buFont typeface="Play"/>
+              <a:buNone/>
+            </a:pPr>
+            <a:r>
+              <a:rPr b="1" i="0" lang="en-US" spc="50" sz="800" u="none" cap="none" strike="noStrike">
+                <a:solidFill>
+                  <a:srgbClr val="0B7A6F"/>
+                </a:solidFill>
+                <a:latin typeface="Play"/>
+                <a:ea typeface="Play"/>
+                <a:cs typeface="Play"/>
+                <a:sym typeface="Play"/>
+              </a:rPr>
+              <a:t>THREE REASONS IT REACHES YOU</a:t>
+            </a:r>
+            <a:endParaRPr b="0" i="0" spc="0" sz="800" u="none" cap="none" strike="noStrike">
+              <a:solidFill>
+                <a:schemeClr val="dk1"/>
+              </a:solidFill>
+              <a:latin typeface="Calibri"/>
+              <a:ea typeface="Calibri"/>
+              <a:cs typeface="Calibri"/>
+              <a:sym typeface="Calibri"/>
+            </a:endParaRPr>
+          </a:p>
+        </p:txBody>
+      </p:sp>
+      <p:sp>
+        <p:nvSpPr>
+          <p:cNvPr id="667" name="Google Shape;667;p29"/>
           <p:cNvSpPr/>
           <p:nvPr/>
         </p:nvSpPr>
         <p:spPr>
           <a:xfrm>
-            <a:off x="411480" y="1325880"/>
-            <a:ext cx="2682240" cy="1600200"/>
+            <a:off x="411480" y="3337560"/>
+            <a:ext cx="2682240" cy="685800"/>
           </a:xfrm>
           <a:prstGeom prst="roundRect">
             <a:avLst>
-              <a:gd fmla="val 4571" name="adj"/>
+              <a:gd fmla="val 10667" name="adj"/>
             </a:avLst>
           </a:prstGeom>
           <a:solidFill>
@@ -35322,24 +35765,24 @@
       </p:sp>
       <p:sp>
         <p:nvSpPr>
-          <p:cNvPr id="666" name="Google Shape;666;p29"/>
+          <p:cNvPr id="668" name="Google Shape;668;p29"/>
           <p:cNvSpPr/>
           <p:nvPr/>
         </p:nvSpPr>
         <p:spPr>
           <a:xfrm>
-            <a:off x="576072" y="1490472"/>
+            <a:off x="548640" y="3520440"/>
             <a:ext cx="329184" cy="329184"/>
           </a:xfrm>
           <a:prstGeom prst="ellipse">
             <a:avLst/>
           </a:prstGeom>
           <a:solidFill>
-            <a:srgbClr val="E3F4F1"/>
+            <a:srgbClr val="0B7A6F"/>
           </a:solidFill>
           <a:ln cap="flat" cmpd="sng" w="12700">
             <a:solidFill>
-              <a:srgbClr val="E3F4F1"/>
+              <a:srgbClr val="0B7A6F"/>
             </a:solidFill>
             <a:prstDash val="solid"/>
             <a:round/>
@@ -35385,23 +35828,16 @@
           </a:p>
         </p:txBody>
       </p:sp>
-      <p:pic>
-        <p:nvPicPr>
-          <p:cNvPr descr="preencoded.png" id="667" name="Google Shape;667;p29"/>
-          <p:cNvPicPr preferRelativeResize="0"/>
-          <p:nvPr/>
-        </p:nvPicPr>
-        <p:blipFill rotWithShape="1">
-          <a:blip r:embed="rId3">
-            <a:alphaModFix/>
-          </a:blip>
-          <a:srcRect b="0" l="0" r="0" t="0"/>
-          <a:stretch/>
-        </p:blipFill>
-        <p:spPr>
-          <a:xfrm>
-            <a:off x="655076" y="1569476"/>
-            <a:ext cx="171176" cy="171176"/>
+      <p:sp>
+        <p:nvSpPr>
+          <p:cNvPr id="669" name="Google Shape;669;p29"/>
+          <p:cNvSpPr txBox="1"/>
+          <p:nvPr/>
+        </p:nvSpPr>
+        <p:spPr>
+          <a:xfrm>
+            <a:off x="548640" y="3520440"/>
+            <a:ext cx="329184" cy="329184"/>
           </a:xfrm>
           <a:prstGeom prst="rect">
             <a:avLst/>
@@ -35411,17 +35847,63 @@
             <a:noFill/>
           </a:ln>
         </p:spPr>
-      </p:pic>
-      <p:sp>
-        <p:nvSpPr>
-          <p:cNvPr id="668" name="Google Shape;668;p29"/>
+        <p:txBody>
+          <a:bodyPr anchorCtr="0" anchor="ctr" bIns="0" lIns="0" spcFirstLastPara="1" rIns="0" wrap="square" tIns="0">
+            <a:noAutofit/>
+          </a:bodyPr>
+          <a:lstStyle/>
+          <a:p>
+            <a:pPr indent="0" lvl="0" marL="0" marR="0" rtl="0" algn="ctr">
+              <a:lnSpc>
+                <a:spcPct val="100000"/>
+              </a:lnSpc>
+              <a:spcBef>
+                <a:spcPts val="0"/>
+              </a:spcBef>
+              <a:spcAft>
+                <a:spcPts val="0"/>
+              </a:spcAft>
+              <a:buClr>
+                <a:srgbClr val="FFFFFF"/>
+              </a:buClr>
+              <a:buSzPts val="1100"/>
+              <a:buFont typeface="Play"/>
+              <a:buNone/>
+            </a:pPr>
+            <a:r>
+              <a:rPr b="1" i="0" lang="en-US" spc="0" sz="1100" u="none" cap="none" strike="noStrike">
+                <a:solidFill>
+                  <a:srgbClr val="FFFFFF"/>
+                </a:solidFill>
+                <a:latin typeface="Play"/>
+                <a:ea typeface="Play"/>
+                <a:cs typeface="Play"/>
+                <a:sym typeface="Play"/>
+              </a:rPr>
+              <a:t>A</a:t>
+            </a:r>
+            <a:endParaRPr b="0" i="0" spc="0" sz="1100" u="none" cap="none" strike="noStrike">
+              <a:solidFill>
+                <a:schemeClr val="dk1"/>
+              </a:solidFill>
+              <a:latin typeface="Calibri"/>
+              <a:ea typeface="Calibri"/>
+              <a:cs typeface="Calibri"/>
+              <a:sym typeface="Calibri"/>
+            </a:endParaRPr>
+          </a:p>
+        </p:txBody>
+      </p:sp>
+      <p:sp>
+        <p:nvSpPr>
+          <p:cNvPr id="670" name="Google Shape;670;p29"/>
           <p:cNvSpPr txBox="1"/>
           <p:nvPr/>
         </p:nvSpPr>
         <p:spPr>
           <a:xfrm>
-            <a:off x="576072" y="1929384"/>
-            <a:ext cx="2353056" cy="274320"/>
+            <a:off x="978408" y="3337560"/>
+            <a:ext cx="1996440" cy="685800"/>
           </a:xfrm>
           <a:prstGeom prst="rect">
             <a:avLst/>
@@ -35432,7 +35914,7 @@
           </a:ln>
         </p:spPr>
         <p:txBody>
-          <a:bodyPr anchorCtr="0" anchor="t" bIns="0" lIns="0" spcFirstLastPara="1" rIns="0" wrap="square" tIns="0">
+          <a:bodyPr anchorCtr="0" anchor="ctr" bIns="0" lIns="0" spcFirstLastPara="1" rIns="0" wrap="square" tIns="0">
             <a:noAutofit/>
           </a:bodyPr>
           <a:lstStyle/>
@@ -35450,12 +35932,12 @@
               <a:buClr>
                 <a:srgbClr val="1D1D1F"/>
               </a:buClr>
-              <a:buSzPts val="1200"/>
+              <a:buSzPts val="1000"/>
               <a:buFont typeface="Play"/>
               <a:buNone/>
             </a:pPr>
             <a:r>
-              <a:rPr b="1" i="0" lang="en-US" spc="0" sz="1200" u="none" cap="none" strike="noStrike">
+              <a:rPr b="1" i="0" lang="en-US" spc="0" sz="1000" u="none" cap="none" strike="noStrike">
                 <a:solidFill>
                   <a:srgbClr val="1D1D1F"/>
                 </a:solidFill>
@@ -35464,9 +35946,9 @@
                 <a:cs typeface="Play"/>
                 <a:sym typeface="Play"/>
               </a:rPr>
-              <a:t>Several months, one day</a:t>
-            </a:r>
-            <a:endParaRPr b="0" i="0" spc="0" sz="1200" u="none" cap="none" strike="noStrike">
+              <a:t>FC overdue, not why C wrote in</a:t>
+            </a:r>
+            <a:endParaRPr b="0" i="0" spc="0" sz="1000" u="none" cap="none" strike="noStrike">
               <a:solidFill>
                 <a:schemeClr val="dk1"/>
               </a:solidFill>
@@ -35480,84 +35962,18 @@
       </p:sp>
       <p:sp>
         <p:nvSpPr>
-          <p:cNvPr id="669" name="Google Shape;669;p29"/>
-          <p:cNvSpPr txBox="1"/>
-          <p:nvPr/>
-        </p:nvSpPr>
-        <p:spPr>
-          <a:xfrm>
-            <a:off x="576072" y="2221992"/>
-            <a:ext cx="2353056" cy="612648"/>
-          </a:xfrm>
-          <a:prstGeom prst="rect">
-            <a:avLst/>
-          </a:prstGeom>
-          <a:noFill/>
-          <a:ln>
-            <a:noFill/>
-          </a:ln>
-        </p:spPr>
-        <p:txBody>
-          <a:bodyPr anchorCtr="0" anchor="t" bIns="0" lIns="0" spcFirstLastPara="1" rIns="0" wrap="square" tIns="0">
-            <a:noAutofit/>
-          </a:bodyPr>
-          <a:lstStyle/>
-          <a:p>
-            <a:pPr indent="0" lvl="0" marL="0" marR="0" rtl="0" algn="l">
-              <a:lnSpc>
-                <a:spcPct val="100000"/>
-              </a:lnSpc>
-              <a:spcBef>
-                <a:spcPts val="0"/>
-              </a:spcBef>
-              <a:spcAft>
-                <a:spcPts val="0"/>
-              </a:spcAft>
-              <a:buClr>
-                <a:srgbClr val="6E6E73"/>
-              </a:buClr>
-              <a:buSzPts val="950"/>
-              <a:buFont typeface="Arial"/>
-              <a:buNone/>
-            </a:pPr>
-            <a:r>
-              <a:rPr b="0" i="0" lang="en-US" spc="0" sz="950" u="none" cap="none" strike="noStrike">
-                <a:solidFill>
-                  <a:srgbClr val="6E6E73"/>
-                </a:solidFill>
-                <a:latin typeface="Arial"/>
-                <a:ea typeface="Arial"/>
-                <a:cs typeface="Arial"/>
-                <a:sym typeface="Arial"/>
-              </a:rPr>
-              <a:t>Each charge is a different missed month. DHJ and FCF alike.</a:t>
-            </a:r>
-            <a:endParaRPr b="0" i="0" spc="0" sz="950" u="none" cap="none" strike="noStrike">
-              <a:solidFill>
-                <a:schemeClr val="dk1"/>
-              </a:solidFill>
-              <a:latin typeface="Calibri"/>
-              <a:ea typeface="Calibri"/>
-              <a:cs typeface="Calibri"/>
-              <a:sym typeface="Calibri"/>
-            </a:endParaRPr>
-          </a:p>
-        </p:txBody>
-      </p:sp>
-      <p:sp>
-        <p:nvSpPr>
-          <p:cNvPr id="670" name="Google Shape;670;p29"/>
+          <p:cNvPr id="671" name="Google Shape;671;p29"/>
           <p:cNvSpPr/>
           <p:nvPr/>
         </p:nvSpPr>
         <p:spPr>
           <a:xfrm>
-            <a:off x="3230880" y="1325880"/>
-            <a:ext cx="2682240" cy="1600200"/>
+            <a:off x="3230880" y="3337560"/>
+            <a:ext cx="2682240" cy="685800"/>
           </a:xfrm>
           <a:prstGeom prst="roundRect">
             <a:avLst>
-              <a:gd fmla="val 4571" name="adj"/>
+              <a:gd fmla="val 10667" name="adj"/>
             </a:avLst>
           </a:prstGeom>
           <a:solidFill>
@@ -35613,24 +36029,24 @@
       </p:sp>
       <p:sp>
         <p:nvSpPr>
-          <p:cNvPr id="671" name="Google Shape;671;p29"/>
+          <p:cNvPr id="672" name="Google Shape;672;p29"/>
           <p:cNvSpPr/>
           <p:nvPr/>
         </p:nvSpPr>
         <p:spPr>
           <a:xfrm>
-            <a:off x="3395472" y="1490472"/>
+            <a:off x="3368040" y="3520440"/>
             <a:ext cx="329184" cy="329184"/>
           </a:xfrm>
           <a:prstGeom prst="ellipse">
             <a:avLst/>
           </a:prstGeom>
           <a:solidFill>
-            <a:srgbClr val="E3F4F1"/>
+            <a:srgbClr val="0B7A6F"/>
           </a:solidFill>
           <a:ln cap="flat" cmpd="sng" w="12700">
             <a:solidFill>
-              <a:srgbClr val="E3F4F1"/>
+              <a:srgbClr val="0B7A6F"/>
             </a:solidFill>
             <a:prstDash val="solid"/>
             <a:round/>
@@ -35676,23 +36092,16 @@
           </a:p>
         </p:txBody>
       </p:sp>
-      <p:pic>
-        <p:nvPicPr>
-          <p:cNvPr descr="preencoded.png" id="672" name="Google Shape;672;p29"/>
-          <p:cNvPicPr preferRelativeResize="0"/>
-          <p:nvPr/>
-        </p:nvPicPr>
-        <p:blipFill rotWithShape="1">
-          <a:blip r:embed="rId4">
-            <a:alphaModFix/>
-          </a:blip>
-          <a:srcRect b="0" l="0" r="0" t="0"/>
-          <a:stretch/>
-        </p:blipFill>
-        <p:spPr>
-          <a:xfrm>
-            <a:off x="3474476" y="1569476"/>
-            <a:ext cx="171176" cy="171176"/>
+      <p:sp>
+        <p:nvSpPr>
+          <p:cNvPr id="673" name="Google Shape;673;p29"/>
+          <p:cNvSpPr txBox="1"/>
+          <p:nvPr/>
+        </p:nvSpPr>
+        <p:spPr>
+          <a:xfrm>
+            <a:off x="3368040" y="3520440"/>
+            <a:ext cx="329184" cy="329184"/>
           </a:xfrm>
           <a:prstGeom prst="rect">
             <a:avLst/>
@@ -35702,17 +36111,63 @@
             <a:noFill/>
           </a:ln>
         </p:spPr>
-      </p:pic>
-      <p:sp>
-        <p:nvSpPr>
-          <p:cNvPr id="673" name="Google Shape;673;p29"/>
+        <p:txBody>
+          <a:bodyPr anchorCtr="0" anchor="ctr" bIns="0" lIns="0" spcFirstLastPara="1" rIns="0" wrap="square" tIns="0">
+            <a:noAutofit/>
+          </a:bodyPr>
+          <a:lstStyle/>
+          <a:p>
+            <a:pPr indent="0" lvl="0" marL="0" marR="0" rtl="0" algn="ctr">
+              <a:lnSpc>
+                <a:spcPct val="100000"/>
+              </a:lnSpc>
+              <a:spcBef>
+                <a:spcPts val="0"/>
+              </a:spcBef>
+              <a:spcAft>
+                <a:spcPts val="0"/>
+              </a:spcAft>
+              <a:buClr>
+                <a:srgbClr val="FFFFFF"/>
+              </a:buClr>
+              <a:buSzPts val="1100"/>
+              <a:buFont typeface="Play"/>
+              <a:buNone/>
+            </a:pPr>
+            <a:r>
+              <a:rPr b="1" i="0" lang="en-US" spc="0" sz="1100" u="none" cap="none" strike="noStrike">
+                <a:solidFill>
+                  <a:srgbClr val="FFFFFF"/>
+                </a:solidFill>
+                <a:latin typeface="Play"/>
+                <a:ea typeface="Play"/>
+                <a:cs typeface="Play"/>
+                <a:sym typeface="Play"/>
+              </a:rPr>
+              <a:t>B</a:t>
+            </a:r>
+            <a:endParaRPr b="0" i="0" spc="0" sz="1100" u="none" cap="none" strike="noStrike">
+              <a:solidFill>
+                <a:schemeClr val="dk1"/>
+              </a:solidFill>
+              <a:latin typeface="Calibri"/>
+              <a:ea typeface="Calibri"/>
+              <a:cs typeface="Calibri"/>
+              <a:sym typeface="Calibri"/>
+            </a:endParaRPr>
+          </a:p>
+        </p:txBody>
+      </p:sp>
+      <p:sp>
+        <p:nvSpPr>
+          <p:cNvPr id="674" name="Google Shape;674;p29"/>
           <p:cNvSpPr txBox="1"/>
           <p:nvPr/>
         </p:nvSpPr>
         <p:spPr>
           <a:xfrm>
-            <a:off x="3395472" y="1929384"/>
-            <a:ext cx="2353056" cy="274320"/>
+            <a:off x="3797808" y="3337560"/>
+            <a:ext cx="1996440" cy="685800"/>
           </a:xfrm>
           <a:prstGeom prst="rect">
             <a:avLst/>
@@ -35723,7 +36178,7 @@
           </a:ln>
         </p:spPr>
         <p:txBody>
-          <a:bodyPr anchorCtr="0" anchor="t" bIns="0" lIns="0" spcFirstLastPara="1" rIns="0" wrap="square" tIns="0">
+          <a:bodyPr anchorCtr="0" anchor="ctr" bIns="0" lIns="0" spcFirstLastPara="1" rIns="0" wrap="square" tIns="0">
             <a:noAutofit/>
           </a:bodyPr>
           <a:lstStyle/>
@@ -35741,12 +36196,12 @@
               <a:buClr>
                 <a:srgbClr val="1D1D1F"/>
               </a:buClr>
-              <a:buSzPts val="1200"/>
+              <a:buSzPts val="1000"/>
               <a:buFont typeface="Play"/>
               <a:buNone/>
             </a:pPr>
             <a:r>
-              <a:rPr b="1" i="0" lang="en-US" spc="0" sz="1200" u="none" cap="none" strike="noStrike">
+              <a:rPr b="1" i="0" lang="en-US" spc="0" sz="1000" u="none" cap="none" strike="noStrike">
                 <a:solidFill>
                   <a:srgbClr val="1D1D1F"/>
                 </a:solidFill>
@@ -35755,9 +36210,9 @@
                 <a:cs typeface="Play"/>
                 <a:sym typeface="Play"/>
               </a:rPr>
-              <a:t>Since Sep 12, 2024</a:t>
-            </a:r>
-            <a:endParaRPr b="0" i="0" spc="0" sz="1200" u="none" cap="none" strike="noStrike">
+              <a:t>FC cancelled, wants a refund</a:t>
+            </a:r>
+            <a:endParaRPr b="0" i="0" spc="0" sz="1000" u="none" cap="none" strike="noStrike">
               <a:solidFill>
                 <a:schemeClr val="dk1"/>
               </a:solidFill>
@@ -35771,84 +36226,18 @@
       </p:sp>
       <p:sp>
         <p:nvSpPr>
-          <p:cNvPr id="674" name="Google Shape;674;p29"/>
-          <p:cNvSpPr txBox="1"/>
-          <p:nvPr/>
-        </p:nvSpPr>
-        <p:spPr>
-          <a:xfrm>
-            <a:off x="3395472" y="2221992"/>
-            <a:ext cx="2353056" cy="612648"/>
-          </a:xfrm>
-          <a:prstGeom prst="rect">
-            <a:avLst/>
-          </a:prstGeom>
-          <a:noFill/>
-          <a:ln>
-            <a:noFill/>
-          </a:ln>
-        </p:spPr>
-        <p:txBody>
-          <a:bodyPr anchorCtr="0" anchor="t" bIns="0" lIns="0" spcFirstLastPara="1" rIns="0" wrap="square" tIns="0">
-            <a:noAutofit/>
-          </a:bodyPr>
-          <a:lstStyle/>
-          <a:p>
-            <a:pPr indent="0" lvl="0" marL="0" marR="0" rtl="0" algn="l">
-              <a:lnSpc>
-                <a:spcPct val="100000"/>
-              </a:lnSpc>
-              <a:spcBef>
-                <a:spcPts val="0"/>
-              </a:spcBef>
-              <a:spcAft>
-                <a:spcPts val="0"/>
-              </a:spcAft>
-              <a:buClr>
-                <a:srgbClr val="6E6E73"/>
-              </a:buClr>
-              <a:buSzPts val="950"/>
-              <a:buFont typeface="Arial"/>
-              <a:buNone/>
-            </a:pPr>
-            <a:r>
-              <a:rPr b="0" i="0" lang="en-US" spc="0" sz="950" u="none" cap="none" strike="noStrike">
-                <a:solidFill>
-                  <a:srgbClr val="6E6E73"/>
-                </a:solidFill>
-                <a:latin typeface="Arial"/>
-                <a:ea typeface="Arial"/>
-                <a:cs typeface="Arial"/>
-                <a:sym typeface="Arial"/>
-              </a:rPr>
-              <a:t>No more automatic free months. The true-up is now on agents.</a:t>
-            </a:r>
-            <a:endParaRPr b="0" i="0" spc="0" sz="950" u="none" cap="none" strike="noStrike">
-              <a:solidFill>
-                <a:schemeClr val="dk1"/>
-              </a:solidFill>
-              <a:latin typeface="Calibri"/>
-              <a:ea typeface="Calibri"/>
-              <a:cs typeface="Calibri"/>
-              <a:sym typeface="Calibri"/>
-            </a:endParaRPr>
-          </a:p>
-        </p:txBody>
-      </p:sp>
-      <p:sp>
-        <p:nvSpPr>
           <p:cNvPr id="675" name="Google Shape;675;p29"/>
           <p:cNvSpPr/>
           <p:nvPr/>
         </p:nvSpPr>
         <p:spPr>
           <a:xfrm>
-            <a:off x="6050280" y="1325880"/>
-            <a:ext cx="2682240" cy="1600200"/>
+            <a:off x="6050280" y="3337560"/>
+            <a:ext cx="2682240" cy="685800"/>
           </a:xfrm>
           <a:prstGeom prst="roundRect">
             <a:avLst>
-              <a:gd fmla="val 4571" name="adj"/>
+              <a:gd fmla="val 10667" name="adj"/>
             </a:avLst>
           </a:prstGeom>
           <a:solidFill>
@@ -35910,364 +36299,7 @@
         </p:nvSpPr>
         <p:spPr>
           <a:xfrm>
-            <a:off x="6214872" y="1490472"/>
-            <a:ext cx="329184" cy="329184"/>
-          </a:xfrm>
-          <a:prstGeom prst="ellipse">
-            <a:avLst/>
-          </a:prstGeom>
-          <a:solidFill>
-            <a:srgbClr val="E3F4F1"/>
-          </a:solidFill>
-          <a:ln cap="flat" cmpd="sng" w="12700">
-            <a:solidFill>
-              <a:srgbClr val="E3F4F1"/>
-            </a:solidFill>
-            <a:prstDash val="solid"/>
-            <a:round/>
-            <a:headEnd len="sm" w="sm" type="none"/>
-            <a:tailEnd len="sm" w="sm" type="none"/>
-          </a:ln>
-        </p:spPr>
-        <p:txBody>
-          <a:bodyPr anchorCtr="0" anchor="ctr" bIns="91425" lIns="91425" spcFirstLastPara="1" rIns="91425" wrap="square" tIns="91425">
-            <a:noAutofit/>
-          </a:bodyPr>
-          <a:lstStyle/>
-          <a:p>
-            <a:pPr indent="0" lvl="0" marL="0" marR="0" rtl="0" algn="l">
-              <a:lnSpc>
-                <a:spcPct val="100000"/>
-              </a:lnSpc>
-              <a:spcBef>
-                <a:spcPts val="0"/>
-              </a:spcBef>
-              <a:spcAft>
-                <a:spcPts val="0"/>
-              </a:spcAft>
-              <a:buClr>
-                <a:srgbClr val="000000"/>
-              </a:buClr>
-              <a:buSzPts val="1400"/>
-              <a:buFont typeface="Arial"/>
-              <a:buNone/>
-            </a:pPr>
-            <a:r>
-              <a:t/>
-            </a:r>
-            <a:endParaRPr b="0" i="0" spc="0" sz="1400" u="none" cap="none" strike="noStrike">
-              <a:solidFill>
-                <a:srgbClr val="000000"/>
-              </a:solidFill>
-              <a:latin typeface="Arial"/>
-              <a:ea typeface="Arial"/>
-              <a:cs typeface="Arial"/>
-              <a:sym typeface="Arial"/>
-            </a:endParaRPr>
-          </a:p>
-        </p:txBody>
-      </p:sp>
-      <p:pic>
-        <p:nvPicPr>
-          <p:cNvPr descr="preencoded.png" id="677" name="Google Shape;677;p29"/>
-          <p:cNvPicPr preferRelativeResize="0"/>
-          <p:nvPr/>
-        </p:nvPicPr>
-        <p:blipFill rotWithShape="1">
-          <a:blip r:embed="rId5">
-            <a:alphaModFix/>
-          </a:blip>
-          <a:srcRect b="0" l="0" r="0" t="0"/>
-          <a:stretch/>
-        </p:blipFill>
-        <p:spPr>
-          <a:xfrm>
-            <a:off x="6293876" y="1569476"/>
-            <a:ext cx="171176" cy="171176"/>
-          </a:xfrm>
-          <a:prstGeom prst="rect">
-            <a:avLst/>
-          </a:prstGeom>
-          <a:noFill/>
-          <a:ln>
-            <a:noFill/>
-          </a:ln>
-        </p:spPr>
-      </p:pic>
-      <p:sp>
-        <p:nvSpPr>
-          <p:cNvPr id="678" name="Google Shape;678;p29"/>
-          <p:cNvSpPr txBox="1"/>
-          <p:nvPr/>
-        </p:nvSpPr>
-        <p:spPr>
-          <a:xfrm>
-            <a:off x="6214872" y="1929384"/>
-            <a:ext cx="2353056" cy="274320"/>
-          </a:xfrm>
-          <a:prstGeom prst="rect">
-            <a:avLst/>
-          </a:prstGeom>
-          <a:noFill/>
-          <a:ln>
-            <a:noFill/>
-          </a:ln>
-        </p:spPr>
-        <p:txBody>
-          <a:bodyPr anchorCtr="0" anchor="t" bIns="0" lIns="0" spcFirstLastPara="1" rIns="0" wrap="square" tIns="0">
-            <a:noAutofit/>
-          </a:bodyPr>
-          <a:lstStyle/>
-          <a:p>
-            <a:pPr indent="0" lvl="0" marL="0" marR="0" rtl="0" algn="l">
-              <a:lnSpc>
-                <a:spcPct val="100000"/>
-              </a:lnSpc>
-              <a:spcBef>
-                <a:spcPts val="0"/>
-              </a:spcBef>
-              <a:spcAft>
-                <a:spcPts val="0"/>
-              </a:spcAft>
-              <a:buClr>
-                <a:srgbClr val="1D1D1F"/>
-              </a:buClr>
-              <a:buSzPts val="1200"/>
-              <a:buFont typeface="Play"/>
-              <a:buNone/>
-            </a:pPr>
-            <a:r>
-              <a:rPr b="1" i="0" lang="en-US" spc="0" sz="1200" u="none" cap="none" strike="noStrike">
-                <a:solidFill>
-                  <a:srgbClr val="1D1D1F"/>
-                </a:solidFill>
-                <a:latin typeface="Play"/>
-                <a:ea typeface="Play"/>
-                <a:cs typeface="Play"/>
-                <a:sym typeface="Play"/>
-              </a:rPr>
-              <a:t>Did they get value?</a:t>
-            </a:r>
-            <a:endParaRPr b="0" i="0" spc="0" sz="1200" u="none" cap="none" strike="noStrike">
-              <a:solidFill>
-                <a:schemeClr val="dk1"/>
-              </a:solidFill>
-              <a:latin typeface="Calibri"/>
-              <a:ea typeface="Calibri"/>
-              <a:cs typeface="Calibri"/>
-              <a:sym typeface="Calibri"/>
-            </a:endParaRPr>
-          </a:p>
-        </p:txBody>
-      </p:sp>
-      <p:sp>
-        <p:nvSpPr>
-          <p:cNvPr id="679" name="Google Shape;679;p29"/>
-          <p:cNvSpPr txBox="1"/>
-          <p:nvPr/>
-        </p:nvSpPr>
-        <p:spPr>
-          <a:xfrm>
-            <a:off x="6214872" y="2221992"/>
-            <a:ext cx="2353056" cy="612648"/>
-          </a:xfrm>
-          <a:prstGeom prst="rect">
-            <a:avLst/>
-          </a:prstGeom>
-          <a:noFill/>
-          <a:ln>
-            <a:noFill/>
-          </a:ln>
-        </p:spPr>
-        <p:txBody>
-          <a:bodyPr anchorCtr="0" anchor="t" bIns="0" lIns="0" spcFirstLastPara="1" rIns="0" wrap="square" tIns="0">
-            <a:noAutofit/>
-          </a:bodyPr>
-          <a:lstStyle/>
-          <a:p>
-            <a:pPr indent="0" lvl="0" marL="0" marR="0" rtl="0" algn="l">
-              <a:lnSpc>
-                <a:spcPct val="100000"/>
-              </a:lnSpc>
-              <a:spcBef>
-                <a:spcPts val="0"/>
-              </a:spcBef>
-              <a:spcAft>
-                <a:spcPts val="0"/>
-              </a:spcAft>
-              <a:buClr>
-                <a:srgbClr val="6E6E73"/>
-              </a:buClr>
-              <a:buSzPts val="950"/>
-              <a:buFont typeface="Arial"/>
-              <a:buNone/>
-            </a:pPr>
-            <a:r>
-              <a:rPr b="0" i="0" lang="en-US" spc="0" sz="950" u="none" cap="none" strike="noStrike">
-                <a:solidFill>
-                  <a:srgbClr val="6E6E73"/>
-                </a:solidFill>
-                <a:latin typeface="Arial"/>
-                <a:ea typeface="Arial"/>
-                <a:cs typeface="Arial"/>
-                <a:sym typeface="Arial"/>
-              </a:rPr>
-              <a:t>Using the service, or didn't know they were billed? That drives the fix.</a:t>
-            </a:r>
-            <a:endParaRPr b="0" i="0" spc="0" sz="950" u="none" cap="none" strike="noStrike">
-              <a:solidFill>
-                <a:schemeClr val="dk1"/>
-              </a:solidFill>
-              <a:latin typeface="Calibri"/>
-              <a:ea typeface="Calibri"/>
-              <a:cs typeface="Calibri"/>
-              <a:sym typeface="Calibri"/>
-            </a:endParaRPr>
-          </a:p>
-        </p:txBody>
-      </p:sp>
-      <p:sp>
-        <p:nvSpPr>
-          <p:cNvPr id="680" name="Google Shape;680;p29"/>
-          <p:cNvSpPr txBox="1"/>
-          <p:nvPr/>
-        </p:nvSpPr>
-        <p:spPr>
-          <a:xfrm>
-            <a:off x="411480" y="3108960"/>
-            <a:ext cx="4572000" cy="182880"/>
-          </a:xfrm>
-          <a:prstGeom prst="rect">
-            <a:avLst/>
-          </a:prstGeom>
-          <a:noFill/>
-          <a:ln>
-            <a:noFill/>
-          </a:ln>
-        </p:spPr>
-        <p:txBody>
-          <a:bodyPr anchorCtr="0" anchor="t" bIns="0" lIns="0" spcFirstLastPara="1" rIns="0" wrap="square" tIns="0">
-            <a:noAutofit/>
-          </a:bodyPr>
-          <a:lstStyle/>
-          <a:p>
-            <a:pPr indent="0" lvl="0" marL="0" marR="0" rtl="0" algn="l">
-              <a:lnSpc>
-                <a:spcPct val="100000"/>
-              </a:lnSpc>
-              <a:spcBef>
-                <a:spcPts val="0"/>
-              </a:spcBef>
-              <a:spcAft>
-                <a:spcPts val="0"/>
-              </a:spcAft>
-              <a:buClr>
-                <a:srgbClr val="0B7A6F"/>
-              </a:buClr>
-              <a:buSzPts val="800"/>
-              <a:buFont typeface="Play"/>
-              <a:buNone/>
-            </a:pPr>
-            <a:r>
-              <a:rPr b="1" i="0" lang="en-US" spc="50" sz="800" u="none" cap="none" strike="noStrike">
-                <a:solidFill>
-                  <a:srgbClr val="0B7A6F"/>
-                </a:solidFill>
-                <a:latin typeface="Play"/>
-                <a:ea typeface="Play"/>
-                <a:cs typeface="Play"/>
-                <a:sym typeface="Play"/>
-              </a:rPr>
-              <a:t>THREE REASONS IT REACHES YOU</a:t>
-            </a:r>
-            <a:endParaRPr b="0" i="0" spc="0" sz="800" u="none" cap="none" strike="noStrike">
-              <a:solidFill>
-                <a:schemeClr val="dk1"/>
-              </a:solidFill>
-              <a:latin typeface="Calibri"/>
-              <a:ea typeface="Calibri"/>
-              <a:cs typeface="Calibri"/>
-              <a:sym typeface="Calibri"/>
-            </a:endParaRPr>
-          </a:p>
-        </p:txBody>
-      </p:sp>
-      <p:sp>
-        <p:nvSpPr>
-          <p:cNvPr id="681" name="Google Shape;681;p29"/>
-          <p:cNvSpPr/>
-          <p:nvPr/>
-        </p:nvSpPr>
-        <p:spPr>
-          <a:xfrm>
-            <a:off x="411480" y="3337560"/>
-            <a:ext cx="2682240" cy="685800"/>
-          </a:xfrm>
-          <a:prstGeom prst="roundRect">
-            <a:avLst>
-              <a:gd fmla="val 10667" name="adj"/>
-            </a:avLst>
-          </a:prstGeom>
-          <a:solidFill>
-            <a:srgbClr val="FFFFFF"/>
-          </a:solidFill>
-          <a:ln cap="flat" cmpd="sng" w="9525">
-            <a:solidFill>
-              <a:srgbClr val="DCE1E7"/>
-            </a:solidFill>
-            <a:prstDash val="solid"/>
-            <a:round/>
-            <a:headEnd len="sm" w="sm" type="none"/>
-            <a:tailEnd len="sm" w="sm" type="none"/>
-          </a:ln>
-        </p:spPr>
-        <p:txBody>
-          <a:bodyPr anchorCtr="0" anchor="ctr" bIns="91425" lIns="91425" spcFirstLastPara="1" rIns="91425" wrap="square" tIns="91425">
-            <a:noAutofit/>
-          </a:bodyPr>
-          <a:lstStyle/>
-          <a:p>
-            <a:pPr indent="0" lvl="0" marL="0" marR="0" rtl="0" algn="l">
-              <a:lnSpc>
-                <a:spcPct val="100000"/>
-              </a:lnSpc>
-              <a:spcBef>
-                <a:spcPts val="0"/>
-              </a:spcBef>
-              <a:spcAft>
-                <a:spcPts val="0"/>
-              </a:spcAft>
-              <a:buClr>
-                <a:srgbClr val="000000"/>
-              </a:buClr>
-              <a:buSzPts val="1400"/>
-              <a:buFont typeface="Arial"/>
-              <a:buNone/>
-            </a:pPr>
-            <a:r>
-              <a:t/>
-            </a:r>
-            <a:endParaRPr b="0" i="0" spc="0" sz="1400" u="none" cap="none" strike="noStrike">
-              <a:solidFill>
-                <a:srgbClr val="000000"/>
-              </a:solidFill>
-              <a:latin typeface="Arial"/>
-              <a:ea typeface="Arial"/>
-              <a:cs typeface="Arial"/>
-              <a:sym typeface="Arial"/>
-            </a:endParaRPr>
-          </a:p>
-        </p:txBody>
-      </p:sp>
-      <p:sp>
-        <p:nvSpPr>
-          <p:cNvPr id="682" name="Google Shape;682;p29"/>
-          <p:cNvSpPr/>
-          <p:nvPr/>
-        </p:nvSpPr>
-        <p:spPr>
-          <a:xfrm>
-            <a:off x="548640" y="3520440"/>
+            <a:off x="6187440" y="3520440"/>
             <a:ext cx="329184" cy="329184"/>
           </a:xfrm>
           <a:prstGeom prst="ellipse">
@@ -36326,535 +36358,7 @@
       </p:sp>
       <p:sp>
         <p:nvSpPr>
-          <p:cNvPr id="683" name="Google Shape;683;p29"/>
-          <p:cNvSpPr txBox="1"/>
-          <p:nvPr/>
-        </p:nvSpPr>
-        <p:spPr>
-          <a:xfrm>
-            <a:off x="548640" y="3520440"/>
-            <a:ext cx="329184" cy="329184"/>
-          </a:xfrm>
-          <a:prstGeom prst="rect">
-            <a:avLst/>
-          </a:prstGeom>
-          <a:noFill/>
-          <a:ln>
-            <a:noFill/>
-          </a:ln>
-        </p:spPr>
-        <p:txBody>
-          <a:bodyPr anchorCtr="0" anchor="ctr" bIns="0" lIns="0" spcFirstLastPara="1" rIns="0" wrap="square" tIns="0">
-            <a:noAutofit/>
-          </a:bodyPr>
-          <a:lstStyle/>
-          <a:p>
-            <a:pPr indent="0" lvl="0" marL="0" marR="0" rtl="0" algn="ctr">
-              <a:lnSpc>
-                <a:spcPct val="100000"/>
-              </a:lnSpc>
-              <a:spcBef>
-                <a:spcPts val="0"/>
-              </a:spcBef>
-              <a:spcAft>
-                <a:spcPts val="0"/>
-              </a:spcAft>
-              <a:buClr>
-                <a:srgbClr val="FFFFFF"/>
-              </a:buClr>
-              <a:buSzPts val="1100"/>
-              <a:buFont typeface="Play"/>
-              <a:buNone/>
-            </a:pPr>
-            <a:r>
-              <a:rPr b="1" i="0" lang="en-US" spc="0" sz="1100" u="none" cap="none" strike="noStrike">
-                <a:solidFill>
-                  <a:srgbClr val="FFFFFF"/>
-                </a:solidFill>
-                <a:latin typeface="Play"/>
-                <a:ea typeface="Play"/>
-                <a:cs typeface="Play"/>
-                <a:sym typeface="Play"/>
-              </a:rPr>
-              <a:t>A</a:t>
-            </a:r>
-            <a:endParaRPr b="0" i="0" spc="0" sz="1100" u="none" cap="none" strike="noStrike">
-              <a:solidFill>
-                <a:schemeClr val="dk1"/>
-              </a:solidFill>
-              <a:latin typeface="Calibri"/>
-              <a:ea typeface="Calibri"/>
-              <a:cs typeface="Calibri"/>
-              <a:sym typeface="Calibri"/>
-            </a:endParaRPr>
-          </a:p>
-        </p:txBody>
-      </p:sp>
-      <p:sp>
-        <p:nvSpPr>
-          <p:cNvPr id="684" name="Google Shape;684;p29"/>
-          <p:cNvSpPr txBox="1"/>
-          <p:nvPr/>
-        </p:nvSpPr>
-        <p:spPr>
-          <a:xfrm>
-            <a:off x="978408" y="3337560"/>
-            <a:ext cx="1996440" cy="685800"/>
-          </a:xfrm>
-          <a:prstGeom prst="rect">
-            <a:avLst/>
-          </a:prstGeom>
-          <a:noFill/>
-          <a:ln>
-            <a:noFill/>
-          </a:ln>
-        </p:spPr>
-        <p:txBody>
-          <a:bodyPr anchorCtr="0" anchor="ctr" bIns="0" lIns="0" spcFirstLastPara="1" rIns="0" wrap="square" tIns="0">
-            <a:noAutofit/>
-          </a:bodyPr>
-          <a:lstStyle/>
-          <a:p>
-            <a:pPr indent="0" lvl="0" marL="0" marR="0" rtl="0" algn="l">
-              <a:lnSpc>
-                <a:spcPct val="100000"/>
-              </a:lnSpc>
-              <a:spcBef>
-                <a:spcPts val="0"/>
-              </a:spcBef>
-              <a:spcAft>
-                <a:spcPts val="0"/>
-              </a:spcAft>
-              <a:buClr>
-                <a:srgbClr val="1D1D1F"/>
-              </a:buClr>
-              <a:buSzPts val="1000"/>
-              <a:buFont typeface="Play"/>
-              <a:buNone/>
-            </a:pPr>
-            <a:r>
-              <a:rPr b="1" i="0" lang="en-US" spc="0" sz="1000" u="none" cap="none" strike="noStrike">
-                <a:solidFill>
-                  <a:srgbClr val="1D1D1F"/>
-                </a:solidFill>
-                <a:latin typeface="Play"/>
-                <a:ea typeface="Play"/>
-                <a:cs typeface="Play"/>
-                <a:sym typeface="Play"/>
-              </a:rPr>
-              <a:t>FC overdue, not why C wrote in</a:t>
-            </a:r>
-            <a:endParaRPr b="0" i="0" spc="0" sz="1000" u="none" cap="none" strike="noStrike">
-              <a:solidFill>
-                <a:schemeClr val="dk1"/>
-              </a:solidFill>
-              <a:latin typeface="Calibri"/>
-              <a:ea typeface="Calibri"/>
-              <a:cs typeface="Calibri"/>
-              <a:sym typeface="Calibri"/>
-            </a:endParaRPr>
-          </a:p>
-        </p:txBody>
-      </p:sp>
-      <p:sp>
-        <p:nvSpPr>
-          <p:cNvPr id="685" name="Google Shape;685;p29"/>
-          <p:cNvSpPr/>
-          <p:nvPr/>
-        </p:nvSpPr>
-        <p:spPr>
-          <a:xfrm>
-            <a:off x="3230880" y="3337560"/>
-            <a:ext cx="2682240" cy="685800"/>
-          </a:xfrm>
-          <a:prstGeom prst="roundRect">
-            <a:avLst>
-              <a:gd fmla="val 10667" name="adj"/>
-            </a:avLst>
-          </a:prstGeom>
-          <a:solidFill>
-            <a:srgbClr val="FFFFFF"/>
-          </a:solidFill>
-          <a:ln cap="flat" cmpd="sng" w="9525">
-            <a:solidFill>
-              <a:srgbClr val="DCE1E7"/>
-            </a:solidFill>
-            <a:prstDash val="solid"/>
-            <a:round/>
-            <a:headEnd len="sm" w="sm" type="none"/>
-            <a:tailEnd len="sm" w="sm" type="none"/>
-          </a:ln>
-        </p:spPr>
-        <p:txBody>
-          <a:bodyPr anchorCtr="0" anchor="ctr" bIns="91425" lIns="91425" spcFirstLastPara="1" rIns="91425" wrap="square" tIns="91425">
-            <a:noAutofit/>
-          </a:bodyPr>
-          <a:lstStyle/>
-          <a:p>
-            <a:pPr indent="0" lvl="0" marL="0" marR="0" rtl="0" algn="l">
-              <a:lnSpc>
-                <a:spcPct val="100000"/>
-              </a:lnSpc>
-              <a:spcBef>
-                <a:spcPts val="0"/>
-              </a:spcBef>
-              <a:spcAft>
-                <a:spcPts val="0"/>
-              </a:spcAft>
-              <a:buClr>
-                <a:srgbClr val="000000"/>
-              </a:buClr>
-              <a:buSzPts val="1400"/>
-              <a:buFont typeface="Arial"/>
-              <a:buNone/>
-            </a:pPr>
-            <a:r>
-              <a:t/>
-            </a:r>
-            <a:endParaRPr b="0" i="0" spc="0" sz="1400" u="none" cap="none" strike="noStrike">
-              <a:solidFill>
-                <a:srgbClr val="000000"/>
-              </a:solidFill>
-              <a:latin typeface="Arial"/>
-              <a:ea typeface="Arial"/>
-              <a:cs typeface="Arial"/>
-              <a:sym typeface="Arial"/>
-            </a:endParaRPr>
-          </a:p>
-        </p:txBody>
-      </p:sp>
-      <p:sp>
-        <p:nvSpPr>
-          <p:cNvPr id="686" name="Google Shape;686;p29"/>
-          <p:cNvSpPr/>
-          <p:nvPr/>
-        </p:nvSpPr>
-        <p:spPr>
-          <a:xfrm>
-            <a:off x="3368040" y="3520440"/>
-            <a:ext cx="329184" cy="329184"/>
-          </a:xfrm>
-          <a:prstGeom prst="ellipse">
-            <a:avLst/>
-          </a:prstGeom>
-          <a:solidFill>
-            <a:srgbClr val="0B7A6F"/>
-          </a:solidFill>
-          <a:ln cap="flat" cmpd="sng" w="12700">
-            <a:solidFill>
-              <a:srgbClr val="0B7A6F"/>
-            </a:solidFill>
-            <a:prstDash val="solid"/>
-            <a:round/>
-            <a:headEnd len="sm" w="sm" type="none"/>
-            <a:tailEnd len="sm" w="sm" type="none"/>
-          </a:ln>
-        </p:spPr>
-        <p:txBody>
-          <a:bodyPr anchorCtr="0" anchor="ctr" bIns="91425" lIns="91425" spcFirstLastPara="1" rIns="91425" wrap="square" tIns="91425">
-            <a:noAutofit/>
-          </a:bodyPr>
-          <a:lstStyle/>
-          <a:p>
-            <a:pPr indent="0" lvl="0" marL="0" marR="0" rtl="0" algn="l">
-              <a:lnSpc>
-                <a:spcPct val="100000"/>
-              </a:lnSpc>
-              <a:spcBef>
-                <a:spcPts val="0"/>
-              </a:spcBef>
-              <a:spcAft>
-                <a:spcPts val="0"/>
-              </a:spcAft>
-              <a:buClr>
-                <a:srgbClr val="000000"/>
-              </a:buClr>
-              <a:buSzPts val="1400"/>
-              <a:buFont typeface="Arial"/>
-              <a:buNone/>
-            </a:pPr>
-            <a:r>
-              <a:t/>
-            </a:r>
-            <a:endParaRPr b="0" i="0" spc="0" sz="1400" u="none" cap="none" strike="noStrike">
-              <a:solidFill>
-                <a:srgbClr val="000000"/>
-              </a:solidFill>
-              <a:latin typeface="Arial"/>
-              <a:ea typeface="Arial"/>
-              <a:cs typeface="Arial"/>
-              <a:sym typeface="Arial"/>
-            </a:endParaRPr>
-          </a:p>
-        </p:txBody>
-      </p:sp>
-      <p:sp>
-        <p:nvSpPr>
-          <p:cNvPr id="687" name="Google Shape;687;p29"/>
-          <p:cNvSpPr txBox="1"/>
-          <p:nvPr/>
-        </p:nvSpPr>
-        <p:spPr>
-          <a:xfrm>
-            <a:off x="3368040" y="3520440"/>
-            <a:ext cx="329184" cy="329184"/>
-          </a:xfrm>
-          <a:prstGeom prst="rect">
-            <a:avLst/>
-          </a:prstGeom>
-          <a:noFill/>
-          <a:ln>
-            <a:noFill/>
-          </a:ln>
-        </p:spPr>
-        <p:txBody>
-          <a:bodyPr anchorCtr="0" anchor="ctr" bIns="0" lIns="0" spcFirstLastPara="1" rIns="0" wrap="square" tIns="0">
-            <a:noAutofit/>
-          </a:bodyPr>
-          <a:lstStyle/>
-          <a:p>
-            <a:pPr indent="0" lvl="0" marL="0" marR="0" rtl="0" algn="ctr">
-              <a:lnSpc>
-                <a:spcPct val="100000"/>
-              </a:lnSpc>
-              <a:spcBef>
-                <a:spcPts val="0"/>
-              </a:spcBef>
-              <a:spcAft>
-                <a:spcPts val="0"/>
-              </a:spcAft>
-              <a:buClr>
-                <a:srgbClr val="FFFFFF"/>
-              </a:buClr>
-              <a:buSzPts val="1100"/>
-              <a:buFont typeface="Play"/>
-              <a:buNone/>
-            </a:pPr>
-            <a:r>
-              <a:rPr b="1" i="0" lang="en-US" spc="0" sz="1100" u="none" cap="none" strike="noStrike">
-                <a:solidFill>
-                  <a:srgbClr val="FFFFFF"/>
-                </a:solidFill>
-                <a:latin typeface="Play"/>
-                <a:ea typeface="Play"/>
-                <a:cs typeface="Play"/>
-                <a:sym typeface="Play"/>
-              </a:rPr>
-              <a:t>B</a:t>
-            </a:r>
-            <a:endParaRPr b="0" i="0" spc="0" sz="1100" u="none" cap="none" strike="noStrike">
-              <a:solidFill>
-                <a:schemeClr val="dk1"/>
-              </a:solidFill>
-              <a:latin typeface="Calibri"/>
-              <a:ea typeface="Calibri"/>
-              <a:cs typeface="Calibri"/>
-              <a:sym typeface="Calibri"/>
-            </a:endParaRPr>
-          </a:p>
-        </p:txBody>
-      </p:sp>
-      <p:sp>
-        <p:nvSpPr>
-          <p:cNvPr id="688" name="Google Shape;688;p29"/>
-          <p:cNvSpPr txBox="1"/>
-          <p:nvPr/>
-        </p:nvSpPr>
-        <p:spPr>
-          <a:xfrm>
-            <a:off x="3797808" y="3337560"/>
-            <a:ext cx="1996440" cy="685800"/>
-          </a:xfrm>
-          <a:prstGeom prst="rect">
-            <a:avLst/>
-          </a:prstGeom>
-          <a:noFill/>
-          <a:ln>
-            <a:noFill/>
-          </a:ln>
-        </p:spPr>
-        <p:txBody>
-          <a:bodyPr anchorCtr="0" anchor="ctr" bIns="0" lIns="0" spcFirstLastPara="1" rIns="0" wrap="square" tIns="0">
-            <a:noAutofit/>
-          </a:bodyPr>
-          <a:lstStyle/>
-          <a:p>
-            <a:pPr indent="0" lvl="0" marL="0" marR="0" rtl="0" algn="l">
-              <a:lnSpc>
-                <a:spcPct val="100000"/>
-              </a:lnSpc>
-              <a:spcBef>
-                <a:spcPts val="0"/>
-              </a:spcBef>
-              <a:spcAft>
-                <a:spcPts val="0"/>
-              </a:spcAft>
-              <a:buClr>
-                <a:srgbClr val="1D1D1F"/>
-              </a:buClr>
-              <a:buSzPts val="1000"/>
-              <a:buFont typeface="Play"/>
-              <a:buNone/>
-            </a:pPr>
-            <a:r>
-              <a:rPr b="1" i="0" lang="en-US" spc="0" sz="1000" u="none" cap="none" strike="noStrike">
-                <a:solidFill>
-                  <a:srgbClr val="1D1D1F"/>
-                </a:solidFill>
-                <a:latin typeface="Play"/>
-                <a:ea typeface="Play"/>
-                <a:cs typeface="Play"/>
-                <a:sym typeface="Play"/>
-              </a:rPr>
-              <a:t>FC cancelled, wants a refund</a:t>
-            </a:r>
-            <a:endParaRPr b="0" i="0" spc="0" sz="1000" u="none" cap="none" strike="noStrike">
-              <a:solidFill>
-                <a:schemeClr val="dk1"/>
-              </a:solidFill>
-              <a:latin typeface="Calibri"/>
-              <a:ea typeface="Calibri"/>
-              <a:cs typeface="Calibri"/>
-              <a:sym typeface="Calibri"/>
-            </a:endParaRPr>
-          </a:p>
-        </p:txBody>
-      </p:sp>
-      <p:sp>
-        <p:nvSpPr>
-          <p:cNvPr id="689" name="Google Shape;689;p29"/>
-          <p:cNvSpPr/>
-          <p:nvPr/>
-        </p:nvSpPr>
-        <p:spPr>
-          <a:xfrm>
-            <a:off x="6050280" y="3337560"/>
-            <a:ext cx="2682240" cy="685800"/>
-          </a:xfrm>
-          <a:prstGeom prst="roundRect">
-            <a:avLst>
-              <a:gd fmla="val 10667" name="adj"/>
-            </a:avLst>
-          </a:prstGeom>
-          <a:solidFill>
-            <a:srgbClr val="FFFFFF"/>
-          </a:solidFill>
-          <a:ln cap="flat" cmpd="sng" w="9525">
-            <a:solidFill>
-              <a:srgbClr val="DCE1E7"/>
-            </a:solidFill>
-            <a:prstDash val="solid"/>
-            <a:round/>
-            <a:headEnd len="sm" w="sm" type="none"/>
-            <a:tailEnd len="sm" w="sm" type="none"/>
-          </a:ln>
-        </p:spPr>
-        <p:txBody>
-          <a:bodyPr anchorCtr="0" anchor="ctr" bIns="91425" lIns="91425" spcFirstLastPara="1" rIns="91425" wrap="square" tIns="91425">
-            <a:noAutofit/>
-          </a:bodyPr>
-          <a:lstStyle/>
-          <a:p>
-            <a:pPr indent="0" lvl="0" marL="0" marR="0" rtl="0" algn="l">
-              <a:lnSpc>
-                <a:spcPct val="100000"/>
-              </a:lnSpc>
-              <a:spcBef>
-                <a:spcPts val="0"/>
-              </a:spcBef>
-              <a:spcAft>
-                <a:spcPts val="0"/>
-              </a:spcAft>
-              <a:buClr>
-                <a:srgbClr val="000000"/>
-              </a:buClr>
-              <a:buSzPts val="1400"/>
-              <a:buFont typeface="Arial"/>
-              <a:buNone/>
-            </a:pPr>
-            <a:r>
-              <a:t/>
-            </a:r>
-            <a:endParaRPr b="0" i="0" spc="0" sz="1400" u="none" cap="none" strike="noStrike">
-              <a:solidFill>
-                <a:srgbClr val="000000"/>
-              </a:solidFill>
-              <a:latin typeface="Arial"/>
-              <a:ea typeface="Arial"/>
-              <a:cs typeface="Arial"/>
-              <a:sym typeface="Arial"/>
-            </a:endParaRPr>
-          </a:p>
-        </p:txBody>
-      </p:sp>
-      <p:sp>
-        <p:nvSpPr>
-          <p:cNvPr id="690" name="Google Shape;690;p29"/>
-          <p:cNvSpPr/>
-          <p:nvPr/>
-        </p:nvSpPr>
-        <p:spPr>
-          <a:xfrm>
-            <a:off x="6187440" y="3520440"/>
-            <a:ext cx="329184" cy="329184"/>
-          </a:xfrm>
-          <a:prstGeom prst="ellipse">
-            <a:avLst/>
-          </a:prstGeom>
-          <a:solidFill>
-            <a:srgbClr val="0B7A6F"/>
-          </a:solidFill>
-          <a:ln cap="flat" cmpd="sng" w="12700">
-            <a:solidFill>
-              <a:srgbClr val="0B7A6F"/>
-            </a:solidFill>
-            <a:prstDash val="solid"/>
-            <a:round/>
-            <a:headEnd len="sm" w="sm" type="none"/>
-            <a:tailEnd len="sm" w="sm" type="none"/>
-          </a:ln>
-        </p:spPr>
-        <p:txBody>
-          <a:bodyPr anchorCtr="0" anchor="ctr" bIns="91425" lIns="91425" spcFirstLastPara="1" rIns="91425" wrap="square" tIns="91425">
-            <a:noAutofit/>
-          </a:bodyPr>
-          <a:lstStyle/>
-          <a:p>
-            <a:pPr indent="0" lvl="0" marL="0" marR="0" rtl="0" algn="l">
-              <a:lnSpc>
-                <a:spcPct val="100000"/>
-              </a:lnSpc>
-              <a:spcBef>
-                <a:spcPts val="0"/>
-              </a:spcBef>
-              <a:spcAft>
-                <a:spcPts val="0"/>
-              </a:spcAft>
-              <a:buClr>
-                <a:srgbClr val="000000"/>
-              </a:buClr>
-              <a:buSzPts val="1400"/>
-              <a:buFont typeface="Arial"/>
-              <a:buNone/>
-            </a:pPr>
-            <a:r>
-              <a:t/>
-            </a:r>
-            <a:endParaRPr b="0" i="0" spc="0" sz="1400" u="none" cap="none" strike="noStrike">
-              <a:solidFill>
-                <a:srgbClr val="000000"/>
-              </a:solidFill>
-              <a:latin typeface="Arial"/>
-              <a:ea typeface="Arial"/>
-              <a:cs typeface="Arial"/>
-              <a:sym typeface="Arial"/>
-            </a:endParaRPr>
-          </a:p>
-        </p:txBody>
-      </p:sp>
-      <p:sp>
-        <p:nvSpPr>
-          <p:cNvPr id="691" name="Google Shape;691;p29"/>
+          <p:cNvPr id="677" name="Google Shape;677;p29"/>
           <p:cNvSpPr txBox="1"/>
           <p:nvPr/>
         </p:nvSpPr>
@@ -36920,7 +36424,7 @@
       </p:sp>
       <p:sp>
         <p:nvSpPr>
-          <p:cNvPr id="692" name="Google Shape;692;p29"/>
+          <p:cNvPr id="678" name="Google Shape;678;p29"/>
           <p:cNvSpPr txBox="1"/>
           <p:nvPr/>
         </p:nvSpPr>
@@ -36986,7 +36490,7 @@
       </p:sp>
       <p:sp>
         <p:nvSpPr>
-          <p:cNvPr id="693" name="Google Shape;693;p29"/>
+          <p:cNvPr id="679" name="Google Shape;679;p29"/>
           <p:cNvSpPr txBox="1"/>
           <p:nvPr>
             <p:ph idx="4294967295" type="sldNum"/>
@@ -37048,6 +36552,700 @@
           </a:p>
         </p:txBody>
       </p:sp>
+      <p:sp>
+        <p:nvSpPr>
+          <p:cNvPr id="680" name="Google Shape;680;p29"/>
+          <p:cNvSpPr/>
+          <p:nvPr/>
+        </p:nvSpPr>
+        <p:spPr>
+          <a:xfrm>
+            <a:off x="411480" y="1325880"/>
+            <a:ext cx="3520440" cy="475488"/>
+          </a:xfrm>
+          <a:prstGeom prst="roundRect">
+            <a:avLst>
+              <a:gd fmla="val 8000" name="adj"/>
+            </a:avLst>
+          </a:prstGeom>
+          <a:solidFill>
+            <a:srgbClr val="FFFFFF"/>
+          </a:solidFill>
+          <a:ln cap="flat" cmpd="sng" w="9525">
+            <a:solidFill>
+              <a:srgbClr val="DCE1E7"/>
+            </a:solidFill>
+            <a:prstDash val="solid"/>
+            <a:round/>
+            <a:headEnd len="sm" w="sm" type="none"/>
+            <a:tailEnd len="sm" w="sm" type="none"/>
+          </a:ln>
+        </p:spPr>
+        <p:txBody>
+          <a:bodyPr anchorCtr="0" anchor="ctr" bIns="45700" lIns="91425" spcFirstLastPara="1" rIns="91425" wrap="square" tIns="45700">
+            <a:noAutofit/>
+          </a:bodyPr>
+          <a:lstStyle/>
+          <a:p>
+            <a:pPr indent="0" lvl="0" marL="0" marR="0" rtl="0" algn="ctr">
+              <a:lnSpc>
+                <a:spcPct val="100000"/>
+              </a:lnSpc>
+              <a:spcBef>
+                <a:spcPts val="0"/>
+              </a:spcBef>
+              <a:spcAft>
+                <a:spcPts val="0"/>
+              </a:spcAft>
+              <a:buNone/>
+            </a:pPr>
+            <a:r>
+              <a:t/>
+            </a:r>
+            <a:endParaRPr b="0" i="0" spc="0" sz="1400" u="none" cap="none" strike="noStrike">
+              <a:solidFill>
+                <a:srgbClr val="000000"/>
+              </a:solidFill>
+              <a:latin typeface="Arial"/>
+              <a:ea typeface="Arial"/>
+              <a:cs typeface="Arial"/>
+              <a:sym typeface="Arial"/>
+            </a:endParaRPr>
+          </a:p>
+        </p:txBody>
+      </p:sp>
+      <p:sp>
+        <p:nvSpPr>
+          <p:cNvPr id="681" name="Google Shape;681;p29"/>
+          <p:cNvSpPr/>
+          <p:nvPr/>
+        </p:nvSpPr>
+        <p:spPr>
+          <a:xfrm>
+            <a:off x="521207" y="1426464"/>
+            <a:ext cx="274320" cy="274320"/>
+          </a:xfrm>
+          <a:prstGeom prst="roundRect">
+            <a:avLst>
+              <a:gd fmla="val 50000" name="adj"/>
+            </a:avLst>
+          </a:prstGeom>
+          <a:solidFill>
+            <a:srgbClr val="E3F4F1"/>
+          </a:solidFill>
+          <a:ln>
+            <a:noFill/>
+          </a:ln>
+        </p:spPr>
+        <p:txBody>
+          <a:bodyPr anchorCtr="0" anchor="ctr" bIns="0" lIns="0" spcFirstLastPara="1" rIns="0" wrap="square" tIns="0">
+            <a:noAutofit/>
+          </a:bodyPr>
+          <a:lstStyle/>
+          <a:p>
+            <a:pPr indent="0" lvl="0" marL="0" marR="0" rtl="0" algn="ctr">
+              <a:lnSpc>
+                <a:spcPct val="100000"/>
+              </a:lnSpc>
+              <a:spcBef>
+                <a:spcPts val="0"/>
+              </a:spcBef>
+              <a:spcAft>
+                <a:spcPts val="0"/>
+              </a:spcAft>
+              <a:buNone/>
+            </a:pPr>
+            <a:r>
+              <a:rPr b="1" i="0" lang="en-US" spc="0" sz="900" u="none" cap="none" strike="noStrike">
+                <a:solidFill>
+                  <a:srgbClr val="0B7A6F"/>
+                </a:solidFill>
+                <a:latin typeface="Play"/>
+                <a:ea typeface="Play"/>
+                <a:cs typeface="Play"/>
+                <a:sym typeface="Play"/>
+              </a:rPr>
+              <a:t>1</a:t>
+            </a:r>
+            <a:endParaRPr/>
+          </a:p>
+        </p:txBody>
+      </p:sp>
+      <p:sp>
+        <p:nvSpPr>
+          <p:cNvPr id="682" name="Google Shape;682;p29"/>
+          <p:cNvSpPr txBox="1"/>
+          <p:nvPr/>
+        </p:nvSpPr>
+        <p:spPr>
+          <a:xfrm>
+            <a:off x="914400" y="1325880"/>
+            <a:ext cx="2926080" cy="475488"/>
+          </a:xfrm>
+          <a:prstGeom prst="rect">
+            <a:avLst/>
+          </a:prstGeom>
+          <a:noFill/>
+          <a:ln>
+            <a:noFill/>
+          </a:ln>
+        </p:spPr>
+        <p:txBody>
+          <a:bodyPr anchorCtr="0" anchor="ctr" bIns="0" lIns="0" spcFirstLastPara="1" rIns="0" wrap="square" tIns="0">
+            <a:spAutoFit/>
+          </a:bodyPr>
+          <a:lstStyle/>
+          <a:p>
+            <a:pPr indent="0" lvl="0" marL="0" marR="0" rtl="0" algn="l">
+              <a:lnSpc>
+                <a:spcPct val="100000"/>
+              </a:lnSpc>
+              <a:spcBef>
+                <a:spcPts val="0"/>
+              </a:spcBef>
+              <a:spcAft>
+                <a:spcPts val="0"/>
+              </a:spcAft>
+              <a:buNone/>
+            </a:pPr>
+            <a:r>
+              <a:rPr b="1" i="0" lang="en-US" spc="0" sz="950" u="none" cap="none" strike="noStrike">
+                <a:solidFill>
+                  <a:srgbClr val="1D1D1F"/>
+                </a:solidFill>
+                <a:latin typeface="Play"/>
+                <a:ea typeface="Play"/>
+                <a:cs typeface="Play"/>
+                <a:sym typeface="Play"/>
+              </a:rPr>
+              <a:t>MF overdue</a:t>
+            </a:r>
+            <a:r>
+              <a:rPr b="0" i="0" lang="en-US" spc="0" sz="950" u="none" cap="none" strike="noStrike">
+                <a:solidFill>
+                  <a:srgbClr val="6E6E73"/>
+                </a:solidFill>
+                <a:latin typeface="Arial"/>
+                <a:ea typeface="Arial"/>
+                <a:cs typeface="Arial"/>
+                <a:sym typeface="Arial"/>
+              </a:rPr>
+              <a:t> for several billing cycles</a:t>
+            </a:r>
+            <a:endParaRPr/>
+          </a:p>
+        </p:txBody>
+      </p:sp>
+      <p:sp>
+        <p:nvSpPr>
+          <p:cNvPr id="683" name="Google Shape;683;p29"/>
+          <p:cNvSpPr/>
+          <p:nvPr/>
+        </p:nvSpPr>
+        <p:spPr>
+          <a:xfrm>
+            <a:off x="411480" y="1874519"/>
+            <a:ext cx="3520440" cy="475488"/>
+          </a:xfrm>
+          <a:prstGeom prst="roundRect">
+            <a:avLst>
+              <a:gd fmla="val 8000" name="adj"/>
+            </a:avLst>
+          </a:prstGeom>
+          <a:solidFill>
+            <a:srgbClr val="FFFFFF"/>
+          </a:solidFill>
+          <a:ln cap="flat" cmpd="sng" w="9525">
+            <a:solidFill>
+              <a:srgbClr val="DCE1E7"/>
+            </a:solidFill>
+            <a:prstDash val="solid"/>
+            <a:round/>
+            <a:headEnd len="sm" w="sm" type="none"/>
+            <a:tailEnd len="sm" w="sm" type="none"/>
+          </a:ln>
+        </p:spPr>
+        <p:txBody>
+          <a:bodyPr anchorCtr="0" anchor="ctr" bIns="45700" lIns="91425" spcFirstLastPara="1" rIns="91425" wrap="square" tIns="45700">
+            <a:noAutofit/>
+          </a:bodyPr>
+          <a:lstStyle/>
+          <a:p>
+            <a:pPr indent="0" lvl="0" marL="0" marR="0" rtl="0" algn="ctr">
+              <a:lnSpc>
+                <a:spcPct val="100000"/>
+              </a:lnSpc>
+              <a:spcBef>
+                <a:spcPts val="0"/>
+              </a:spcBef>
+              <a:spcAft>
+                <a:spcPts val="0"/>
+              </a:spcAft>
+              <a:buNone/>
+            </a:pPr>
+            <a:r>
+              <a:t/>
+            </a:r>
+            <a:endParaRPr b="0" i="0" spc="0" sz="1400" u="none" cap="none" strike="noStrike">
+              <a:solidFill>
+                <a:srgbClr val="000000"/>
+              </a:solidFill>
+              <a:latin typeface="Arial"/>
+              <a:ea typeface="Arial"/>
+              <a:cs typeface="Arial"/>
+              <a:sym typeface="Arial"/>
+            </a:endParaRPr>
+          </a:p>
+        </p:txBody>
+      </p:sp>
+      <p:sp>
+        <p:nvSpPr>
+          <p:cNvPr id="684" name="Google Shape;684;p29"/>
+          <p:cNvSpPr/>
+          <p:nvPr/>
+        </p:nvSpPr>
+        <p:spPr>
+          <a:xfrm>
+            <a:off x="521207" y="1975103"/>
+            <a:ext cx="274320" cy="274320"/>
+          </a:xfrm>
+          <a:prstGeom prst="roundRect">
+            <a:avLst>
+              <a:gd fmla="val 50000" name="adj"/>
+            </a:avLst>
+          </a:prstGeom>
+          <a:solidFill>
+            <a:srgbClr val="E3F4F1"/>
+          </a:solidFill>
+          <a:ln>
+            <a:noFill/>
+          </a:ln>
+        </p:spPr>
+        <p:txBody>
+          <a:bodyPr anchorCtr="0" anchor="ctr" bIns="0" lIns="0" spcFirstLastPara="1" rIns="0" wrap="square" tIns="0">
+            <a:noAutofit/>
+          </a:bodyPr>
+          <a:lstStyle/>
+          <a:p>
+            <a:pPr indent="0" lvl="0" marL="0" marR="0" rtl="0" algn="ctr">
+              <a:lnSpc>
+                <a:spcPct val="100000"/>
+              </a:lnSpc>
+              <a:spcBef>
+                <a:spcPts val="0"/>
+              </a:spcBef>
+              <a:spcAft>
+                <a:spcPts val="0"/>
+              </a:spcAft>
+              <a:buNone/>
+            </a:pPr>
+            <a:r>
+              <a:rPr b="1" i="0" lang="en-US" spc="0" sz="900" u="none" cap="none" strike="noStrike">
+                <a:solidFill>
+                  <a:srgbClr val="0B7A6F"/>
+                </a:solidFill>
+                <a:latin typeface="Play"/>
+                <a:ea typeface="Play"/>
+                <a:cs typeface="Play"/>
+                <a:sym typeface="Play"/>
+              </a:rPr>
+              <a:t>2</a:t>
+            </a:r>
+            <a:endParaRPr/>
+          </a:p>
+        </p:txBody>
+      </p:sp>
+      <p:sp>
+        <p:nvSpPr>
+          <p:cNvPr id="685" name="Google Shape;685;p29"/>
+          <p:cNvSpPr txBox="1"/>
+          <p:nvPr/>
+        </p:nvSpPr>
+        <p:spPr>
+          <a:xfrm>
+            <a:off x="914400" y="1874519"/>
+            <a:ext cx="2926080" cy="475488"/>
+          </a:xfrm>
+          <a:prstGeom prst="rect">
+            <a:avLst/>
+          </a:prstGeom>
+          <a:noFill/>
+          <a:ln>
+            <a:noFill/>
+          </a:ln>
+        </p:spPr>
+        <p:txBody>
+          <a:bodyPr anchorCtr="0" anchor="ctr" bIns="0" lIns="0" spcFirstLastPara="1" rIns="0" wrap="square" tIns="0">
+            <a:spAutoFit/>
+          </a:bodyPr>
+          <a:lstStyle/>
+          <a:p>
+            <a:pPr indent="0" lvl="0" marL="0" marR="0" rtl="0" algn="l">
+              <a:lnSpc>
+                <a:spcPct val="100000"/>
+              </a:lnSpc>
+              <a:spcBef>
+                <a:spcPts val="0"/>
+              </a:spcBef>
+              <a:spcAft>
+                <a:spcPts val="0"/>
+              </a:spcAft>
+              <a:buNone/>
+            </a:pPr>
+            <a:r>
+              <a:rPr b="1" i="0" lang="en-US" spc="0" sz="950" u="none" cap="none" strike="noStrike">
+                <a:solidFill>
+                  <a:srgbClr val="1D1D1F"/>
+                </a:solidFill>
+                <a:latin typeface="Play"/>
+                <a:ea typeface="Play"/>
+                <a:cs typeface="Play"/>
+                <a:sym typeface="Play"/>
+              </a:rPr>
+              <a:t>A payment finally goes through</a:t>
+            </a:r>
+            <a:endParaRPr/>
+          </a:p>
+        </p:txBody>
+      </p:sp>
+      <p:sp>
+        <p:nvSpPr>
+          <p:cNvPr id="686" name="Google Shape;686;p29"/>
+          <p:cNvSpPr/>
+          <p:nvPr/>
+        </p:nvSpPr>
+        <p:spPr>
+          <a:xfrm>
+            <a:off x="411480" y="2423160"/>
+            <a:ext cx="3520440" cy="475488"/>
+          </a:xfrm>
+          <a:prstGeom prst="roundRect">
+            <a:avLst>
+              <a:gd fmla="val 8000" name="adj"/>
+            </a:avLst>
+          </a:prstGeom>
+          <a:solidFill>
+            <a:srgbClr val="FFFFFF"/>
+          </a:solidFill>
+          <a:ln cap="flat" cmpd="sng" w="9525">
+            <a:solidFill>
+              <a:srgbClr val="DCE1E7"/>
+            </a:solidFill>
+            <a:prstDash val="solid"/>
+            <a:round/>
+            <a:headEnd len="sm" w="sm" type="none"/>
+            <a:tailEnd len="sm" w="sm" type="none"/>
+          </a:ln>
+        </p:spPr>
+        <p:txBody>
+          <a:bodyPr anchorCtr="0" anchor="ctr" bIns="45700" lIns="91425" spcFirstLastPara="1" rIns="91425" wrap="square" tIns="45700">
+            <a:noAutofit/>
+          </a:bodyPr>
+          <a:lstStyle/>
+          <a:p>
+            <a:pPr indent="0" lvl="0" marL="0" marR="0" rtl="0" algn="ctr">
+              <a:lnSpc>
+                <a:spcPct val="100000"/>
+              </a:lnSpc>
+              <a:spcBef>
+                <a:spcPts val="0"/>
+              </a:spcBef>
+              <a:spcAft>
+                <a:spcPts val="0"/>
+              </a:spcAft>
+              <a:buNone/>
+            </a:pPr>
+            <a:r>
+              <a:t/>
+            </a:r>
+            <a:endParaRPr b="0" i="0" spc="0" sz="1400" u="none" cap="none" strike="noStrike">
+              <a:solidFill>
+                <a:srgbClr val="000000"/>
+              </a:solidFill>
+              <a:latin typeface="Arial"/>
+              <a:ea typeface="Arial"/>
+              <a:cs typeface="Arial"/>
+              <a:sym typeface="Arial"/>
+            </a:endParaRPr>
+          </a:p>
+        </p:txBody>
+      </p:sp>
+      <p:sp>
+        <p:nvSpPr>
+          <p:cNvPr id="687" name="Google Shape;687;p29"/>
+          <p:cNvSpPr/>
+          <p:nvPr/>
+        </p:nvSpPr>
+        <p:spPr>
+          <a:xfrm>
+            <a:off x="521207" y="2523744"/>
+            <a:ext cx="274320" cy="274320"/>
+          </a:xfrm>
+          <a:prstGeom prst="roundRect">
+            <a:avLst>
+              <a:gd fmla="val 50000" name="adj"/>
+            </a:avLst>
+          </a:prstGeom>
+          <a:solidFill>
+            <a:srgbClr val="E3F4F1"/>
+          </a:solidFill>
+          <a:ln>
+            <a:noFill/>
+          </a:ln>
+        </p:spPr>
+        <p:txBody>
+          <a:bodyPr anchorCtr="0" anchor="ctr" bIns="0" lIns="0" spcFirstLastPara="1" rIns="0" wrap="square" tIns="0">
+            <a:noAutofit/>
+          </a:bodyPr>
+          <a:lstStyle/>
+          <a:p>
+            <a:pPr indent="0" lvl="0" marL="0" marR="0" rtl="0" algn="ctr">
+              <a:lnSpc>
+                <a:spcPct val="100000"/>
+              </a:lnSpc>
+              <a:spcBef>
+                <a:spcPts val="0"/>
+              </a:spcBef>
+              <a:spcAft>
+                <a:spcPts val="0"/>
+              </a:spcAft>
+              <a:buNone/>
+            </a:pPr>
+            <a:r>
+              <a:rPr b="1" i="0" lang="en-US" spc="0" sz="900" u="none" cap="none" strike="noStrike">
+                <a:solidFill>
+                  <a:srgbClr val="0B7A6F"/>
+                </a:solidFill>
+                <a:latin typeface="Play"/>
+                <a:ea typeface="Play"/>
+                <a:cs typeface="Play"/>
+                <a:sym typeface="Play"/>
+              </a:rPr>
+              <a:t>3</a:t>
+            </a:r>
+            <a:endParaRPr/>
+          </a:p>
+        </p:txBody>
+      </p:sp>
+      <p:sp>
+        <p:nvSpPr>
+          <p:cNvPr id="688" name="Google Shape;688;p29"/>
+          <p:cNvSpPr txBox="1"/>
+          <p:nvPr/>
+        </p:nvSpPr>
+        <p:spPr>
+          <a:xfrm>
+            <a:off x="914400" y="2423160"/>
+            <a:ext cx="2926080" cy="475488"/>
+          </a:xfrm>
+          <a:prstGeom prst="rect">
+            <a:avLst/>
+          </a:prstGeom>
+          <a:noFill/>
+          <a:ln>
+            <a:noFill/>
+          </a:ln>
+        </p:spPr>
+        <p:txBody>
+          <a:bodyPr anchorCtr="0" anchor="ctr" bIns="0" lIns="0" spcFirstLastPara="1" rIns="0" wrap="square" tIns="0">
+            <a:spAutoFit/>
+          </a:bodyPr>
+          <a:lstStyle/>
+          <a:p>
+            <a:pPr indent="0" lvl="0" marL="0" marR="0" rtl="0" algn="l">
+              <a:lnSpc>
+                <a:spcPct val="100000"/>
+              </a:lnSpc>
+              <a:spcBef>
+                <a:spcPts val="0"/>
+              </a:spcBef>
+              <a:spcAft>
+                <a:spcPts val="0"/>
+              </a:spcAft>
+              <a:buNone/>
+            </a:pPr>
+            <a:r>
+              <a:rPr b="1" i="0" lang="en-US" spc="0" sz="950" u="none" cap="none" strike="noStrike">
+                <a:solidFill>
+                  <a:srgbClr val="1D1D1F"/>
+                </a:solidFill>
+                <a:latin typeface="Play"/>
+                <a:ea typeface="Play"/>
+                <a:cs typeface="Play"/>
+                <a:sym typeface="Play"/>
+              </a:rPr>
+              <a:t>Every missed month is charged at once</a:t>
+            </a:r>
+            <a:r>
+              <a:rPr b="0" i="0" lang="en-US" spc="0" sz="950" u="none" cap="none" strike="noStrike">
+                <a:solidFill>
+                  <a:srgbClr val="6E6E73"/>
+                </a:solidFill>
+                <a:latin typeface="Arial"/>
+                <a:ea typeface="Arial"/>
+                <a:cs typeface="Arial"/>
+                <a:sym typeface="Arial"/>
+              </a:rPr>
+              <a:t>: same day or same month</a:t>
+            </a:r>
+            <a:endParaRPr/>
+          </a:p>
+        </p:txBody>
+      </p:sp>
+      <p:sp>
+        <p:nvSpPr>
+          <p:cNvPr id="689" name="Google Shape;689;p29"/>
+          <p:cNvSpPr/>
+          <p:nvPr/>
+        </p:nvSpPr>
+        <p:spPr>
+          <a:xfrm>
+            <a:off x="4069080" y="1325880"/>
+            <a:ext cx="4754879" cy="1387179"/>
+          </a:xfrm>
+          <a:prstGeom prst="roundRect">
+            <a:avLst>
+              <a:gd fmla="val 3000" name="adj"/>
+            </a:avLst>
+          </a:prstGeom>
+          <a:solidFill>
+            <a:srgbClr val="FFFFFF"/>
+          </a:solidFill>
+          <a:ln cap="flat" cmpd="sng" w="9525">
+            <a:solidFill>
+              <a:srgbClr val="DCE1E7"/>
+            </a:solidFill>
+            <a:prstDash val="solid"/>
+            <a:round/>
+            <a:headEnd len="sm" w="sm" type="none"/>
+            <a:tailEnd len="sm" w="sm" type="none"/>
+          </a:ln>
+        </p:spPr>
+        <p:txBody>
+          <a:bodyPr anchorCtr="0" anchor="ctr" bIns="45700" lIns="91425" spcFirstLastPara="1" rIns="91425" wrap="square" tIns="45700">
+            <a:noAutofit/>
+          </a:bodyPr>
+          <a:lstStyle/>
+          <a:p>
+            <a:pPr indent="0" lvl="0" marL="0" marR="0" rtl="0" algn="ctr">
+              <a:lnSpc>
+                <a:spcPct val="100000"/>
+              </a:lnSpc>
+              <a:spcBef>
+                <a:spcPts val="0"/>
+              </a:spcBef>
+              <a:spcAft>
+                <a:spcPts val="0"/>
+              </a:spcAft>
+              <a:buNone/>
+            </a:pPr>
+            <a:r>
+              <a:t/>
+            </a:r>
+            <a:endParaRPr b="0" i="0" spc="0" sz="1400" u="none" cap="none" strike="noStrike">
+              <a:solidFill>
+                <a:srgbClr val="000000"/>
+              </a:solidFill>
+              <a:latin typeface="Arial"/>
+              <a:ea typeface="Arial"/>
+              <a:cs typeface="Arial"/>
+              <a:sym typeface="Arial"/>
+            </a:endParaRPr>
+          </a:p>
+        </p:txBody>
+      </p:sp>
+      <p:pic>
+        <p:nvPicPr>
+          <p:cNvPr descr="bulk_payment_history.png" id="690" name="Google Shape;690;p29"/>
+          <p:cNvPicPr preferRelativeResize="0"/>
+          <p:nvPr/>
+        </p:nvPicPr>
+        <p:blipFill rotWithShape="1">
+          <a:blip r:embed="rId3">
+            <a:alphaModFix/>
+          </a:blip>
+          <a:srcRect b="0" l="0" r="0" t="0"/>
+          <a:stretch/>
+        </p:blipFill>
+        <p:spPr>
+          <a:xfrm>
+            <a:off x="4114800" y="1371600"/>
+            <a:ext cx="4663440" cy="1295739"/>
+          </a:xfrm>
+          <a:prstGeom prst="rect">
+            <a:avLst/>
+          </a:prstGeom>
+          <a:noFill/>
+          <a:ln>
+            <a:noFill/>
+          </a:ln>
+        </p:spPr>
+      </p:pic>
+      <p:sp>
+        <p:nvSpPr>
+          <p:cNvPr id="691" name="Google Shape;691;p29"/>
+          <p:cNvSpPr txBox="1"/>
+          <p:nvPr/>
+        </p:nvSpPr>
+        <p:spPr>
+          <a:xfrm>
+            <a:off x="4069080" y="2758779"/>
+            <a:ext cx="4754879" cy="274320"/>
+          </a:xfrm>
+          <a:prstGeom prst="rect">
+            <a:avLst/>
+          </a:prstGeom>
+          <a:noFill/>
+          <a:ln>
+            <a:noFill/>
+          </a:ln>
+        </p:spPr>
+        <p:txBody>
+          <a:bodyPr anchorCtr="0" anchor="ctr" bIns="0" lIns="0" spcFirstLastPara="1" rIns="0" wrap="square" tIns="0">
+            <a:spAutoFit/>
+          </a:bodyPr>
+          <a:lstStyle/>
+          <a:p>
+            <a:pPr indent="0" lvl="0" marL="0" marR="0" rtl="0" algn="l">
+              <a:lnSpc>
+                <a:spcPct val="100000"/>
+              </a:lnSpc>
+              <a:spcBef>
+                <a:spcPts val="0"/>
+              </a:spcBef>
+              <a:spcAft>
+                <a:spcPts val="0"/>
+              </a:spcAft>
+              <a:buNone/>
+            </a:pPr>
+            <a:r>
+              <a:rPr b="1" i="0" lang="en-US" spc="0" sz="900" u="none" cap="none" strike="noStrike">
+                <a:solidFill>
+                  <a:srgbClr val="9A6410"/>
+                </a:solidFill>
+                <a:latin typeface="Play"/>
+                <a:ea typeface="Play"/>
+                <a:cs typeface="Play"/>
+                <a:sym typeface="Play"/>
+              </a:rPr>
+              <a:t>Four $59 MFs, one day: </a:t>
+            </a:r>
+            <a:r>
+              <a:rPr b="0" i="0" lang="en-US" spc="0" sz="900" u="none" cap="none" strike="noStrike">
+                <a:solidFill>
+                  <a:srgbClr val="1D1D1F"/>
+                </a:solidFill>
+                <a:latin typeface="Arial"/>
+                <a:ea typeface="Arial"/>
+                <a:cs typeface="Arial"/>
+                <a:sym typeface="Arial"/>
+              </a:rPr>
+              <a:t>Jan, Feb, Mar and Apr paid-through. Different months, not duplicates.</a:t>
+            </a:r>
+            <a:endParaRPr/>
+          </a:p>
+        </p:txBody>
+      </p:sp>
     </p:spTree>
   </p:cSld>
   <p:clrMapOvr>
@@ -37061,7 +37259,7 @@
   <p:cSld>
     <p:spTree>
       <p:nvGrpSpPr>
-        <p:cNvPr id="698" name="Shape 698"/>
+        <p:cNvPr id="696" name="Shape 696"/>
         <p:cNvGrpSpPr/>
         <p:nvPr/>
       </p:nvGrpSpPr>
@@ -37075,7 +37273,7 @@
       </p:grpSpPr>
       <p:sp>
         <p:nvSpPr>
-          <p:cNvPr id="699" name="Google Shape;699;p30"/>
+          <p:cNvPr id="697" name="Google Shape;697;p30"/>
           <p:cNvSpPr txBox="1"/>
           <p:nvPr/>
         </p:nvSpPr>
@@ -37141,7 +37339,7 @@
       </p:sp>
       <p:sp>
         <p:nvSpPr>
-          <p:cNvPr id="700" name="Google Shape;700;p30"/>
+          <p:cNvPr id="698" name="Google Shape;698;p30"/>
           <p:cNvSpPr txBox="1"/>
           <p:nvPr/>
         </p:nvSpPr>
@@ -37207,7 +37405,7 @@
       </p:sp>
       <p:sp>
         <p:nvSpPr>
-          <p:cNvPr id="701" name="Google Shape;701;p30"/>
+          <p:cNvPr id="699" name="Google Shape;699;p30"/>
           <p:cNvSpPr txBox="1"/>
           <p:nvPr/>
         </p:nvSpPr>
@@ -37273,7 +37471,7 @@
       </p:sp>
       <p:graphicFrame>
         <p:nvGraphicFramePr>
-          <p:cNvPr id="702" name="Google Shape;702;p30"/>
+          <p:cNvPr id="700" name="Google Shape;700;p30"/>
           <p:cNvGraphicFramePr/>
           <p:nvPr/>
         </p:nvGraphicFramePr>
@@ -37286,7 +37484,7 @@
             <a:tbl>
               <a:tblPr>
                 <a:noFill/>
-                <a:tableStyleId>{55C1B0A7-102E-438F-9E1A-248C01C79337}</a:tableStyleId>
+                <a:tableStyleId>{571C05B3-F2F7-497A-A2A1-7750038E98FB}</a:tableStyleId>
               </a:tblPr>
               <a:tblGrid>
                 <a:gridCol w="4389125"/>
@@ -37978,7 +38176,7 @@
       </p:graphicFrame>
       <p:sp>
         <p:nvSpPr>
-          <p:cNvPr id="703" name="Google Shape;703;p30"/>
+          <p:cNvPr id="701" name="Google Shape;701;p30"/>
           <p:cNvSpPr txBox="1"/>
           <p:nvPr/>
         </p:nvSpPr>
@@ -38044,7 +38242,7 @@
       </p:sp>
       <p:sp>
         <p:nvSpPr>
-          <p:cNvPr id="704" name="Google Shape;704;p30"/>
+          <p:cNvPr id="702" name="Google Shape;702;p30"/>
           <p:cNvSpPr/>
           <p:nvPr/>
         </p:nvSpPr>
@@ -38111,7 +38309,7 @@
       </p:sp>
       <p:sp>
         <p:nvSpPr>
-          <p:cNvPr id="705" name="Google Shape;705;p30"/>
+          <p:cNvPr id="703" name="Google Shape;703;p30"/>
           <p:cNvSpPr txBox="1"/>
           <p:nvPr/>
         </p:nvSpPr>
@@ -38177,7 +38375,7 @@
       </p:sp>
       <p:cxnSp>
         <p:nvCxnSpPr>
-          <p:cNvPr id="706" name="Google Shape;706;p30"/>
+          <p:cNvPr id="704" name="Google Shape;704;p30"/>
           <p:cNvCxnSpPr/>
           <p:nvPr/>
         </p:nvCxnSpPr>
@@ -38203,7 +38401,7 @@
       </p:cxnSp>
       <p:sp>
         <p:nvSpPr>
-          <p:cNvPr id="707" name="Google Shape;707;p30"/>
+          <p:cNvPr id="705" name="Google Shape;705;p30"/>
           <p:cNvSpPr/>
           <p:nvPr/>
         </p:nvSpPr>
@@ -38270,7 +38468,7 @@
       </p:sp>
       <p:sp>
         <p:nvSpPr>
-          <p:cNvPr id="708" name="Google Shape;708;p30"/>
+          <p:cNvPr id="706" name="Google Shape;706;p30"/>
           <p:cNvSpPr txBox="1"/>
           <p:nvPr/>
         </p:nvSpPr>
@@ -38336,7 +38534,7 @@
       </p:sp>
       <p:cxnSp>
         <p:nvCxnSpPr>
-          <p:cNvPr id="709" name="Google Shape;709;p30"/>
+          <p:cNvPr id="707" name="Google Shape;707;p30"/>
           <p:cNvCxnSpPr/>
           <p:nvPr/>
         </p:nvCxnSpPr>
@@ -38362,7 +38560,7 @@
       </p:cxnSp>
       <p:sp>
         <p:nvSpPr>
-          <p:cNvPr id="710" name="Google Shape;710;p30"/>
+          <p:cNvPr id="708" name="Google Shape;708;p30"/>
           <p:cNvSpPr/>
           <p:nvPr/>
         </p:nvSpPr>
@@ -38429,7 +38627,7 @@
       </p:sp>
       <p:sp>
         <p:nvSpPr>
-          <p:cNvPr id="711" name="Google Shape;711;p30"/>
+          <p:cNvPr id="709" name="Google Shape;709;p30"/>
           <p:cNvSpPr txBox="1"/>
           <p:nvPr/>
         </p:nvSpPr>
@@ -38495,7 +38693,7 @@
       </p:sp>
       <p:cxnSp>
         <p:nvCxnSpPr>
-          <p:cNvPr id="712" name="Google Shape;712;p30"/>
+          <p:cNvPr id="710" name="Google Shape;710;p30"/>
           <p:cNvCxnSpPr/>
           <p:nvPr/>
         </p:nvCxnSpPr>
@@ -38521,7 +38719,7 @@
       </p:cxnSp>
       <p:sp>
         <p:nvSpPr>
-          <p:cNvPr id="713" name="Google Shape;713;p30"/>
+          <p:cNvPr id="711" name="Google Shape;711;p30"/>
           <p:cNvSpPr/>
           <p:nvPr/>
         </p:nvSpPr>
@@ -38588,7 +38786,7 @@
       </p:sp>
       <p:sp>
         <p:nvSpPr>
-          <p:cNvPr id="714" name="Google Shape;714;p30"/>
+          <p:cNvPr id="712" name="Google Shape;712;p30"/>
           <p:cNvSpPr txBox="1"/>
           <p:nvPr/>
         </p:nvSpPr>
@@ -38654,7 +38852,7 @@
       </p:sp>
       <p:sp>
         <p:nvSpPr>
-          <p:cNvPr id="715" name="Google Shape;715;p30"/>
+          <p:cNvPr id="713" name="Google Shape;713;p30"/>
           <p:cNvSpPr/>
           <p:nvPr/>
         </p:nvSpPr>
@@ -38721,7 +38919,7 @@
       </p:sp>
       <p:pic>
         <p:nvPicPr>
-          <p:cNvPr descr="preencoded.png" id="716" name="Google Shape;716;p30"/>
+          <p:cNvPr descr="preencoded.png" id="714" name="Google Shape;714;p30"/>
           <p:cNvPicPr preferRelativeResize="0"/>
           <p:nvPr/>
         </p:nvPicPr>
@@ -38748,7 +38946,7 @@
       </p:pic>
       <p:sp>
         <p:nvSpPr>
-          <p:cNvPr id="717" name="Google Shape;717;p30"/>
+          <p:cNvPr id="715" name="Google Shape;715;p30"/>
           <p:cNvSpPr txBox="1"/>
           <p:nvPr/>
         </p:nvSpPr>
@@ -38826,7 +39024,7 @@
       </p:sp>
       <p:sp>
         <p:nvSpPr>
-          <p:cNvPr id="718" name="Google Shape;718;p30"/>
+          <p:cNvPr id="716" name="Google Shape;716;p30"/>
           <p:cNvSpPr txBox="1"/>
           <p:nvPr>
             <p:ph idx="4294967295" type="sldNum"/>
@@ -38901,7 +39099,7 @@
   <p:cSld>
     <p:spTree>
       <p:nvGrpSpPr>
-        <p:cNvPr id="723" name="Shape 723"/>
+        <p:cNvPr id="721" name="Shape 721"/>
         <p:cNvGrpSpPr/>
         <p:nvPr/>
       </p:nvGrpSpPr>
@@ -38915,7 +39113,7 @@
       </p:grpSpPr>
       <p:sp>
         <p:nvSpPr>
-          <p:cNvPr id="724" name="Google Shape;724;p31"/>
+          <p:cNvPr id="722" name="Google Shape;722;p31"/>
           <p:cNvSpPr txBox="1"/>
           <p:nvPr/>
         </p:nvSpPr>
@@ -38981,7 +39179,7 @@
       </p:sp>
       <p:sp>
         <p:nvSpPr>
-          <p:cNvPr id="725" name="Google Shape;725;p31"/>
+          <p:cNvPr id="723" name="Google Shape;723;p31"/>
           <p:cNvSpPr txBox="1"/>
           <p:nvPr/>
         </p:nvSpPr>
@@ -39047,7 +39245,7 @@
       </p:sp>
       <p:sp>
         <p:nvSpPr>
-          <p:cNvPr id="726" name="Google Shape;726;p31"/>
+          <p:cNvPr id="724" name="Google Shape;724;p31"/>
           <p:cNvSpPr txBox="1"/>
           <p:nvPr/>
         </p:nvSpPr>
@@ -39113,7 +39311,7 @@
       </p:sp>
       <p:sp>
         <p:nvSpPr>
-          <p:cNvPr id="727" name="Google Shape;727;p31"/>
+          <p:cNvPr id="725" name="Google Shape;725;p31"/>
           <p:cNvSpPr/>
           <p:nvPr/>
         </p:nvSpPr>
@@ -39180,7 +39378,7 @@
       </p:sp>
       <p:sp>
         <p:nvSpPr>
-          <p:cNvPr id="728" name="Google Shape;728;p31"/>
+          <p:cNvPr id="726" name="Google Shape;726;p31"/>
           <p:cNvSpPr/>
           <p:nvPr/>
         </p:nvSpPr>
@@ -39256,7 +39454,7 @@
       </p:sp>
       <p:sp>
         <p:nvSpPr>
-          <p:cNvPr id="729" name="Google Shape;729;p31"/>
+          <p:cNvPr id="727" name="Google Shape;727;p31"/>
           <p:cNvSpPr txBox="1"/>
           <p:nvPr/>
         </p:nvSpPr>
@@ -39402,7 +39600,7 @@
       </p:sp>
       <p:sp>
         <p:nvSpPr>
-          <p:cNvPr id="730" name="Google Shape;730;p31"/>
+          <p:cNvPr id="728" name="Google Shape;728;p31"/>
           <p:cNvSpPr txBox="1"/>
           <p:nvPr/>
         </p:nvSpPr>
@@ -39468,7 +39666,7 @@
       </p:sp>
       <p:sp>
         <p:nvSpPr>
-          <p:cNvPr id="731" name="Google Shape;731;p31"/>
+          <p:cNvPr id="729" name="Google Shape;729;p31"/>
           <p:cNvSpPr/>
           <p:nvPr/>
         </p:nvSpPr>
@@ -39535,7 +39733,7 @@
       </p:sp>
       <p:sp>
         <p:nvSpPr>
-          <p:cNvPr id="732" name="Google Shape;732;p31"/>
+          <p:cNvPr id="730" name="Google Shape;730;p31"/>
           <p:cNvSpPr/>
           <p:nvPr/>
         </p:nvSpPr>
@@ -39611,7 +39809,7 @@
       </p:sp>
       <p:sp>
         <p:nvSpPr>
-          <p:cNvPr id="733" name="Google Shape;733;p31"/>
+          <p:cNvPr id="731" name="Google Shape;731;p31"/>
           <p:cNvSpPr txBox="1"/>
           <p:nvPr/>
         </p:nvSpPr>
@@ -39757,7 +39955,7 @@
       </p:sp>
       <p:sp>
         <p:nvSpPr>
-          <p:cNvPr id="734" name="Google Shape;734;p31"/>
+          <p:cNvPr id="732" name="Google Shape;732;p31"/>
           <p:cNvSpPr/>
           <p:nvPr/>
         </p:nvSpPr>
@@ -39824,7 +40022,7 @@
       </p:sp>
       <p:sp>
         <p:nvSpPr>
-          <p:cNvPr id="735" name="Google Shape;735;p31"/>
+          <p:cNvPr id="733" name="Google Shape;733;p31"/>
           <p:cNvSpPr/>
           <p:nvPr/>
         </p:nvSpPr>
@@ -39900,7 +40098,7 @@
       </p:sp>
       <p:sp>
         <p:nvSpPr>
-          <p:cNvPr id="736" name="Google Shape;736;p31"/>
+          <p:cNvPr id="734" name="Google Shape;734;p31"/>
           <p:cNvSpPr txBox="1"/>
           <p:nvPr/>
         </p:nvSpPr>
@@ -40046,7 +40244,7 @@
       </p:sp>
       <p:sp>
         <p:nvSpPr>
-          <p:cNvPr id="737" name="Google Shape;737;p31"/>
+          <p:cNvPr id="735" name="Google Shape;735;p31"/>
           <p:cNvSpPr txBox="1"/>
           <p:nvPr>
             <p:ph idx="4294967295" type="sldNum"/>
@@ -40121,7 +40319,7 @@
   <p:cSld>
     <p:spTree>
       <p:nvGrpSpPr>
-        <p:cNvPr id="742" name="Shape 742"/>
+        <p:cNvPr id="740" name="Shape 740"/>
         <p:cNvGrpSpPr/>
         <p:nvPr/>
       </p:nvGrpSpPr>
@@ -40135,7 +40333,7 @@
       </p:grpSpPr>
       <p:sp>
         <p:nvSpPr>
-          <p:cNvPr id="743" name="Google Shape;743;p32"/>
+          <p:cNvPr id="741" name="Google Shape;741;p32"/>
           <p:cNvSpPr txBox="1"/>
           <p:nvPr/>
         </p:nvSpPr>
@@ -40201,7 +40399,7 @@
       </p:sp>
       <p:sp>
         <p:nvSpPr>
-          <p:cNvPr id="744" name="Google Shape;744;p32"/>
+          <p:cNvPr id="742" name="Google Shape;742;p32"/>
           <p:cNvSpPr txBox="1"/>
           <p:nvPr/>
         </p:nvSpPr>
@@ -40267,7 +40465,7 @@
       </p:sp>
       <p:sp>
         <p:nvSpPr>
-          <p:cNvPr id="745" name="Google Shape;745;p32"/>
+          <p:cNvPr id="743" name="Google Shape;743;p32"/>
           <p:cNvSpPr txBox="1"/>
           <p:nvPr/>
         </p:nvSpPr>
@@ -40333,7 +40531,7 @@
       </p:sp>
       <p:sp>
         <p:nvSpPr>
-          <p:cNvPr id="746" name="Google Shape;746;p32"/>
+          <p:cNvPr id="744" name="Google Shape;744;p32"/>
           <p:cNvSpPr/>
           <p:nvPr/>
         </p:nvSpPr>
@@ -40400,7 +40598,7 @@
       </p:sp>
       <p:sp>
         <p:nvSpPr>
-          <p:cNvPr id="747" name="Google Shape;747;p32"/>
+          <p:cNvPr id="745" name="Google Shape;745;p32"/>
           <p:cNvSpPr txBox="1"/>
           <p:nvPr/>
         </p:nvSpPr>
@@ -40466,7 +40664,7 @@
       </p:sp>
       <p:sp>
         <p:nvSpPr>
-          <p:cNvPr id="748" name="Google Shape;748;p32"/>
+          <p:cNvPr id="746" name="Google Shape;746;p32"/>
           <p:cNvSpPr txBox="1"/>
           <p:nvPr/>
         </p:nvSpPr>
@@ -40532,7 +40730,7 @@
       </p:sp>
       <p:sp>
         <p:nvSpPr>
-          <p:cNvPr id="749" name="Google Shape;749;p32"/>
+          <p:cNvPr id="747" name="Google Shape;747;p32"/>
           <p:cNvSpPr/>
           <p:nvPr/>
         </p:nvSpPr>
@@ -40599,7 +40797,7 @@
       </p:sp>
       <p:sp>
         <p:nvSpPr>
-          <p:cNvPr id="750" name="Google Shape;750;p32"/>
+          <p:cNvPr id="748" name="Google Shape;748;p32"/>
           <p:cNvSpPr txBox="1"/>
           <p:nvPr/>
         </p:nvSpPr>
@@ -40665,7 +40863,7 @@
       </p:sp>
       <p:sp>
         <p:nvSpPr>
-          <p:cNvPr id="751" name="Google Shape;751;p32"/>
+          <p:cNvPr id="749" name="Google Shape;749;p32"/>
           <p:cNvSpPr txBox="1"/>
           <p:nvPr/>
         </p:nvSpPr>
@@ -40731,7 +40929,7 @@
       </p:sp>
       <p:sp>
         <p:nvSpPr>
-          <p:cNvPr id="752" name="Google Shape;752;p32"/>
+          <p:cNvPr id="750" name="Google Shape;750;p32"/>
           <p:cNvSpPr/>
           <p:nvPr/>
         </p:nvSpPr>
@@ -40798,7 +40996,7 @@
       </p:sp>
       <p:sp>
         <p:nvSpPr>
-          <p:cNvPr id="753" name="Google Shape;753;p32"/>
+          <p:cNvPr id="751" name="Google Shape;751;p32"/>
           <p:cNvSpPr txBox="1"/>
           <p:nvPr/>
         </p:nvSpPr>
@@ -40864,7 +41062,7 @@
       </p:sp>
       <p:sp>
         <p:nvSpPr>
-          <p:cNvPr id="754" name="Google Shape;754;p32"/>
+          <p:cNvPr id="752" name="Google Shape;752;p32"/>
           <p:cNvSpPr txBox="1"/>
           <p:nvPr/>
         </p:nvSpPr>
@@ -40930,7 +41128,7 @@
       </p:sp>
       <p:sp>
         <p:nvSpPr>
-          <p:cNvPr id="755" name="Google Shape;755;p32"/>
+          <p:cNvPr id="753" name="Google Shape;753;p32"/>
           <p:cNvSpPr/>
           <p:nvPr/>
         </p:nvSpPr>
@@ -40997,7 +41195,7 @@
       </p:sp>
       <p:sp>
         <p:nvSpPr>
-          <p:cNvPr id="756" name="Google Shape;756;p32"/>
+          <p:cNvPr id="754" name="Google Shape;754;p32"/>
           <p:cNvSpPr/>
           <p:nvPr/>
         </p:nvSpPr>
@@ -41073,7 +41271,7 @@
       </p:sp>
       <p:sp>
         <p:nvSpPr>
-          <p:cNvPr id="757" name="Google Shape;757;p32"/>
+          <p:cNvPr id="755" name="Google Shape;755;p32"/>
           <p:cNvSpPr txBox="1"/>
           <p:nvPr/>
         </p:nvSpPr>
@@ -41179,7 +41377,7 @@
       </p:sp>
       <p:sp>
         <p:nvSpPr>
-          <p:cNvPr id="758" name="Google Shape;758;p32"/>
+          <p:cNvPr id="756" name="Google Shape;756;p32"/>
           <p:cNvSpPr/>
           <p:nvPr/>
         </p:nvSpPr>
@@ -41246,7 +41444,7 @@
       </p:sp>
       <p:sp>
         <p:nvSpPr>
-          <p:cNvPr id="759" name="Google Shape;759;p32"/>
+          <p:cNvPr id="757" name="Google Shape;757;p32"/>
           <p:cNvSpPr/>
           <p:nvPr/>
         </p:nvSpPr>
@@ -41322,7 +41520,7 @@
       </p:sp>
       <p:sp>
         <p:nvSpPr>
-          <p:cNvPr id="760" name="Google Shape;760;p32"/>
+          <p:cNvPr id="758" name="Google Shape;758;p32"/>
           <p:cNvSpPr txBox="1"/>
           <p:nvPr/>
         </p:nvSpPr>
@@ -41428,7 +41626,7 @@
       </p:sp>
       <p:sp>
         <p:nvSpPr>
-          <p:cNvPr id="761" name="Google Shape;761;p32"/>
+          <p:cNvPr id="759" name="Google Shape;759;p32"/>
           <p:cNvSpPr/>
           <p:nvPr/>
         </p:nvSpPr>
@@ -41495,7 +41693,7 @@
       </p:sp>
       <p:pic>
         <p:nvPicPr>
-          <p:cNvPr descr="preencoded.png" id="762" name="Google Shape;762;p32"/>
+          <p:cNvPr descr="preencoded.png" id="760" name="Google Shape;760;p32"/>
           <p:cNvPicPr preferRelativeResize="0"/>
           <p:nvPr/>
         </p:nvPicPr>
@@ -41522,7 +41720,7 @@
       </p:pic>
       <p:sp>
         <p:nvSpPr>
-          <p:cNvPr id="763" name="Google Shape;763;p32"/>
+          <p:cNvPr id="761" name="Google Shape;761;p32"/>
           <p:cNvSpPr txBox="1"/>
           <p:nvPr/>
         </p:nvSpPr>
@@ -41600,7 +41798,7 @@
       </p:sp>
       <p:sp>
         <p:nvSpPr>
-          <p:cNvPr id="764" name="Google Shape;764;p32"/>
+          <p:cNvPr id="762" name="Google Shape;762;p32"/>
           <p:cNvSpPr txBox="1"/>
           <p:nvPr>
             <p:ph idx="4294967295" type="sldNum"/>
@@ -41675,7 +41873,7 @@
   <p:cSld>
     <p:spTree>
       <p:nvGrpSpPr>
-        <p:cNvPr id="769" name="Shape 769"/>
+        <p:cNvPr id="767" name="Shape 767"/>
         <p:cNvGrpSpPr/>
         <p:nvPr/>
       </p:nvGrpSpPr>
@@ -41689,7 +41887,7 @@
       </p:grpSpPr>
       <p:sp>
         <p:nvSpPr>
-          <p:cNvPr id="770" name="Google Shape;770;p33"/>
+          <p:cNvPr id="768" name="Google Shape;768;p33"/>
           <p:cNvSpPr txBox="1"/>
           <p:nvPr/>
         </p:nvSpPr>
@@ -41755,7 +41953,7 @@
       </p:sp>
       <p:sp>
         <p:nvSpPr>
-          <p:cNvPr id="771" name="Google Shape;771;p33"/>
+          <p:cNvPr id="769" name="Google Shape;769;p33"/>
           <p:cNvSpPr txBox="1"/>
           <p:nvPr/>
         </p:nvSpPr>
@@ -41821,7 +42019,7 @@
       </p:sp>
       <p:sp>
         <p:nvSpPr>
-          <p:cNvPr id="772" name="Google Shape;772;p33"/>
+          <p:cNvPr id="770" name="Google Shape;770;p33"/>
           <p:cNvSpPr/>
           <p:nvPr/>
         </p:nvSpPr>
@@ -41888,7 +42086,7 @@
       </p:sp>
       <p:sp>
         <p:nvSpPr>
-          <p:cNvPr id="773" name="Google Shape;773;p33"/>
+          <p:cNvPr id="771" name="Google Shape;771;p33"/>
           <p:cNvSpPr/>
           <p:nvPr/>
         </p:nvSpPr>
@@ -41953,7 +42151,7 @@
       </p:sp>
       <p:sp>
         <p:nvSpPr>
-          <p:cNvPr id="774" name="Google Shape;774;p33"/>
+          <p:cNvPr id="772" name="Google Shape;772;p33"/>
           <p:cNvSpPr txBox="1"/>
           <p:nvPr/>
         </p:nvSpPr>
@@ -42019,7 +42217,7 @@
       </p:sp>
       <p:sp>
         <p:nvSpPr>
-          <p:cNvPr id="775" name="Google Shape;775;p33"/>
+          <p:cNvPr id="773" name="Google Shape;773;p33"/>
           <p:cNvSpPr txBox="1"/>
           <p:nvPr/>
         </p:nvSpPr>
@@ -42085,7 +42283,7 @@
       </p:sp>
       <p:sp>
         <p:nvSpPr>
-          <p:cNvPr id="776" name="Google Shape;776;p33"/>
+          <p:cNvPr id="774" name="Google Shape;774;p33"/>
           <p:cNvSpPr/>
           <p:nvPr/>
         </p:nvSpPr>
@@ -42152,7 +42350,7 @@
       </p:sp>
       <p:sp>
         <p:nvSpPr>
-          <p:cNvPr id="777" name="Google Shape;777;p33"/>
+          <p:cNvPr id="775" name="Google Shape;775;p33"/>
           <p:cNvSpPr txBox="1"/>
           <p:nvPr/>
         </p:nvSpPr>
@@ -42218,7 +42416,7 @@
       </p:sp>
       <p:sp>
         <p:nvSpPr>
-          <p:cNvPr id="778" name="Google Shape;778;p33"/>
+          <p:cNvPr id="776" name="Google Shape;776;p33"/>
           <p:cNvSpPr/>
           <p:nvPr/>
         </p:nvSpPr>
@@ -42285,7 +42483,7 @@
       </p:sp>
       <p:sp>
         <p:nvSpPr>
-          <p:cNvPr id="779" name="Google Shape;779;p33"/>
+          <p:cNvPr id="777" name="Google Shape;777;p33"/>
           <p:cNvSpPr/>
           <p:nvPr/>
         </p:nvSpPr>
@@ -42350,7 +42548,7 @@
       </p:sp>
       <p:sp>
         <p:nvSpPr>
-          <p:cNvPr id="780" name="Google Shape;780;p33"/>
+          <p:cNvPr id="778" name="Google Shape;778;p33"/>
           <p:cNvSpPr txBox="1"/>
           <p:nvPr/>
         </p:nvSpPr>
@@ -42416,7 +42614,7 @@
       </p:sp>
       <p:sp>
         <p:nvSpPr>
-          <p:cNvPr id="781" name="Google Shape;781;p33"/>
+          <p:cNvPr id="779" name="Google Shape;779;p33"/>
           <p:cNvSpPr txBox="1"/>
           <p:nvPr/>
         </p:nvSpPr>
@@ -42482,7 +42680,7 @@
       </p:sp>
       <p:sp>
         <p:nvSpPr>
-          <p:cNvPr id="782" name="Google Shape;782;p33"/>
+          <p:cNvPr id="780" name="Google Shape;780;p33"/>
           <p:cNvSpPr/>
           <p:nvPr/>
         </p:nvSpPr>
@@ -42549,7 +42747,7 @@
       </p:sp>
       <p:sp>
         <p:nvSpPr>
-          <p:cNvPr id="783" name="Google Shape;783;p33"/>
+          <p:cNvPr id="781" name="Google Shape;781;p33"/>
           <p:cNvSpPr txBox="1"/>
           <p:nvPr/>
         </p:nvSpPr>
@@ -42615,7 +42813,7 @@
       </p:sp>
       <p:sp>
         <p:nvSpPr>
-          <p:cNvPr id="784" name="Google Shape;784;p33"/>
+          <p:cNvPr id="782" name="Google Shape;782;p33"/>
           <p:cNvSpPr/>
           <p:nvPr/>
         </p:nvSpPr>
@@ -42682,7 +42880,7 @@
       </p:sp>
       <p:sp>
         <p:nvSpPr>
-          <p:cNvPr id="785" name="Google Shape;785;p33"/>
+          <p:cNvPr id="783" name="Google Shape;783;p33"/>
           <p:cNvSpPr/>
           <p:nvPr/>
         </p:nvSpPr>
@@ -42747,7 +42945,7 @@
       </p:sp>
       <p:sp>
         <p:nvSpPr>
-          <p:cNvPr id="786" name="Google Shape;786;p33"/>
+          <p:cNvPr id="784" name="Google Shape;784;p33"/>
           <p:cNvSpPr txBox="1"/>
           <p:nvPr/>
         </p:nvSpPr>
@@ -42813,7 +43011,7 @@
       </p:sp>
       <p:sp>
         <p:nvSpPr>
-          <p:cNvPr id="787" name="Google Shape;787;p33"/>
+          <p:cNvPr id="785" name="Google Shape;785;p33"/>
           <p:cNvSpPr txBox="1"/>
           <p:nvPr/>
         </p:nvSpPr>
@@ -42879,7 +43077,7 @@
       </p:sp>
       <p:sp>
         <p:nvSpPr>
-          <p:cNvPr id="788" name="Google Shape;788;p33"/>
+          <p:cNvPr id="786" name="Google Shape;786;p33"/>
           <p:cNvSpPr/>
           <p:nvPr/>
         </p:nvSpPr>
@@ -42946,7 +43144,7 @@
       </p:sp>
       <p:sp>
         <p:nvSpPr>
-          <p:cNvPr id="789" name="Google Shape;789;p33"/>
+          <p:cNvPr id="787" name="Google Shape;787;p33"/>
           <p:cNvSpPr txBox="1"/>
           <p:nvPr/>
         </p:nvSpPr>
@@ -43012,7 +43210,7 @@
       </p:sp>
       <p:sp>
         <p:nvSpPr>
-          <p:cNvPr id="790" name="Google Shape;790;p33"/>
+          <p:cNvPr id="788" name="Google Shape;788;p33"/>
           <p:cNvSpPr/>
           <p:nvPr/>
         </p:nvSpPr>
@@ -43079,7 +43277,7 @@
       </p:sp>
       <p:sp>
         <p:nvSpPr>
-          <p:cNvPr id="791" name="Google Shape;791;p33"/>
+          <p:cNvPr id="789" name="Google Shape;789;p33"/>
           <p:cNvSpPr/>
           <p:nvPr/>
         </p:nvSpPr>
@@ -43144,7 +43342,7 @@
       </p:sp>
       <p:sp>
         <p:nvSpPr>
-          <p:cNvPr id="792" name="Google Shape;792;p33"/>
+          <p:cNvPr id="790" name="Google Shape;790;p33"/>
           <p:cNvSpPr txBox="1"/>
           <p:nvPr/>
         </p:nvSpPr>
@@ -43210,7 +43408,7 @@
       </p:sp>
       <p:sp>
         <p:nvSpPr>
-          <p:cNvPr id="793" name="Google Shape;793;p33"/>
+          <p:cNvPr id="791" name="Google Shape;791;p33"/>
           <p:cNvSpPr txBox="1"/>
           <p:nvPr/>
         </p:nvSpPr>
@@ -43276,7 +43474,7 @@
       </p:sp>
       <p:sp>
         <p:nvSpPr>
-          <p:cNvPr id="794" name="Google Shape;794;p33"/>
+          <p:cNvPr id="792" name="Google Shape;792;p33"/>
           <p:cNvSpPr/>
           <p:nvPr/>
         </p:nvSpPr>
@@ -43343,7 +43541,7 @@
       </p:sp>
       <p:sp>
         <p:nvSpPr>
-          <p:cNvPr id="795" name="Google Shape;795;p33"/>
+          <p:cNvPr id="793" name="Google Shape;793;p33"/>
           <p:cNvSpPr txBox="1"/>
           <p:nvPr/>
         </p:nvSpPr>
@@ -43409,7 +43607,7 @@
       </p:sp>
       <p:sp>
         <p:nvSpPr>
-          <p:cNvPr id="796" name="Google Shape;796;p33"/>
+          <p:cNvPr id="794" name="Google Shape;794;p33"/>
           <p:cNvSpPr txBox="1"/>
           <p:nvPr>
             <p:ph idx="4294967295" type="sldNum"/>
@@ -43510,7 +43708,7 @@
                                           </p:stCondLst>
                                         </p:cTn>
                                         <p:tgtEl>
-                                          <p:spTgt spid="777"/>
+                                          <p:spTgt spid="775"/>
                                         </p:tgtEl>
                                         <p:attrNameLst>
                                           <p:attrName>style.visibility</p:attrName>
@@ -43524,7 +43722,7 @@
                                       <p:cBhvr>
                                         <p:cTn dur="600"/>
                                         <p:tgtEl>
-                                          <p:spTgt spid="777"/>
+                                          <p:spTgt spid="775"/>
                                         </p:tgtEl>
                                       </p:cBhvr>
                                     </p:animEffect>
@@ -43563,7 +43761,7 @@
                                           </p:stCondLst>
                                         </p:cTn>
                                         <p:tgtEl>
-                                          <p:spTgt spid="783"/>
+                                          <p:spTgt spid="781"/>
                                         </p:tgtEl>
                                         <p:attrNameLst>
                                           <p:attrName>style.visibility</p:attrName>
@@ -43577,7 +43775,7 @@
                                       <p:cBhvr>
                                         <p:cTn dur="600"/>
                                         <p:tgtEl>
-                                          <p:spTgt spid="783"/>
+                                          <p:spTgt spid="781"/>
                                         </p:tgtEl>
                                       </p:cBhvr>
                                     </p:animEffect>
@@ -43616,7 +43814,7 @@
                                           </p:stCondLst>
                                         </p:cTn>
                                         <p:tgtEl>
-                                          <p:spTgt spid="789"/>
+                                          <p:spTgt spid="787"/>
                                         </p:tgtEl>
                                         <p:attrNameLst>
                                           <p:attrName>style.visibility</p:attrName>
@@ -43630,7 +43828,7 @@
                                       <p:cBhvr>
                                         <p:cTn dur="600"/>
                                         <p:tgtEl>
-                                          <p:spTgt spid="789"/>
+                                          <p:spTgt spid="787"/>
                                         </p:tgtEl>
                                       </p:cBhvr>
                                     </p:animEffect>
@@ -43669,7 +43867,7 @@
                                           </p:stCondLst>
                                         </p:cTn>
                                         <p:tgtEl>
-                                          <p:spTgt spid="795"/>
+                                          <p:spTgt spid="793"/>
                                         </p:tgtEl>
                                         <p:attrNameLst>
                                           <p:attrName>style.visibility</p:attrName>
@@ -43683,7 +43881,7 @@
                                       <p:cBhvr>
                                         <p:cTn dur="600"/>
                                         <p:tgtEl>
-                                          <p:spTgt spid="795"/>
+                                          <p:spTgt spid="793"/>
                                         </p:tgtEl>
                                       </p:cBhvr>
                                     </p:animEffect>
@@ -45260,7 +45458,7 @@
   <p:cSld>
     <p:spTree>
       <p:nvGrpSpPr>
-        <p:cNvPr id="801" name="Shape 801"/>
+        <p:cNvPr id="799" name="Shape 799"/>
         <p:cNvGrpSpPr/>
         <p:nvPr/>
       </p:nvGrpSpPr>
@@ -45274,7 +45472,7 @@
       </p:grpSpPr>
       <p:sp>
         <p:nvSpPr>
-          <p:cNvPr id="802" name="Google Shape;802;p34"/>
+          <p:cNvPr id="800" name="Google Shape;800;p34"/>
           <p:cNvSpPr txBox="1"/>
           <p:nvPr/>
         </p:nvSpPr>
@@ -45340,7 +45538,7 @@
       </p:sp>
       <p:sp>
         <p:nvSpPr>
-          <p:cNvPr id="803" name="Google Shape;803;p34"/>
+          <p:cNvPr id="801" name="Google Shape;801;p34"/>
           <p:cNvSpPr txBox="1"/>
           <p:nvPr/>
         </p:nvSpPr>
@@ -45406,7 +45604,7 @@
       </p:sp>
       <p:sp>
         <p:nvSpPr>
-          <p:cNvPr id="804" name="Google Shape;804;p34"/>
+          <p:cNvPr id="802" name="Google Shape;802;p34"/>
           <p:cNvSpPr txBox="1"/>
           <p:nvPr/>
         </p:nvSpPr>
@@ -45472,7 +45670,7 @@
       </p:sp>
       <p:sp>
         <p:nvSpPr>
-          <p:cNvPr id="805" name="Google Shape;805;p34"/>
+          <p:cNvPr id="803" name="Google Shape;803;p34"/>
           <p:cNvSpPr/>
           <p:nvPr/>
         </p:nvSpPr>
@@ -45539,7 +45737,7 @@
       </p:sp>
       <p:sp>
         <p:nvSpPr>
-          <p:cNvPr id="806" name="Google Shape;806;p34"/>
+          <p:cNvPr id="804" name="Google Shape;804;p34"/>
           <p:cNvSpPr/>
           <p:nvPr/>
         </p:nvSpPr>
@@ -45604,7 +45802,7 @@
       </p:sp>
       <p:pic>
         <p:nvPicPr>
-          <p:cNvPr descr="preencoded.png" id="807" name="Google Shape;807;p34"/>
+          <p:cNvPr descr="preencoded.png" id="805" name="Google Shape;805;p34"/>
           <p:cNvPicPr preferRelativeResize="0"/>
           <p:nvPr/>
         </p:nvPicPr>
@@ -45631,7 +45829,7 @@
       </p:pic>
       <p:sp>
         <p:nvSpPr>
-          <p:cNvPr id="808" name="Google Shape;808;p34"/>
+          <p:cNvPr id="806" name="Google Shape;806;p34"/>
           <p:cNvSpPr txBox="1"/>
           <p:nvPr/>
         </p:nvSpPr>
@@ -45697,7 +45895,7 @@
       </p:sp>
       <p:sp>
         <p:nvSpPr>
-          <p:cNvPr id="809" name="Google Shape;809;p34"/>
+          <p:cNvPr id="807" name="Google Shape;807;p34"/>
           <p:cNvSpPr txBox="1"/>
           <p:nvPr/>
         </p:nvSpPr>
@@ -45763,7 +45961,7 @@
       </p:sp>
       <p:sp>
         <p:nvSpPr>
-          <p:cNvPr id="810" name="Google Shape;810;p34"/>
+          <p:cNvPr id="808" name="Google Shape;808;p34"/>
           <p:cNvSpPr/>
           <p:nvPr/>
         </p:nvSpPr>
@@ -45839,7 +46037,7 @@
       </p:sp>
       <p:sp>
         <p:nvSpPr>
-          <p:cNvPr id="811" name="Google Shape;811;p34"/>
+          <p:cNvPr id="809" name="Google Shape;809;p34"/>
           <p:cNvSpPr/>
           <p:nvPr/>
         </p:nvSpPr>
@@ -45906,7 +46104,7 @@
       </p:sp>
       <p:sp>
         <p:nvSpPr>
-          <p:cNvPr id="812" name="Google Shape;812;p34"/>
+          <p:cNvPr id="810" name="Google Shape;810;p34"/>
           <p:cNvSpPr/>
           <p:nvPr/>
         </p:nvSpPr>
@@ -45971,7 +46169,7 @@
       </p:sp>
       <p:sp>
         <p:nvSpPr>
-          <p:cNvPr id="813" name="Google Shape;813;p34"/>
+          <p:cNvPr id="811" name="Google Shape;811;p34"/>
           <p:cNvSpPr txBox="1"/>
           <p:nvPr/>
         </p:nvSpPr>
@@ -46037,7 +46235,7 @@
       </p:sp>
       <p:sp>
         <p:nvSpPr>
-          <p:cNvPr id="814" name="Google Shape;814;p34"/>
+          <p:cNvPr id="812" name="Google Shape;812;p34"/>
           <p:cNvSpPr txBox="1"/>
           <p:nvPr/>
         </p:nvSpPr>
@@ -46103,7 +46301,7 @@
       </p:sp>
       <p:sp>
         <p:nvSpPr>
-          <p:cNvPr id="815" name="Google Shape;815;p34"/>
+          <p:cNvPr id="813" name="Google Shape;813;p34"/>
           <p:cNvSpPr txBox="1"/>
           <p:nvPr/>
         </p:nvSpPr>
@@ -46169,7 +46367,7 @@
       </p:sp>
       <p:sp>
         <p:nvSpPr>
-          <p:cNvPr id="816" name="Google Shape;816;p34"/>
+          <p:cNvPr id="814" name="Google Shape;814;p34"/>
           <p:cNvSpPr/>
           <p:nvPr/>
         </p:nvSpPr>
@@ -46236,7 +46434,7 @@
       </p:sp>
       <p:sp>
         <p:nvSpPr>
-          <p:cNvPr id="817" name="Google Shape;817;p34"/>
+          <p:cNvPr id="815" name="Google Shape;815;p34"/>
           <p:cNvSpPr/>
           <p:nvPr/>
         </p:nvSpPr>
@@ -46301,7 +46499,7 @@
       </p:sp>
       <p:sp>
         <p:nvSpPr>
-          <p:cNvPr id="818" name="Google Shape;818;p34"/>
+          <p:cNvPr id="816" name="Google Shape;816;p34"/>
           <p:cNvSpPr txBox="1"/>
           <p:nvPr/>
         </p:nvSpPr>
@@ -46367,7 +46565,7 @@
       </p:sp>
       <p:sp>
         <p:nvSpPr>
-          <p:cNvPr id="819" name="Google Shape;819;p34"/>
+          <p:cNvPr id="817" name="Google Shape;817;p34"/>
           <p:cNvSpPr txBox="1"/>
           <p:nvPr/>
         </p:nvSpPr>
@@ -46433,7 +46631,7 @@
       </p:sp>
       <p:sp>
         <p:nvSpPr>
-          <p:cNvPr id="820" name="Google Shape;820;p34"/>
+          <p:cNvPr id="818" name="Google Shape;818;p34"/>
           <p:cNvSpPr txBox="1"/>
           <p:nvPr/>
         </p:nvSpPr>
@@ -46499,7 +46697,7 @@
       </p:sp>
       <p:sp>
         <p:nvSpPr>
-          <p:cNvPr id="821" name="Google Shape;821;p34"/>
+          <p:cNvPr id="819" name="Google Shape;819;p34"/>
           <p:cNvSpPr/>
           <p:nvPr/>
         </p:nvSpPr>
@@ -46566,7 +46764,7 @@
       </p:sp>
       <p:sp>
         <p:nvSpPr>
-          <p:cNvPr id="822" name="Google Shape;822;p34"/>
+          <p:cNvPr id="820" name="Google Shape;820;p34"/>
           <p:cNvSpPr/>
           <p:nvPr/>
         </p:nvSpPr>
@@ -46631,7 +46829,7 @@
       </p:sp>
       <p:sp>
         <p:nvSpPr>
-          <p:cNvPr id="823" name="Google Shape;823;p34"/>
+          <p:cNvPr id="821" name="Google Shape;821;p34"/>
           <p:cNvSpPr txBox="1"/>
           <p:nvPr/>
         </p:nvSpPr>
@@ -46697,7 +46895,7 @@
       </p:sp>
       <p:sp>
         <p:nvSpPr>
-          <p:cNvPr id="824" name="Google Shape;824;p34"/>
+          <p:cNvPr id="822" name="Google Shape;822;p34"/>
           <p:cNvSpPr txBox="1"/>
           <p:nvPr/>
         </p:nvSpPr>
@@ -46763,7 +46961,7 @@
       </p:sp>
       <p:sp>
         <p:nvSpPr>
-          <p:cNvPr id="825" name="Google Shape;825;p34"/>
+          <p:cNvPr id="823" name="Google Shape;823;p34"/>
           <p:cNvSpPr txBox="1"/>
           <p:nvPr/>
         </p:nvSpPr>
@@ -46829,7 +47027,7 @@
       </p:sp>
       <p:sp>
         <p:nvSpPr>
-          <p:cNvPr id="826" name="Google Shape;826;p34"/>
+          <p:cNvPr id="824" name="Google Shape;824;p34"/>
           <p:cNvSpPr/>
           <p:nvPr/>
         </p:nvSpPr>
@@ -46896,7 +47094,7 @@
       </p:sp>
       <p:pic>
         <p:nvPicPr>
-          <p:cNvPr descr="preencoded.png" id="827" name="Google Shape;827;p34"/>
+          <p:cNvPr descr="preencoded.png" id="825" name="Google Shape;825;p34"/>
           <p:cNvPicPr preferRelativeResize="0"/>
           <p:nvPr/>
         </p:nvPicPr>
@@ -46923,7 +47121,7 @@
       </p:pic>
       <p:sp>
         <p:nvSpPr>
-          <p:cNvPr id="828" name="Google Shape;828;p34"/>
+          <p:cNvPr id="826" name="Google Shape;826;p34"/>
           <p:cNvSpPr txBox="1"/>
           <p:nvPr/>
         </p:nvSpPr>
@@ -47001,7 +47199,7 @@
       </p:sp>
       <p:sp>
         <p:nvSpPr>
-          <p:cNvPr id="829" name="Google Shape;829;p34"/>
+          <p:cNvPr id="827" name="Google Shape;827;p34"/>
           <p:cNvSpPr txBox="1"/>
           <p:nvPr>
             <p:ph idx="4294967295" type="sldNum"/>
@@ -47076,7 +47274,7 @@
   <p:cSld>
     <p:spTree>
       <p:nvGrpSpPr>
-        <p:cNvPr id="834" name="Shape 834"/>
+        <p:cNvPr id="832" name="Shape 832"/>
         <p:cNvGrpSpPr/>
         <p:nvPr/>
       </p:nvGrpSpPr>
@@ -47090,7 +47288,7 @@
       </p:grpSpPr>
       <p:sp>
         <p:nvSpPr>
-          <p:cNvPr id="835" name="Google Shape;835;p35"/>
+          <p:cNvPr id="833" name="Google Shape;833;p35"/>
           <p:cNvSpPr txBox="1"/>
           <p:nvPr/>
         </p:nvSpPr>
@@ -47156,7 +47354,7 @@
       </p:sp>
       <p:sp>
         <p:nvSpPr>
-          <p:cNvPr id="836" name="Google Shape;836;p35"/>
+          <p:cNvPr id="834" name="Google Shape;834;p35"/>
           <p:cNvSpPr txBox="1"/>
           <p:nvPr/>
         </p:nvSpPr>
@@ -47222,7 +47420,7 @@
       </p:sp>
       <p:sp>
         <p:nvSpPr>
-          <p:cNvPr id="837" name="Google Shape;837;p35"/>
+          <p:cNvPr id="835" name="Google Shape;835;p35"/>
           <p:cNvSpPr txBox="1"/>
           <p:nvPr/>
         </p:nvSpPr>
@@ -47288,7 +47486,7 @@
       </p:sp>
       <p:sp>
         <p:nvSpPr>
-          <p:cNvPr id="838" name="Google Shape;838;p35"/>
+          <p:cNvPr id="836" name="Google Shape;836;p35"/>
           <p:cNvSpPr/>
           <p:nvPr/>
         </p:nvSpPr>
@@ -47355,7 +47553,7 @@
       </p:sp>
       <p:sp>
         <p:nvSpPr>
-          <p:cNvPr id="839" name="Google Shape;839;p35"/>
+          <p:cNvPr id="837" name="Google Shape;837;p35"/>
           <p:cNvSpPr/>
           <p:nvPr/>
         </p:nvSpPr>
@@ -47420,7 +47618,7 @@
       </p:sp>
       <p:pic>
         <p:nvPicPr>
-          <p:cNvPr descr="/tmp/claude-0/-workspace-training/3ce5cff6-cccf-5f33-b0ee-0b147a55120e/scratchpad/img9/ill9.png" id="840" name="Google Shape;840;p35"/>
+          <p:cNvPr descr="/tmp/claude-0/-workspace-training/3ce5cff6-cccf-5f33-b0ee-0b147a55120e/scratchpad/img9/ill9.png" id="838" name="Google Shape;838;p35"/>
           <p:cNvPicPr preferRelativeResize="0"/>
           <p:nvPr/>
         </p:nvPicPr>
@@ -47447,7 +47645,7 @@
       </p:pic>
       <p:sp>
         <p:nvSpPr>
-          <p:cNvPr id="841" name="Google Shape;841;p35"/>
+          <p:cNvPr id="839" name="Google Shape;839;p35"/>
           <p:cNvSpPr/>
           <p:nvPr/>
         </p:nvSpPr>
@@ -47512,7 +47710,7 @@
       </p:sp>
       <p:sp>
         <p:nvSpPr>
-          <p:cNvPr id="842" name="Google Shape;842;p35"/>
+          <p:cNvPr id="840" name="Google Shape;840;p35"/>
           <p:cNvSpPr/>
           <p:nvPr/>
         </p:nvSpPr>
@@ -47577,7 +47775,7 @@
       </p:sp>
       <p:sp>
         <p:nvSpPr>
-          <p:cNvPr id="843" name="Google Shape;843;p35"/>
+          <p:cNvPr id="841" name="Google Shape;841;p35"/>
           <p:cNvSpPr/>
           <p:nvPr/>
         </p:nvSpPr>
@@ -47642,7 +47840,7 @@
       </p:sp>
       <p:sp>
         <p:nvSpPr>
-          <p:cNvPr id="844" name="Google Shape;844;p35"/>
+          <p:cNvPr id="842" name="Google Shape;842;p35"/>
           <p:cNvSpPr/>
           <p:nvPr/>
         </p:nvSpPr>
@@ -47707,7 +47905,7 @@
       </p:sp>
       <p:sp>
         <p:nvSpPr>
-          <p:cNvPr id="845" name="Google Shape;845;p35"/>
+          <p:cNvPr id="843" name="Google Shape;843;p35"/>
           <p:cNvSpPr/>
           <p:nvPr/>
         </p:nvSpPr>
@@ -47772,7 +47970,7 @@
       </p:sp>
       <p:sp>
         <p:nvSpPr>
-          <p:cNvPr id="846" name="Google Shape;846;p35"/>
+          <p:cNvPr id="844" name="Google Shape;844;p35"/>
           <p:cNvSpPr/>
           <p:nvPr/>
         </p:nvSpPr>
@@ -47837,7 +48035,7 @@
       </p:sp>
       <p:sp>
         <p:nvSpPr>
-          <p:cNvPr id="847" name="Google Shape;847;p35"/>
+          <p:cNvPr id="845" name="Google Shape;845;p35"/>
           <p:cNvSpPr txBox="1"/>
           <p:nvPr>
             <p:ph idx="4294967295" type="sldNum"/>
@@ -52291,7 +52489,7 @@
             <a:tbl>
               <a:tblPr>
                 <a:noFill/>
-                <a:tableStyleId>{55C1B0A7-102E-438F-9E1A-248C01C79337}</a:tableStyleId>
+                <a:tableStyleId>{571C05B3-F2F7-497A-A2A1-7750038E98FB}</a:tableStyleId>
               </a:tblPr>
               <a:tblGrid>
                 <a:gridCol w="3749050"/>
